--- a/chapter_04/figures/conus_domain_orography.pptx
+++ b/chapter_04/figures/conus_domain_orography.pptx
@@ -112,3221 +112,29 @@
 </p:presentation>
 </file>
 
-<file path=ppt/revisionInfo.xml><?xml version="1.0" encoding="utf-8"?>
-<p1510:revInfo xmlns:a="http://schemas.openxmlformats.org/drawingml/2006/main" xmlns:r="http://schemas.openxmlformats.org/officeDocument/2006/relationships" xmlns:p1510="http://schemas.microsoft.com/office/powerpoint/2015/10/main">
-  <p1510:revLst>
-    <p1510:client id="{1093EB27-9F30-4B4D-905C-2834195C41DA}" v="7" dt="2025-05-26T05:48:14.928"/>
-  </p1510:revLst>
-</p1510:revInfo>
-</file>
-
 <file path=ppt/changesInfos/changesInfo1.xml><?xml version="1.0" encoding="utf-8"?>
 <pc:chgInfo xmlns:a="http://schemas.openxmlformats.org/drawingml/2006/main" xmlns:r="http://schemas.openxmlformats.org/officeDocument/2006/relationships" xmlns:ac="http://schemas.microsoft.com/office/drawing/2013/main/command" xmlns:pc="http://schemas.microsoft.com/office/powerpoint/2013/main/command">
   <pc:docChgLst>
-    <pc:chgData name="Fatima Pillosu" userId="a6295d4dc9e22643" providerId="LiveId" clId="{1093EB27-9F30-4B4D-905C-2834195C41DA}"/>
-    <pc:docChg chg="undo custSel modSld">
-      <pc:chgData name="Fatima Pillosu" userId="a6295d4dc9e22643" providerId="LiveId" clId="{1093EB27-9F30-4B4D-905C-2834195C41DA}" dt="2025-05-26T06:01:08.471" v="328" actId="207"/>
+    <pc:chgData name="Fatima Pillosu" userId="a6295d4dc9e22643" providerId="LiveId" clId="{87453732-75AC-4426-B5D3-B7C69C2D4F54}"/>
+    <pc:docChg chg="modSld">
+      <pc:chgData name="Fatima Pillosu" userId="a6295d4dc9e22643" providerId="LiveId" clId="{87453732-75AC-4426-B5D3-B7C69C2D4F54}" dt="2026-01-19T16:01:29.140" v="0" actId="20577"/>
       <pc:docMkLst>
         <pc:docMk/>
       </pc:docMkLst>
-      <pc:sldChg chg="addSp delSp modSp mod">
-        <pc:chgData name="Fatima Pillosu" userId="a6295d4dc9e22643" providerId="LiveId" clId="{1093EB27-9F30-4B4D-905C-2834195C41DA}" dt="2025-05-26T06:01:08.471" v="328" actId="207"/>
+      <pc:sldChg chg="modSp mod">
+        <pc:chgData name="Fatima Pillosu" userId="a6295d4dc9e22643" providerId="LiveId" clId="{87453732-75AC-4426-B5D3-B7C69C2D4F54}" dt="2026-01-19T16:01:29.140" v="0" actId="20577"/>
         <pc:sldMkLst>
           <pc:docMk/>
           <pc:sldMk cId="2416666445" sldId="256"/>
         </pc:sldMkLst>
-        <pc:spChg chg="add del">
-          <ac:chgData name="Fatima Pillosu" userId="a6295d4dc9e22643" providerId="LiveId" clId="{1093EB27-9F30-4B4D-905C-2834195C41DA}" dt="2025-05-14T13:43:15.698" v="39" actId="478"/>
-          <ac:spMkLst>
-            <pc:docMk/>
-            <pc:sldMk cId="2416666445" sldId="256"/>
-            <ac:spMk id="2" creationId="{78813BBD-DA02-790E-6885-3D68FE8E134E}"/>
-          </ac:spMkLst>
-        </pc:spChg>
-        <pc:spChg chg="add del mod">
-          <ac:chgData name="Fatima Pillosu" userId="a6295d4dc9e22643" providerId="LiveId" clId="{1093EB27-9F30-4B4D-905C-2834195C41DA}" dt="2025-05-26T05:42:15.667" v="42" actId="21"/>
-          <ac:spMkLst>
-            <pc:docMk/>
-            <pc:sldMk cId="2416666445" sldId="256"/>
-            <ac:spMk id="5" creationId="{384D6C06-DC18-FF34-E84C-3BC146A8D3F9}"/>
-          </ac:spMkLst>
-        </pc:spChg>
-        <pc:spChg chg="add del mod">
-          <ac:chgData name="Fatima Pillosu" userId="a6295d4dc9e22643" providerId="LiveId" clId="{1093EB27-9F30-4B4D-905C-2834195C41DA}" dt="2025-05-26T05:42:15.667" v="42" actId="21"/>
-          <ac:spMkLst>
-            <pc:docMk/>
-            <pc:sldMk cId="2416666445" sldId="256"/>
-            <ac:spMk id="6" creationId="{083AEDDC-E5EB-E07A-CF91-E947C367E6C5}"/>
-          </ac:spMkLst>
-        </pc:spChg>
-        <pc:spChg chg="add del mod">
-          <ac:chgData name="Fatima Pillosu" userId="a6295d4dc9e22643" providerId="LiveId" clId="{1093EB27-9F30-4B4D-905C-2834195C41DA}" dt="2025-05-26T05:42:15.667" v="42" actId="21"/>
-          <ac:spMkLst>
-            <pc:docMk/>
-            <pc:sldMk cId="2416666445" sldId="256"/>
-            <ac:spMk id="7" creationId="{7EAFBB19-EFE8-1704-7506-55700BFD22E4}"/>
-          </ac:spMkLst>
-        </pc:spChg>
-        <pc:spChg chg="add del mod">
-          <ac:chgData name="Fatima Pillosu" userId="a6295d4dc9e22643" providerId="LiveId" clId="{1093EB27-9F30-4B4D-905C-2834195C41DA}" dt="2025-05-26T05:42:15.667" v="42" actId="21"/>
-          <ac:spMkLst>
-            <pc:docMk/>
-            <pc:sldMk cId="2416666445" sldId="256"/>
-            <ac:spMk id="8" creationId="{08E525C9-8B8B-856F-6464-CD2A9FEC19DD}"/>
-          </ac:spMkLst>
-        </pc:spChg>
-        <pc:spChg chg="add del mod">
-          <ac:chgData name="Fatima Pillosu" userId="a6295d4dc9e22643" providerId="LiveId" clId="{1093EB27-9F30-4B4D-905C-2834195C41DA}" dt="2025-05-26T05:42:15.667" v="42" actId="21"/>
-          <ac:spMkLst>
-            <pc:docMk/>
-            <pc:sldMk cId="2416666445" sldId="256"/>
-            <ac:spMk id="9" creationId="{823987BF-6FA7-EC5E-C5ED-325313D2AE59}"/>
-          </ac:spMkLst>
-        </pc:spChg>
-        <pc:spChg chg="add del mod">
-          <ac:chgData name="Fatima Pillosu" userId="a6295d4dc9e22643" providerId="LiveId" clId="{1093EB27-9F30-4B4D-905C-2834195C41DA}" dt="2025-05-26T05:42:15.667" v="42" actId="21"/>
-          <ac:spMkLst>
-            <pc:docMk/>
-            <pc:sldMk cId="2416666445" sldId="256"/>
-            <ac:spMk id="10" creationId="{26903909-39B6-BA49-59C4-AF4507DF29BF}"/>
-          </ac:spMkLst>
-        </pc:spChg>
-        <pc:spChg chg="add del mod">
-          <ac:chgData name="Fatima Pillosu" userId="a6295d4dc9e22643" providerId="LiveId" clId="{1093EB27-9F30-4B4D-905C-2834195C41DA}" dt="2025-05-26T05:42:15.667" v="42" actId="21"/>
-          <ac:spMkLst>
-            <pc:docMk/>
-            <pc:sldMk cId="2416666445" sldId="256"/>
-            <ac:spMk id="11" creationId="{0C834787-FEEB-B977-952A-288699762B58}"/>
-          </ac:spMkLst>
-        </pc:spChg>
-        <pc:spChg chg="add del mod">
-          <ac:chgData name="Fatima Pillosu" userId="a6295d4dc9e22643" providerId="LiveId" clId="{1093EB27-9F30-4B4D-905C-2834195C41DA}" dt="2025-05-26T05:42:15.667" v="42" actId="21"/>
-          <ac:spMkLst>
-            <pc:docMk/>
-            <pc:sldMk cId="2416666445" sldId="256"/>
-            <ac:spMk id="12" creationId="{61400BA6-3D3A-1190-AD65-CF1147A3BCBC}"/>
-          </ac:spMkLst>
-        </pc:spChg>
-        <pc:spChg chg="add del mod">
-          <ac:chgData name="Fatima Pillosu" userId="a6295d4dc9e22643" providerId="LiveId" clId="{1093EB27-9F30-4B4D-905C-2834195C41DA}" dt="2025-05-26T05:42:15.667" v="42" actId="21"/>
-          <ac:spMkLst>
-            <pc:docMk/>
-            <pc:sldMk cId="2416666445" sldId="256"/>
-            <ac:spMk id="13" creationId="{F77F9084-F223-ED65-669A-F6F51F897BA2}"/>
-          </ac:spMkLst>
-        </pc:spChg>
-        <pc:spChg chg="add del mod">
-          <ac:chgData name="Fatima Pillosu" userId="a6295d4dc9e22643" providerId="LiveId" clId="{1093EB27-9F30-4B4D-905C-2834195C41DA}" dt="2025-05-26T05:42:15.667" v="42" actId="21"/>
-          <ac:spMkLst>
-            <pc:docMk/>
-            <pc:sldMk cId="2416666445" sldId="256"/>
-            <ac:spMk id="14" creationId="{E58B7622-486E-AF0A-77FA-6A257F911DE9}"/>
-          </ac:spMkLst>
-        </pc:spChg>
-        <pc:spChg chg="add del mod">
-          <ac:chgData name="Fatima Pillosu" userId="a6295d4dc9e22643" providerId="LiveId" clId="{1093EB27-9F30-4B4D-905C-2834195C41DA}" dt="2025-05-26T05:42:15.667" v="42" actId="21"/>
-          <ac:spMkLst>
-            <pc:docMk/>
-            <pc:sldMk cId="2416666445" sldId="256"/>
-            <ac:spMk id="15" creationId="{53D672B0-A6EA-4276-A5B9-C5164A9A326F}"/>
-          </ac:spMkLst>
-        </pc:spChg>
-        <pc:spChg chg="add del mod">
-          <ac:chgData name="Fatima Pillosu" userId="a6295d4dc9e22643" providerId="LiveId" clId="{1093EB27-9F30-4B4D-905C-2834195C41DA}" dt="2025-05-26T05:42:15.667" v="42" actId="21"/>
-          <ac:spMkLst>
-            <pc:docMk/>
-            <pc:sldMk cId="2416666445" sldId="256"/>
-            <ac:spMk id="16" creationId="{FC073318-9596-D679-740B-BA408BA68B78}"/>
-          </ac:spMkLst>
-        </pc:spChg>
-        <pc:spChg chg="add del mod">
-          <ac:chgData name="Fatima Pillosu" userId="a6295d4dc9e22643" providerId="LiveId" clId="{1093EB27-9F30-4B4D-905C-2834195C41DA}" dt="2025-05-26T05:42:15.667" v="42" actId="21"/>
-          <ac:spMkLst>
-            <pc:docMk/>
-            <pc:sldMk cId="2416666445" sldId="256"/>
-            <ac:spMk id="17" creationId="{95D8CFCC-5F17-C4D6-6F70-8501F37736D8}"/>
-          </ac:spMkLst>
-        </pc:spChg>
-        <pc:spChg chg="add del mod">
-          <ac:chgData name="Fatima Pillosu" userId="a6295d4dc9e22643" providerId="LiveId" clId="{1093EB27-9F30-4B4D-905C-2834195C41DA}" dt="2025-05-26T05:42:15.667" v="42" actId="21"/>
-          <ac:spMkLst>
-            <pc:docMk/>
-            <pc:sldMk cId="2416666445" sldId="256"/>
-            <ac:spMk id="18" creationId="{E06CF797-8451-574D-21F0-384E8A3452B7}"/>
-          </ac:spMkLst>
-        </pc:spChg>
-        <pc:spChg chg="add del mod">
-          <ac:chgData name="Fatima Pillosu" userId="a6295d4dc9e22643" providerId="LiveId" clId="{1093EB27-9F30-4B4D-905C-2834195C41DA}" dt="2025-05-26T05:42:15.667" v="42" actId="21"/>
-          <ac:spMkLst>
-            <pc:docMk/>
-            <pc:sldMk cId="2416666445" sldId="256"/>
-            <ac:spMk id="19" creationId="{CFB3D8FA-6A39-82FF-7103-9C3B87E3F64B}"/>
-          </ac:spMkLst>
-        </pc:spChg>
-        <pc:spChg chg="add del mod">
-          <ac:chgData name="Fatima Pillosu" userId="a6295d4dc9e22643" providerId="LiveId" clId="{1093EB27-9F30-4B4D-905C-2834195C41DA}" dt="2025-05-26T05:42:15.667" v="42" actId="21"/>
-          <ac:spMkLst>
-            <pc:docMk/>
-            <pc:sldMk cId="2416666445" sldId="256"/>
-            <ac:spMk id="20" creationId="{5B2D0398-5206-B218-FB65-5E89CE52B185}"/>
-          </ac:spMkLst>
-        </pc:spChg>
-        <pc:spChg chg="add del mod">
-          <ac:chgData name="Fatima Pillosu" userId="a6295d4dc9e22643" providerId="LiveId" clId="{1093EB27-9F30-4B4D-905C-2834195C41DA}" dt="2025-05-26T05:42:15.667" v="42" actId="21"/>
-          <ac:spMkLst>
-            <pc:docMk/>
-            <pc:sldMk cId="2416666445" sldId="256"/>
-            <ac:spMk id="21" creationId="{E8F93690-0FC3-3203-F616-27D0636BD86D}"/>
-          </ac:spMkLst>
-        </pc:spChg>
-        <pc:spChg chg="add del mod">
-          <ac:chgData name="Fatima Pillosu" userId="a6295d4dc9e22643" providerId="LiveId" clId="{1093EB27-9F30-4B4D-905C-2834195C41DA}" dt="2025-05-26T05:42:15.667" v="42" actId="21"/>
-          <ac:spMkLst>
-            <pc:docMk/>
-            <pc:sldMk cId="2416666445" sldId="256"/>
-            <ac:spMk id="22" creationId="{98EE0CB6-A0DD-61DA-6B6B-D4EC8957FF3D}"/>
-          </ac:spMkLst>
-        </pc:spChg>
-        <pc:spChg chg="add del mod">
-          <ac:chgData name="Fatima Pillosu" userId="a6295d4dc9e22643" providerId="LiveId" clId="{1093EB27-9F30-4B4D-905C-2834195C41DA}" dt="2025-05-26T05:42:15.667" v="42" actId="21"/>
-          <ac:spMkLst>
-            <pc:docMk/>
-            <pc:sldMk cId="2416666445" sldId="256"/>
-            <ac:spMk id="23" creationId="{5C604597-7B68-19A8-35F6-C8E80447309D}"/>
-          </ac:spMkLst>
-        </pc:spChg>
-        <pc:spChg chg="add del mod">
-          <ac:chgData name="Fatima Pillosu" userId="a6295d4dc9e22643" providerId="LiveId" clId="{1093EB27-9F30-4B4D-905C-2834195C41DA}" dt="2025-05-26T05:42:15.667" v="42" actId="21"/>
-          <ac:spMkLst>
-            <pc:docMk/>
-            <pc:sldMk cId="2416666445" sldId="256"/>
-            <ac:spMk id="24" creationId="{37EBCA7E-9713-7AE3-638B-C84D5A1C2253}"/>
-          </ac:spMkLst>
-        </pc:spChg>
-        <pc:spChg chg="add del mod">
-          <ac:chgData name="Fatima Pillosu" userId="a6295d4dc9e22643" providerId="LiveId" clId="{1093EB27-9F30-4B4D-905C-2834195C41DA}" dt="2025-05-26T05:42:15.667" v="42" actId="21"/>
-          <ac:spMkLst>
-            <pc:docMk/>
-            <pc:sldMk cId="2416666445" sldId="256"/>
-            <ac:spMk id="25" creationId="{65B70626-067E-1AE7-11BD-EC7DA8DABC28}"/>
-          </ac:spMkLst>
-        </pc:spChg>
-        <pc:spChg chg="add del mod">
-          <ac:chgData name="Fatima Pillosu" userId="a6295d4dc9e22643" providerId="LiveId" clId="{1093EB27-9F30-4B4D-905C-2834195C41DA}" dt="2025-05-26T05:42:15.667" v="42" actId="21"/>
-          <ac:spMkLst>
-            <pc:docMk/>
-            <pc:sldMk cId="2416666445" sldId="256"/>
-            <ac:spMk id="26" creationId="{C7BCE81D-7A63-8764-295C-1A6242CC4274}"/>
-          </ac:spMkLst>
-        </pc:spChg>
-        <pc:spChg chg="add del mod">
-          <ac:chgData name="Fatima Pillosu" userId="a6295d4dc9e22643" providerId="LiveId" clId="{1093EB27-9F30-4B4D-905C-2834195C41DA}" dt="2025-05-26T05:42:15.667" v="42" actId="21"/>
-          <ac:spMkLst>
-            <pc:docMk/>
-            <pc:sldMk cId="2416666445" sldId="256"/>
-            <ac:spMk id="27" creationId="{A6515F5F-2E20-7D13-537C-F772A00535F4}"/>
-          </ac:spMkLst>
-        </pc:spChg>
-        <pc:spChg chg="add del mod">
-          <ac:chgData name="Fatima Pillosu" userId="a6295d4dc9e22643" providerId="LiveId" clId="{1093EB27-9F30-4B4D-905C-2834195C41DA}" dt="2025-05-26T05:42:15.667" v="42" actId="21"/>
-          <ac:spMkLst>
-            <pc:docMk/>
-            <pc:sldMk cId="2416666445" sldId="256"/>
-            <ac:spMk id="28" creationId="{50B578E0-62E1-B8F6-ECD2-2E7AA0CF70F9}"/>
-          </ac:spMkLst>
-        </pc:spChg>
-        <pc:spChg chg="add del mod">
-          <ac:chgData name="Fatima Pillosu" userId="a6295d4dc9e22643" providerId="LiveId" clId="{1093EB27-9F30-4B4D-905C-2834195C41DA}" dt="2025-05-26T05:42:15.667" v="42" actId="21"/>
-          <ac:spMkLst>
-            <pc:docMk/>
-            <pc:sldMk cId="2416666445" sldId="256"/>
-            <ac:spMk id="29" creationId="{F4D19594-8958-5678-A91A-D009CFEE0A3F}"/>
-          </ac:spMkLst>
-        </pc:spChg>
-        <pc:spChg chg="add del mod">
-          <ac:chgData name="Fatima Pillosu" userId="a6295d4dc9e22643" providerId="LiveId" clId="{1093EB27-9F30-4B4D-905C-2834195C41DA}" dt="2025-05-26T05:42:15.667" v="42" actId="21"/>
-          <ac:spMkLst>
-            <pc:docMk/>
-            <pc:sldMk cId="2416666445" sldId="256"/>
-            <ac:spMk id="30" creationId="{5ED4F7E3-EC48-9668-BA84-2D97CF23BD85}"/>
-          </ac:spMkLst>
-        </pc:spChg>
-        <pc:spChg chg="add del mod">
-          <ac:chgData name="Fatima Pillosu" userId="a6295d4dc9e22643" providerId="LiveId" clId="{1093EB27-9F30-4B4D-905C-2834195C41DA}" dt="2025-05-26T05:42:15.667" v="42" actId="21"/>
-          <ac:spMkLst>
-            <pc:docMk/>
-            <pc:sldMk cId="2416666445" sldId="256"/>
-            <ac:spMk id="31" creationId="{0ECA7152-99C7-A2F4-E83D-4F855AAFA37C}"/>
-          </ac:spMkLst>
-        </pc:spChg>
-        <pc:spChg chg="add del mod">
-          <ac:chgData name="Fatima Pillosu" userId="a6295d4dc9e22643" providerId="LiveId" clId="{1093EB27-9F30-4B4D-905C-2834195C41DA}" dt="2025-05-26T05:42:15.667" v="42" actId="21"/>
-          <ac:spMkLst>
-            <pc:docMk/>
-            <pc:sldMk cId="2416666445" sldId="256"/>
-            <ac:spMk id="32" creationId="{9FA7FCAD-7DCD-492E-33EA-E8EA0A4B7A03}"/>
-          </ac:spMkLst>
-        </pc:spChg>
-        <pc:spChg chg="add del mod">
-          <ac:chgData name="Fatima Pillosu" userId="a6295d4dc9e22643" providerId="LiveId" clId="{1093EB27-9F30-4B4D-905C-2834195C41DA}" dt="2025-05-26T05:42:15.667" v="42" actId="21"/>
-          <ac:spMkLst>
-            <pc:docMk/>
-            <pc:sldMk cId="2416666445" sldId="256"/>
-            <ac:spMk id="33" creationId="{27112713-98E8-0868-E1E6-C5213A18CDB4}"/>
-          </ac:spMkLst>
-        </pc:spChg>
-        <pc:spChg chg="add del mod">
-          <ac:chgData name="Fatima Pillosu" userId="a6295d4dc9e22643" providerId="LiveId" clId="{1093EB27-9F30-4B4D-905C-2834195C41DA}" dt="2025-05-26T05:42:15.667" v="42" actId="21"/>
-          <ac:spMkLst>
-            <pc:docMk/>
-            <pc:sldMk cId="2416666445" sldId="256"/>
-            <ac:spMk id="34" creationId="{A9DF4E4E-4BD6-4A43-6D8D-57FA7E5B4C8A}"/>
-          </ac:spMkLst>
-        </pc:spChg>
-        <pc:spChg chg="add del mod">
-          <ac:chgData name="Fatima Pillosu" userId="a6295d4dc9e22643" providerId="LiveId" clId="{1093EB27-9F30-4B4D-905C-2834195C41DA}" dt="2025-05-26T05:42:15.667" v="42" actId="21"/>
-          <ac:spMkLst>
-            <pc:docMk/>
-            <pc:sldMk cId="2416666445" sldId="256"/>
-            <ac:spMk id="35" creationId="{F880BE35-27AF-2DCD-5D81-D484CE796AE1}"/>
-          </ac:spMkLst>
-        </pc:spChg>
-        <pc:spChg chg="add del mod">
-          <ac:chgData name="Fatima Pillosu" userId="a6295d4dc9e22643" providerId="LiveId" clId="{1093EB27-9F30-4B4D-905C-2834195C41DA}" dt="2025-05-26T05:42:15.667" v="42" actId="21"/>
-          <ac:spMkLst>
-            <pc:docMk/>
-            <pc:sldMk cId="2416666445" sldId="256"/>
-            <ac:spMk id="36" creationId="{EA8BFD8B-1858-9531-2319-F3352B9FCE3E}"/>
-          </ac:spMkLst>
-        </pc:spChg>
-        <pc:spChg chg="add del mod">
-          <ac:chgData name="Fatima Pillosu" userId="a6295d4dc9e22643" providerId="LiveId" clId="{1093EB27-9F30-4B4D-905C-2834195C41DA}" dt="2025-05-26T05:42:15.667" v="42" actId="21"/>
-          <ac:spMkLst>
-            <pc:docMk/>
-            <pc:sldMk cId="2416666445" sldId="256"/>
-            <ac:spMk id="37" creationId="{804E7FEC-AF83-FD28-4A16-70D6430EB6E5}"/>
-          </ac:spMkLst>
-        </pc:spChg>
-        <pc:spChg chg="add del mod">
-          <ac:chgData name="Fatima Pillosu" userId="a6295d4dc9e22643" providerId="LiveId" clId="{1093EB27-9F30-4B4D-905C-2834195C41DA}" dt="2025-05-26T05:42:15.667" v="42" actId="21"/>
-          <ac:spMkLst>
-            <pc:docMk/>
-            <pc:sldMk cId="2416666445" sldId="256"/>
-            <ac:spMk id="38" creationId="{F1AE0BC5-794B-D23C-A945-2D48666A380B}"/>
-          </ac:spMkLst>
-        </pc:spChg>
-        <pc:spChg chg="add del mod">
-          <ac:chgData name="Fatima Pillosu" userId="a6295d4dc9e22643" providerId="LiveId" clId="{1093EB27-9F30-4B4D-905C-2834195C41DA}" dt="2025-05-26T05:42:15.667" v="42" actId="21"/>
-          <ac:spMkLst>
-            <pc:docMk/>
-            <pc:sldMk cId="2416666445" sldId="256"/>
-            <ac:spMk id="39" creationId="{3848180B-A357-5916-14AE-BEBA0E61C958}"/>
-          </ac:spMkLst>
-        </pc:spChg>
-        <pc:spChg chg="add del mod">
-          <ac:chgData name="Fatima Pillosu" userId="a6295d4dc9e22643" providerId="LiveId" clId="{1093EB27-9F30-4B4D-905C-2834195C41DA}" dt="2025-05-26T05:42:15.667" v="42" actId="21"/>
-          <ac:spMkLst>
-            <pc:docMk/>
-            <pc:sldMk cId="2416666445" sldId="256"/>
-            <ac:spMk id="40" creationId="{F88C8933-F6FB-E197-23C5-6A6AC1467788}"/>
-          </ac:spMkLst>
-        </pc:spChg>
-        <pc:spChg chg="add del mod">
-          <ac:chgData name="Fatima Pillosu" userId="a6295d4dc9e22643" providerId="LiveId" clId="{1093EB27-9F30-4B4D-905C-2834195C41DA}" dt="2025-05-26T05:42:15.667" v="42" actId="21"/>
-          <ac:spMkLst>
-            <pc:docMk/>
-            <pc:sldMk cId="2416666445" sldId="256"/>
-            <ac:spMk id="41" creationId="{708DFDE3-CB83-C412-EE9B-B89348B18975}"/>
-          </ac:spMkLst>
-        </pc:spChg>
-        <pc:spChg chg="add del mod">
-          <ac:chgData name="Fatima Pillosu" userId="a6295d4dc9e22643" providerId="LiveId" clId="{1093EB27-9F30-4B4D-905C-2834195C41DA}" dt="2025-05-26T05:42:15.667" v="42" actId="21"/>
-          <ac:spMkLst>
-            <pc:docMk/>
-            <pc:sldMk cId="2416666445" sldId="256"/>
-            <ac:spMk id="42" creationId="{0A4512A2-4DC0-76EB-1C78-328A3FA136E0}"/>
-          </ac:spMkLst>
-        </pc:spChg>
-        <pc:spChg chg="add del mod">
-          <ac:chgData name="Fatima Pillosu" userId="a6295d4dc9e22643" providerId="LiveId" clId="{1093EB27-9F30-4B4D-905C-2834195C41DA}" dt="2025-05-26T05:42:15.667" v="42" actId="21"/>
-          <ac:spMkLst>
-            <pc:docMk/>
-            <pc:sldMk cId="2416666445" sldId="256"/>
-            <ac:spMk id="43" creationId="{AC1F07BA-7A38-7AE9-D91C-D217054E2654}"/>
-          </ac:spMkLst>
-        </pc:spChg>
-        <pc:spChg chg="add del mod">
-          <ac:chgData name="Fatima Pillosu" userId="a6295d4dc9e22643" providerId="LiveId" clId="{1093EB27-9F30-4B4D-905C-2834195C41DA}" dt="2025-05-26T05:42:15.667" v="42" actId="21"/>
-          <ac:spMkLst>
-            <pc:docMk/>
-            <pc:sldMk cId="2416666445" sldId="256"/>
-            <ac:spMk id="44" creationId="{7DD94525-DBC6-1FC2-0B07-84FAFBA131A8}"/>
-          </ac:spMkLst>
-        </pc:spChg>
-        <pc:spChg chg="add del mod">
-          <ac:chgData name="Fatima Pillosu" userId="a6295d4dc9e22643" providerId="LiveId" clId="{1093EB27-9F30-4B4D-905C-2834195C41DA}" dt="2025-05-26T05:42:15.667" v="42" actId="21"/>
-          <ac:spMkLst>
-            <pc:docMk/>
-            <pc:sldMk cId="2416666445" sldId="256"/>
-            <ac:spMk id="45" creationId="{50D9BC42-F1FE-87AB-F083-5C2242BD4E51}"/>
-          </ac:spMkLst>
-        </pc:spChg>
-        <pc:spChg chg="add del mod">
-          <ac:chgData name="Fatima Pillosu" userId="a6295d4dc9e22643" providerId="LiveId" clId="{1093EB27-9F30-4B4D-905C-2834195C41DA}" dt="2025-05-26T05:42:15.667" v="42" actId="21"/>
-          <ac:spMkLst>
-            <pc:docMk/>
-            <pc:sldMk cId="2416666445" sldId="256"/>
-            <ac:spMk id="46" creationId="{CA271F21-2E92-827F-B5C7-9933695D1A74}"/>
-          </ac:spMkLst>
-        </pc:spChg>
-        <pc:spChg chg="add del mod">
-          <ac:chgData name="Fatima Pillosu" userId="a6295d4dc9e22643" providerId="LiveId" clId="{1093EB27-9F30-4B4D-905C-2834195C41DA}" dt="2025-05-26T05:48:03.628" v="322" actId="21"/>
-          <ac:spMkLst>
-            <pc:docMk/>
-            <pc:sldMk cId="2416666445" sldId="256"/>
-            <ac:spMk id="48" creationId="{384D6C06-DC18-FF34-E84C-3BC146A8D3F9}"/>
-          </ac:spMkLst>
-        </pc:spChg>
-        <pc:spChg chg="add del mod">
-          <ac:chgData name="Fatima Pillosu" userId="a6295d4dc9e22643" providerId="LiveId" clId="{1093EB27-9F30-4B4D-905C-2834195C41DA}" dt="2025-05-26T05:48:03.628" v="322" actId="21"/>
-          <ac:spMkLst>
-            <pc:docMk/>
-            <pc:sldMk cId="2416666445" sldId="256"/>
-            <ac:spMk id="49" creationId="{083AEDDC-E5EB-E07A-CF91-E947C367E6C5}"/>
-          </ac:spMkLst>
-        </pc:spChg>
-        <pc:spChg chg="add del mod">
-          <ac:chgData name="Fatima Pillosu" userId="a6295d4dc9e22643" providerId="LiveId" clId="{1093EB27-9F30-4B4D-905C-2834195C41DA}" dt="2025-05-26T05:48:03.628" v="322" actId="21"/>
-          <ac:spMkLst>
-            <pc:docMk/>
-            <pc:sldMk cId="2416666445" sldId="256"/>
-            <ac:spMk id="50" creationId="{7EAFBB19-EFE8-1704-7506-55700BFD22E4}"/>
-          </ac:spMkLst>
-        </pc:spChg>
-        <pc:spChg chg="add del mod">
-          <ac:chgData name="Fatima Pillosu" userId="a6295d4dc9e22643" providerId="LiveId" clId="{1093EB27-9F30-4B4D-905C-2834195C41DA}" dt="2025-05-26T05:48:03.628" v="322" actId="21"/>
-          <ac:spMkLst>
-            <pc:docMk/>
-            <pc:sldMk cId="2416666445" sldId="256"/>
-            <ac:spMk id="51" creationId="{08E525C9-8B8B-856F-6464-CD2A9FEC19DD}"/>
-          </ac:spMkLst>
-        </pc:spChg>
-        <pc:spChg chg="add del mod">
-          <ac:chgData name="Fatima Pillosu" userId="a6295d4dc9e22643" providerId="LiveId" clId="{1093EB27-9F30-4B4D-905C-2834195C41DA}" dt="2025-05-26T05:48:03.628" v="322" actId="21"/>
-          <ac:spMkLst>
-            <pc:docMk/>
-            <pc:sldMk cId="2416666445" sldId="256"/>
-            <ac:spMk id="52" creationId="{823987BF-6FA7-EC5E-C5ED-325313D2AE59}"/>
-          </ac:spMkLst>
-        </pc:spChg>
-        <pc:spChg chg="add del mod">
-          <ac:chgData name="Fatima Pillosu" userId="a6295d4dc9e22643" providerId="LiveId" clId="{1093EB27-9F30-4B4D-905C-2834195C41DA}" dt="2025-05-26T05:48:03.628" v="322" actId="21"/>
-          <ac:spMkLst>
-            <pc:docMk/>
-            <pc:sldMk cId="2416666445" sldId="256"/>
-            <ac:spMk id="53" creationId="{26903909-39B6-BA49-59C4-AF4507DF29BF}"/>
-          </ac:spMkLst>
-        </pc:spChg>
-        <pc:spChg chg="add del mod">
-          <ac:chgData name="Fatima Pillosu" userId="a6295d4dc9e22643" providerId="LiveId" clId="{1093EB27-9F30-4B4D-905C-2834195C41DA}" dt="2025-05-26T05:48:03.628" v="322" actId="21"/>
-          <ac:spMkLst>
-            <pc:docMk/>
-            <pc:sldMk cId="2416666445" sldId="256"/>
-            <ac:spMk id="54" creationId="{0C834787-FEEB-B977-952A-288699762B58}"/>
-          </ac:spMkLst>
-        </pc:spChg>
-        <pc:spChg chg="add del mod">
-          <ac:chgData name="Fatima Pillosu" userId="a6295d4dc9e22643" providerId="LiveId" clId="{1093EB27-9F30-4B4D-905C-2834195C41DA}" dt="2025-05-26T05:48:03.628" v="322" actId="21"/>
-          <ac:spMkLst>
-            <pc:docMk/>
-            <pc:sldMk cId="2416666445" sldId="256"/>
-            <ac:spMk id="55" creationId="{61400BA6-3D3A-1190-AD65-CF1147A3BCBC}"/>
-          </ac:spMkLst>
-        </pc:spChg>
-        <pc:spChg chg="add del mod">
-          <ac:chgData name="Fatima Pillosu" userId="a6295d4dc9e22643" providerId="LiveId" clId="{1093EB27-9F30-4B4D-905C-2834195C41DA}" dt="2025-05-26T05:48:03.628" v="322" actId="21"/>
-          <ac:spMkLst>
-            <pc:docMk/>
-            <pc:sldMk cId="2416666445" sldId="256"/>
-            <ac:spMk id="56" creationId="{F77F9084-F223-ED65-669A-F6F51F897BA2}"/>
-          </ac:spMkLst>
-        </pc:spChg>
-        <pc:spChg chg="add del mod">
-          <ac:chgData name="Fatima Pillosu" userId="a6295d4dc9e22643" providerId="LiveId" clId="{1093EB27-9F30-4B4D-905C-2834195C41DA}" dt="2025-05-26T05:48:03.628" v="322" actId="21"/>
-          <ac:spMkLst>
-            <pc:docMk/>
-            <pc:sldMk cId="2416666445" sldId="256"/>
-            <ac:spMk id="57" creationId="{E58B7622-486E-AF0A-77FA-6A257F911DE9}"/>
-          </ac:spMkLst>
-        </pc:spChg>
-        <pc:spChg chg="add del mod">
-          <ac:chgData name="Fatima Pillosu" userId="a6295d4dc9e22643" providerId="LiveId" clId="{1093EB27-9F30-4B4D-905C-2834195C41DA}" dt="2025-05-26T05:48:03.628" v="322" actId="21"/>
-          <ac:spMkLst>
-            <pc:docMk/>
-            <pc:sldMk cId="2416666445" sldId="256"/>
-            <ac:spMk id="58" creationId="{53D672B0-A6EA-4276-A5B9-C5164A9A326F}"/>
-          </ac:spMkLst>
-        </pc:spChg>
-        <pc:spChg chg="add del mod">
-          <ac:chgData name="Fatima Pillosu" userId="a6295d4dc9e22643" providerId="LiveId" clId="{1093EB27-9F30-4B4D-905C-2834195C41DA}" dt="2025-05-26T05:48:03.628" v="322" actId="21"/>
-          <ac:spMkLst>
-            <pc:docMk/>
-            <pc:sldMk cId="2416666445" sldId="256"/>
-            <ac:spMk id="59" creationId="{FC073318-9596-D679-740B-BA408BA68B78}"/>
-          </ac:spMkLst>
-        </pc:spChg>
-        <pc:spChg chg="add del mod">
-          <ac:chgData name="Fatima Pillosu" userId="a6295d4dc9e22643" providerId="LiveId" clId="{1093EB27-9F30-4B4D-905C-2834195C41DA}" dt="2025-05-26T05:48:03.628" v="322" actId="21"/>
-          <ac:spMkLst>
-            <pc:docMk/>
-            <pc:sldMk cId="2416666445" sldId="256"/>
-            <ac:spMk id="60" creationId="{95D8CFCC-5F17-C4D6-6F70-8501F37736D8}"/>
-          </ac:spMkLst>
-        </pc:spChg>
-        <pc:spChg chg="add del mod">
-          <ac:chgData name="Fatima Pillosu" userId="a6295d4dc9e22643" providerId="LiveId" clId="{1093EB27-9F30-4B4D-905C-2834195C41DA}" dt="2025-05-26T05:48:03.628" v="322" actId="21"/>
-          <ac:spMkLst>
-            <pc:docMk/>
-            <pc:sldMk cId="2416666445" sldId="256"/>
-            <ac:spMk id="61" creationId="{E06CF797-8451-574D-21F0-384E8A3452B7}"/>
-          </ac:spMkLst>
-        </pc:spChg>
-        <pc:spChg chg="add del mod">
-          <ac:chgData name="Fatima Pillosu" userId="a6295d4dc9e22643" providerId="LiveId" clId="{1093EB27-9F30-4B4D-905C-2834195C41DA}" dt="2025-05-26T05:48:03.628" v="322" actId="21"/>
-          <ac:spMkLst>
-            <pc:docMk/>
-            <pc:sldMk cId="2416666445" sldId="256"/>
-            <ac:spMk id="62" creationId="{CFB3D8FA-6A39-82FF-7103-9C3B87E3F64B}"/>
-          </ac:spMkLst>
-        </pc:spChg>
-        <pc:spChg chg="add del mod">
-          <ac:chgData name="Fatima Pillosu" userId="a6295d4dc9e22643" providerId="LiveId" clId="{1093EB27-9F30-4B4D-905C-2834195C41DA}" dt="2025-05-26T05:48:03.628" v="322" actId="21"/>
-          <ac:spMkLst>
-            <pc:docMk/>
-            <pc:sldMk cId="2416666445" sldId="256"/>
-            <ac:spMk id="63" creationId="{5B2D0398-5206-B218-FB65-5E89CE52B185}"/>
-          </ac:spMkLst>
-        </pc:spChg>
-        <pc:spChg chg="add del mod">
-          <ac:chgData name="Fatima Pillosu" userId="a6295d4dc9e22643" providerId="LiveId" clId="{1093EB27-9F30-4B4D-905C-2834195C41DA}" dt="2025-05-26T05:48:03.628" v="322" actId="21"/>
-          <ac:spMkLst>
-            <pc:docMk/>
-            <pc:sldMk cId="2416666445" sldId="256"/>
-            <ac:spMk id="64" creationId="{E8F93690-0FC3-3203-F616-27D0636BD86D}"/>
-          </ac:spMkLst>
-        </pc:spChg>
-        <pc:spChg chg="add del mod">
-          <ac:chgData name="Fatima Pillosu" userId="a6295d4dc9e22643" providerId="LiveId" clId="{1093EB27-9F30-4B4D-905C-2834195C41DA}" dt="2025-05-26T05:48:03.628" v="322" actId="21"/>
-          <ac:spMkLst>
-            <pc:docMk/>
-            <pc:sldMk cId="2416666445" sldId="256"/>
-            <ac:spMk id="65" creationId="{98EE0CB6-A0DD-61DA-6B6B-D4EC8957FF3D}"/>
-          </ac:spMkLst>
-        </pc:spChg>
-        <pc:spChg chg="add del mod">
-          <ac:chgData name="Fatima Pillosu" userId="a6295d4dc9e22643" providerId="LiveId" clId="{1093EB27-9F30-4B4D-905C-2834195C41DA}" dt="2025-05-26T05:48:03.628" v="322" actId="21"/>
-          <ac:spMkLst>
-            <pc:docMk/>
-            <pc:sldMk cId="2416666445" sldId="256"/>
-            <ac:spMk id="66" creationId="{5C604597-7B68-19A8-35F6-C8E80447309D}"/>
-          </ac:spMkLst>
-        </pc:spChg>
-        <pc:spChg chg="add del mod">
-          <ac:chgData name="Fatima Pillosu" userId="a6295d4dc9e22643" providerId="LiveId" clId="{1093EB27-9F30-4B4D-905C-2834195C41DA}" dt="2025-05-26T05:48:03.628" v="322" actId="21"/>
-          <ac:spMkLst>
-            <pc:docMk/>
-            <pc:sldMk cId="2416666445" sldId="256"/>
-            <ac:spMk id="67" creationId="{37EBCA7E-9713-7AE3-638B-C84D5A1C2253}"/>
-          </ac:spMkLst>
-        </pc:spChg>
-        <pc:spChg chg="add del mod">
-          <ac:chgData name="Fatima Pillosu" userId="a6295d4dc9e22643" providerId="LiveId" clId="{1093EB27-9F30-4B4D-905C-2834195C41DA}" dt="2025-05-26T05:48:03.628" v="322" actId="21"/>
-          <ac:spMkLst>
-            <pc:docMk/>
-            <pc:sldMk cId="2416666445" sldId="256"/>
-            <ac:spMk id="68" creationId="{65B70626-067E-1AE7-11BD-EC7DA8DABC28}"/>
-          </ac:spMkLst>
-        </pc:spChg>
-        <pc:spChg chg="add del mod">
-          <ac:chgData name="Fatima Pillosu" userId="a6295d4dc9e22643" providerId="LiveId" clId="{1093EB27-9F30-4B4D-905C-2834195C41DA}" dt="2025-05-26T05:48:03.628" v="322" actId="21"/>
-          <ac:spMkLst>
-            <pc:docMk/>
-            <pc:sldMk cId="2416666445" sldId="256"/>
-            <ac:spMk id="69" creationId="{C7BCE81D-7A63-8764-295C-1A6242CC4274}"/>
-          </ac:spMkLst>
-        </pc:spChg>
-        <pc:spChg chg="add del mod">
-          <ac:chgData name="Fatima Pillosu" userId="a6295d4dc9e22643" providerId="LiveId" clId="{1093EB27-9F30-4B4D-905C-2834195C41DA}" dt="2025-05-26T05:48:03.628" v="322" actId="21"/>
-          <ac:spMkLst>
-            <pc:docMk/>
-            <pc:sldMk cId="2416666445" sldId="256"/>
-            <ac:spMk id="70" creationId="{A6515F5F-2E20-7D13-537C-F772A00535F4}"/>
-          </ac:spMkLst>
-        </pc:spChg>
-        <pc:spChg chg="add del mod">
-          <ac:chgData name="Fatima Pillosu" userId="a6295d4dc9e22643" providerId="LiveId" clId="{1093EB27-9F30-4B4D-905C-2834195C41DA}" dt="2025-05-26T05:48:03.628" v="322" actId="21"/>
-          <ac:spMkLst>
-            <pc:docMk/>
-            <pc:sldMk cId="2416666445" sldId="256"/>
-            <ac:spMk id="71" creationId="{50B578E0-62E1-B8F6-ECD2-2E7AA0CF70F9}"/>
-          </ac:spMkLst>
-        </pc:spChg>
-        <pc:spChg chg="add del mod">
-          <ac:chgData name="Fatima Pillosu" userId="a6295d4dc9e22643" providerId="LiveId" clId="{1093EB27-9F30-4B4D-905C-2834195C41DA}" dt="2025-05-26T05:48:03.628" v="322" actId="21"/>
-          <ac:spMkLst>
-            <pc:docMk/>
-            <pc:sldMk cId="2416666445" sldId="256"/>
-            <ac:spMk id="72" creationId="{F4D19594-8958-5678-A91A-D009CFEE0A3F}"/>
-          </ac:spMkLst>
-        </pc:spChg>
-        <pc:spChg chg="add del mod">
-          <ac:chgData name="Fatima Pillosu" userId="a6295d4dc9e22643" providerId="LiveId" clId="{1093EB27-9F30-4B4D-905C-2834195C41DA}" dt="2025-05-26T05:48:03.628" v="322" actId="21"/>
-          <ac:spMkLst>
-            <pc:docMk/>
-            <pc:sldMk cId="2416666445" sldId="256"/>
-            <ac:spMk id="73" creationId="{5ED4F7E3-EC48-9668-BA84-2D97CF23BD85}"/>
-          </ac:spMkLst>
-        </pc:spChg>
-        <pc:spChg chg="add del mod">
-          <ac:chgData name="Fatima Pillosu" userId="a6295d4dc9e22643" providerId="LiveId" clId="{1093EB27-9F30-4B4D-905C-2834195C41DA}" dt="2025-05-26T05:48:03.628" v="322" actId="21"/>
-          <ac:spMkLst>
-            <pc:docMk/>
-            <pc:sldMk cId="2416666445" sldId="256"/>
-            <ac:spMk id="74" creationId="{0ECA7152-99C7-A2F4-E83D-4F855AAFA37C}"/>
-          </ac:spMkLst>
-        </pc:spChg>
-        <pc:spChg chg="add del mod">
-          <ac:chgData name="Fatima Pillosu" userId="a6295d4dc9e22643" providerId="LiveId" clId="{1093EB27-9F30-4B4D-905C-2834195C41DA}" dt="2025-05-26T05:48:03.628" v="322" actId="21"/>
-          <ac:spMkLst>
-            <pc:docMk/>
-            <pc:sldMk cId="2416666445" sldId="256"/>
-            <ac:spMk id="75" creationId="{9FA7FCAD-7DCD-492E-33EA-E8EA0A4B7A03}"/>
-          </ac:spMkLst>
-        </pc:spChg>
-        <pc:spChg chg="add del mod">
-          <ac:chgData name="Fatima Pillosu" userId="a6295d4dc9e22643" providerId="LiveId" clId="{1093EB27-9F30-4B4D-905C-2834195C41DA}" dt="2025-05-26T05:48:03.628" v="322" actId="21"/>
-          <ac:spMkLst>
-            <pc:docMk/>
-            <pc:sldMk cId="2416666445" sldId="256"/>
-            <ac:spMk id="76" creationId="{27112713-98E8-0868-E1E6-C5213A18CDB4}"/>
-          </ac:spMkLst>
-        </pc:spChg>
-        <pc:spChg chg="add del mod">
-          <ac:chgData name="Fatima Pillosu" userId="a6295d4dc9e22643" providerId="LiveId" clId="{1093EB27-9F30-4B4D-905C-2834195C41DA}" dt="2025-05-26T05:48:03.628" v="322" actId="21"/>
-          <ac:spMkLst>
-            <pc:docMk/>
-            <pc:sldMk cId="2416666445" sldId="256"/>
-            <ac:spMk id="77" creationId="{A9DF4E4E-4BD6-4A43-6D8D-57FA7E5B4C8A}"/>
-          </ac:spMkLst>
-        </pc:spChg>
-        <pc:spChg chg="add del mod">
-          <ac:chgData name="Fatima Pillosu" userId="a6295d4dc9e22643" providerId="LiveId" clId="{1093EB27-9F30-4B4D-905C-2834195C41DA}" dt="2025-05-26T05:48:03.628" v="322" actId="21"/>
-          <ac:spMkLst>
-            <pc:docMk/>
-            <pc:sldMk cId="2416666445" sldId="256"/>
-            <ac:spMk id="78" creationId="{F880BE35-27AF-2DCD-5D81-D484CE796AE1}"/>
-          </ac:spMkLst>
-        </pc:spChg>
-        <pc:spChg chg="add del mod">
-          <ac:chgData name="Fatima Pillosu" userId="a6295d4dc9e22643" providerId="LiveId" clId="{1093EB27-9F30-4B4D-905C-2834195C41DA}" dt="2025-05-26T05:48:03.628" v="322" actId="21"/>
-          <ac:spMkLst>
-            <pc:docMk/>
-            <pc:sldMk cId="2416666445" sldId="256"/>
-            <ac:spMk id="79" creationId="{EA8BFD8B-1858-9531-2319-F3352B9FCE3E}"/>
-          </ac:spMkLst>
-        </pc:spChg>
-        <pc:spChg chg="add del mod">
-          <ac:chgData name="Fatima Pillosu" userId="a6295d4dc9e22643" providerId="LiveId" clId="{1093EB27-9F30-4B4D-905C-2834195C41DA}" dt="2025-05-26T05:48:03.628" v="322" actId="21"/>
-          <ac:spMkLst>
-            <pc:docMk/>
-            <pc:sldMk cId="2416666445" sldId="256"/>
-            <ac:spMk id="80" creationId="{804E7FEC-AF83-FD28-4A16-70D6430EB6E5}"/>
-          </ac:spMkLst>
-        </pc:spChg>
-        <pc:spChg chg="add del mod">
-          <ac:chgData name="Fatima Pillosu" userId="a6295d4dc9e22643" providerId="LiveId" clId="{1093EB27-9F30-4B4D-905C-2834195C41DA}" dt="2025-05-26T05:48:03.628" v="322" actId="21"/>
-          <ac:spMkLst>
-            <pc:docMk/>
-            <pc:sldMk cId="2416666445" sldId="256"/>
-            <ac:spMk id="81" creationId="{F1AE0BC5-794B-D23C-A945-2D48666A380B}"/>
-          </ac:spMkLst>
-        </pc:spChg>
-        <pc:spChg chg="add del mod">
-          <ac:chgData name="Fatima Pillosu" userId="a6295d4dc9e22643" providerId="LiveId" clId="{1093EB27-9F30-4B4D-905C-2834195C41DA}" dt="2025-05-26T05:48:03.628" v="322" actId="21"/>
-          <ac:spMkLst>
-            <pc:docMk/>
-            <pc:sldMk cId="2416666445" sldId="256"/>
-            <ac:spMk id="82" creationId="{3848180B-A357-5916-14AE-BEBA0E61C958}"/>
-          </ac:spMkLst>
-        </pc:spChg>
-        <pc:spChg chg="add del mod">
-          <ac:chgData name="Fatima Pillosu" userId="a6295d4dc9e22643" providerId="LiveId" clId="{1093EB27-9F30-4B4D-905C-2834195C41DA}" dt="2025-05-26T05:48:03.628" v="322" actId="21"/>
-          <ac:spMkLst>
-            <pc:docMk/>
-            <pc:sldMk cId="2416666445" sldId="256"/>
-            <ac:spMk id="83" creationId="{F88C8933-F6FB-E197-23C5-6A6AC1467788}"/>
-          </ac:spMkLst>
-        </pc:spChg>
-        <pc:spChg chg="add del mod">
-          <ac:chgData name="Fatima Pillosu" userId="a6295d4dc9e22643" providerId="LiveId" clId="{1093EB27-9F30-4B4D-905C-2834195C41DA}" dt="2025-05-26T05:48:03.628" v="322" actId="21"/>
-          <ac:spMkLst>
-            <pc:docMk/>
-            <pc:sldMk cId="2416666445" sldId="256"/>
-            <ac:spMk id="84" creationId="{708DFDE3-CB83-C412-EE9B-B89348B18975}"/>
-          </ac:spMkLst>
-        </pc:spChg>
-        <pc:spChg chg="add del mod">
-          <ac:chgData name="Fatima Pillosu" userId="a6295d4dc9e22643" providerId="LiveId" clId="{1093EB27-9F30-4B4D-905C-2834195C41DA}" dt="2025-05-26T05:48:03.628" v="322" actId="21"/>
-          <ac:spMkLst>
-            <pc:docMk/>
-            <pc:sldMk cId="2416666445" sldId="256"/>
-            <ac:spMk id="85" creationId="{0A4512A2-4DC0-76EB-1C78-328A3FA136E0}"/>
-          </ac:spMkLst>
-        </pc:spChg>
-        <pc:spChg chg="add del mod">
-          <ac:chgData name="Fatima Pillosu" userId="a6295d4dc9e22643" providerId="LiveId" clId="{1093EB27-9F30-4B4D-905C-2834195C41DA}" dt="2025-05-26T05:48:03.628" v="322" actId="21"/>
-          <ac:spMkLst>
-            <pc:docMk/>
-            <pc:sldMk cId="2416666445" sldId="256"/>
-            <ac:spMk id="86" creationId="{AC1F07BA-7A38-7AE9-D91C-D217054E2654}"/>
-          </ac:spMkLst>
-        </pc:spChg>
-        <pc:spChg chg="add del mod">
-          <ac:chgData name="Fatima Pillosu" userId="a6295d4dc9e22643" providerId="LiveId" clId="{1093EB27-9F30-4B4D-905C-2834195C41DA}" dt="2025-05-26T05:48:03.628" v="322" actId="21"/>
-          <ac:spMkLst>
-            <pc:docMk/>
-            <pc:sldMk cId="2416666445" sldId="256"/>
-            <ac:spMk id="87" creationId="{7DD94525-DBC6-1FC2-0B07-84FAFBA131A8}"/>
-          </ac:spMkLst>
-        </pc:spChg>
-        <pc:spChg chg="add del mod">
-          <ac:chgData name="Fatima Pillosu" userId="a6295d4dc9e22643" providerId="LiveId" clId="{1093EB27-9F30-4B4D-905C-2834195C41DA}" dt="2025-05-26T05:48:03.628" v="322" actId="21"/>
-          <ac:spMkLst>
-            <pc:docMk/>
-            <pc:sldMk cId="2416666445" sldId="256"/>
-            <ac:spMk id="88" creationId="{50D9BC42-F1FE-87AB-F083-5C2242BD4E51}"/>
-          </ac:spMkLst>
-        </pc:spChg>
-        <pc:spChg chg="add del mod">
-          <ac:chgData name="Fatima Pillosu" userId="a6295d4dc9e22643" providerId="LiveId" clId="{1093EB27-9F30-4B4D-905C-2834195C41DA}" dt="2025-05-26T05:48:03.628" v="322" actId="21"/>
-          <ac:spMkLst>
-            <pc:docMk/>
-            <pc:sldMk cId="2416666445" sldId="256"/>
-            <ac:spMk id="89" creationId="{CA271F21-2E92-827F-B5C7-9933695D1A74}"/>
-          </ac:spMkLst>
-        </pc:spChg>
-        <pc:spChg chg="add del mod">
-          <ac:chgData name="Fatima Pillosu" userId="a6295d4dc9e22643" providerId="LiveId" clId="{1093EB27-9F30-4B4D-905C-2834195C41DA}" dt="2025-05-26T05:48:03.628" v="322" actId="21"/>
-          <ac:spMkLst>
-            <pc:docMk/>
-            <pc:sldMk cId="2416666445" sldId="256"/>
-            <ac:spMk id="90" creationId="{19680ED7-98A4-DB3B-A978-A16B331182BF}"/>
-          </ac:spMkLst>
-        </pc:spChg>
-        <pc:spChg chg="add del">
-          <ac:chgData name="Fatima Pillosu" userId="a6295d4dc9e22643" providerId="LiveId" clId="{1093EB27-9F30-4B4D-905C-2834195C41DA}" dt="2025-05-26T05:48:03.628" v="322" actId="21"/>
-          <ac:spMkLst>
-            <pc:docMk/>
-            <pc:sldMk cId="2416666445" sldId="256"/>
-            <ac:spMk id="91" creationId="{AC41E776-097B-03B0-753D-C66F262E1F3F}"/>
-          </ac:spMkLst>
-        </pc:spChg>
-        <pc:spChg chg="add mod">
-          <ac:chgData name="Fatima Pillosu" userId="a6295d4dc9e22643" providerId="LiveId" clId="{1093EB27-9F30-4B4D-905C-2834195C41DA}" dt="2025-05-26T06:01:08.471" v="328" actId="207"/>
-          <ac:spMkLst>
-            <pc:docMk/>
-            <pc:sldMk cId="2416666445" sldId="256"/>
-            <ac:spMk id="94" creationId="{384D6C06-DC18-FF34-E84C-3BC146A8D3F9}"/>
-          </ac:spMkLst>
-        </pc:spChg>
-        <pc:spChg chg="add mod">
-          <ac:chgData name="Fatima Pillosu" userId="a6295d4dc9e22643" providerId="LiveId" clId="{1093EB27-9F30-4B4D-905C-2834195C41DA}" dt="2025-05-26T06:01:08.471" v="328" actId="207"/>
-          <ac:spMkLst>
-            <pc:docMk/>
-            <pc:sldMk cId="2416666445" sldId="256"/>
-            <ac:spMk id="95" creationId="{083AEDDC-E5EB-E07A-CF91-E947C367E6C5}"/>
-          </ac:spMkLst>
-        </pc:spChg>
-        <pc:spChg chg="del mod">
-          <ac:chgData name="Fatima Pillosu" userId="a6295d4dc9e22643" providerId="LiveId" clId="{1093EB27-9F30-4B4D-905C-2834195C41DA}" dt="2025-05-14T13:43:17.514" v="40" actId="21"/>
-          <ac:spMkLst>
-            <pc:docMk/>
-            <pc:sldMk cId="2416666445" sldId="256"/>
-            <ac:spMk id="96" creationId="{384D6C06-DC18-FF34-E84C-3BC146A8D3F9}"/>
-          </ac:spMkLst>
-        </pc:spChg>
-        <pc:spChg chg="add mod">
-          <ac:chgData name="Fatima Pillosu" userId="a6295d4dc9e22643" providerId="LiveId" clId="{1093EB27-9F30-4B4D-905C-2834195C41DA}" dt="2025-05-26T06:01:08.471" v="328" actId="207"/>
-          <ac:spMkLst>
-            <pc:docMk/>
-            <pc:sldMk cId="2416666445" sldId="256"/>
-            <ac:spMk id="96" creationId="{7EAFBB19-EFE8-1704-7506-55700BFD22E4}"/>
-          </ac:spMkLst>
-        </pc:spChg>
-        <pc:spChg chg="del mod">
-          <ac:chgData name="Fatima Pillosu" userId="a6295d4dc9e22643" providerId="LiveId" clId="{1093EB27-9F30-4B4D-905C-2834195C41DA}" dt="2025-05-14T13:43:17.514" v="40" actId="21"/>
-          <ac:spMkLst>
-            <pc:docMk/>
-            <pc:sldMk cId="2416666445" sldId="256"/>
-            <ac:spMk id="97" creationId="{083AEDDC-E5EB-E07A-CF91-E947C367E6C5}"/>
-          </ac:spMkLst>
-        </pc:spChg>
-        <pc:spChg chg="add mod">
-          <ac:chgData name="Fatima Pillosu" userId="a6295d4dc9e22643" providerId="LiveId" clId="{1093EB27-9F30-4B4D-905C-2834195C41DA}" dt="2025-05-26T06:01:08.471" v="328" actId="207"/>
-          <ac:spMkLst>
-            <pc:docMk/>
-            <pc:sldMk cId="2416666445" sldId="256"/>
-            <ac:spMk id="97" creationId="{08E525C9-8B8B-856F-6464-CD2A9FEC19DD}"/>
-          </ac:spMkLst>
-        </pc:spChg>
-        <pc:spChg chg="del mod">
-          <ac:chgData name="Fatima Pillosu" userId="a6295d4dc9e22643" providerId="LiveId" clId="{1093EB27-9F30-4B4D-905C-2834195C41DA}" dt="2025-05-14T13:43:17.514" v="40" actId="21"/>
-          <ac:spMkLst>
-            <pc:docMk/>
-            <pc:sldMk cId="2416666445" sldId="256"/>
-            <ac:spMk id="98" creationId="{7EAFBB19-EFE8-1704-7506-55700BFD22E4}"/>
-          </ac:spMkLst>
-        </pc:spChg>
-        <pc:spChg chg="add mod">
-          <ac:chgData name="Fatima Pillosu" userId="a6295d4dc9e22643" providerId="LiveId" clId="{1093EB27-9F30-4B4D-905C-2834195C41DA}" dt="2025-05-26T06:01:08.471" v="328" actId="207"/>
-          <ac:spMkLst>
-            <pc:docMk/>
-            <pc:sldMk cId="2416666445" sldId="256"/>
-            <ac:spMk id="98" creationId="{823987BF-6FA7-EC5E-C5ED-325313D2AE59}"/>
-          </ac:spMkLst>
-        </pc:spChg>
-        <pc:spChg chg="del mod">
-          <ac:chgData name="Fatima Pillosu" userId="a6295d4dc9e22643" providerId="LiveId" clId="{1093EB27-9F30-4B4D-905C-2834195C41DA}" dt="2025-05-14T13:43:17.514" v="40" actId="21"/>
-          <ac:spMkLst>
-            <pc:docMk/>
-            <pc:sldMk cId="2416666445" sldId="256"/>
-            <ac:spMk id="99" creationId="{08E525C9-8B8B-856F-6464-CD2A9FEC19DD}"/>
-          </ac:spMkLst>
-        </pc:spChg>
-        <pc:spChg chg="add mod">
-          <ac:chgData name="Fatima Pillosu" userId="a6295d4dc9e22643" providerId="LiveId" clId="{1093EB27-9F30-4B4D-905C-2834195C41DA}" dt="2025-05-26T06:01:08.471" v="328" actId="207"/>
-          <ac:spMkLst>
-            <pc:docMk/>
-            <pc:sldMk cId="2416666445" sldId="256"/>
-            <ac:spMk id="99" creationId="{26903909-39B6-BA49-59C4-AF4507DF29BF}"/>
-          </ac:spMkLst>
-        </pc:spChg>
-        <pc:spChg chg="add mod">
-          <ac:chgData name="Fatima Pillosu" userId="a6295d4dc9e22643" providerId="LiveId" clId="{1093EB27-9F30-4B4D-905C-2834195C41DA}" dt="2025-05-26T06:01:08.471" v="328" actId="207"/>
-          <ac:spMkLst>
-            <pc:docMk/>
-            <pc:sldMk cId="2416666445" sldId="256"/>
-            <ac:spMk id="100" creationId="{0C834787-FEEB-B977-952A-288699762B58}"/>
-          </ac:spMkLst>
-        </pc:spChg>
-        <pc:spChg chg="del mod">
-          <ac:chgData name="Fatima Pillosu" userId="a6295d4dc9e22643" providerId="LiveId" clId="{1093EB27-9F30-4B4D-905C-2834195C41DA}" dt="2025-05-14T13:43:17.514" v="40" actId="21"/>
-          <ac:spMkLst>
-            <pc:docMk/>
-            <pc:sldMk cId="2416666445" sldId="256"/>
-            <ac:spMk id="100" creationId="{823987BF-6FA7-EC5E-C5ED-325313D2AE59}"/>
-          </ac:spMkLst>
-        </pc:spChg>
-        <pc:spChg chg="del mod">
-          <ac:chgData name="Fatima Pillosu" userId="a6295d4dc9e22643" providerId="LiveId" clId="{1093EB27-9F30-4B4D-905C-2834195C41DA}" dt="2025-05-14T13:43:17.514" v="40" actId="21"/>
-          <ac:spMkLst>
-            <pc:docMk/>
-            <pc:sldMk cId="2416666445" sldId="256"/>
-            <ac:spMk id="101" creationId="{26903909-39B6-BA49-59C4-AF4507DF29BF}"/>
-          </ac:spMkLst>
-        </pc:spChg>
-        <pc:spChg chg="add mod">
-          <ac:chgData name="Fatima Pillosu" userId="a6295d4dc9e22643" providerId="LiveId" clId="{1093EB27-9F30-4B4D-905C-2834195C41DA}" dt="2025-05-26T06:01:08.471" v="328" actId="207"/>
-          <ac:spMkLst>
-            <pc:docMk/>
-            <pc:sldMk cId="2416666445" sldId="256"/>
-            <ac:spMk id="101" creationId="{61400BA6-3D3A-1190-AD65-CF1147A3BCBC}"/>
-          </ac:spMkLst>
-        </pc:spChg>
-        <pc:spChg chg="del mod">
-          <ac:chgData name="Fatima Pillosu" userId="a6295d4dc9e22643" providerId="LiveId" clId="{1093EB27-9F30-4B4D-905C-2834195C41DA}" dt="2025-05-14T13:43:17.514" v="40" actId="21"/>
-          <ac:spMkLst>
-            <pc:docMk/>
-            <pc:sldMk cId="2416666445" sldId="256"/>
-            <ac:spMk id="102" creationId="{0C834787-FEEB-B977-952A-288699762B58}"/>
-          </ac:spMkLst>
-        </pc:spChg>
-        <pc:spChg chg="add mod">
-          <ac:chgData name="Fatima Pillosu" userId="a6295d4dc9e22643" providerId="LiveId" clId="{1093EB27-9F30-4B4D-905C-2834195C41DA}" dt="2025-05-26T06:01:08.471" v="328" actId="207"/>
-          <ac:spMkLst>
-            <pc:docMk/>
-            <pc:sldMk cId="2416666445" sldId="256"/>
-            <ac:spMk id="102" creationId="{F77F9084-F223-ED65-669A-F6F51F897BA2}"/>
-          </ac:spMkLst>
-        </pc:spChg>
-        <pc:spChg chg="del mod">
-          <ac:chgData name="Fatima Pillosu" userId="a6295d4dc9e22643" providerId="LiveId" clId="{1093EB27-9F30-4B4D-905C-2834195C41DA}" dt="2025-05-14T13:43:17.514" v="40" actId="21"/>
-          <ac:spMkLst>
-            <pc:docMk/>
-            <pc:sldMk cId="2416666445" sldId="256"/>
-            <ac:spMk id="103" creationId="{61400BA6-3D3A-1190-AD65-CF1147A3BCBC}"/>
-          </ac:spMkLst>
-        </pc:spChg>
-        <pc:spChg chg="add mod">
-          <ac:chgData name="Fatima Pillosu" userId="a6295d4dc9e22643" providerId="LiveId" clId="{1093EB27-9F30-4B4D-905C-2834195C41DA}" dt="2025-05-26T06:01:08.471" v="328" actId="207"/>
-          <ac:spMkLst>
-            <pc:docMk/>
-            <pc:sldMk cId="2416666445" sldId="256"/>
-            <ac:spMk id="103" creationId="{E58B7622-486E-AF0A-77FA-6A257F911DE9}"/>
-          </ac:spMkLst>
-        </pc:spChg>
-        <pc:spChg chg="add mod">
-          <ac:chgData name="Fatima Pillosu" userId="a6295d4dc9e22643" providerId="LiveId" clId="{1093EB27-9F30-4B4D-905C-2834195C41DA}" dt="2025-05-26T06:01:08.471" v="328" actId="207"/>
-          <ac:spMkLst>
-            <pc:docMk/>
-            <pc:sldMk cId="2416666445" sldId="256"/>
-            <ac:spMk id="104" creationId="{53D672B0-A6EA-4276-A5B9-C5164A9A326F}"/>
-          </ac:spMkLst>
-        </pc:spChg>
-        <pc:spChg chg="del mod">
-          <ac:chgData name="Fatima Pillosu" userId="a6295d4dc9e22643" providerId="LiveId" clId="{1093EB27-9F30-4B4D-905C-2834195C41DA}" dt="2025-05-14T13:43:17.514" v="40" actId="21"/>
-          <ac:spMkLst>
-            <pc:docMk/>
-            <pc:sldMk cId="2416666445" sldId="256"/>
-            <ac:spMk id="104" creationId="{F77F9084-F223-ED65-669A-F6F51F897BA2}"/>
-          </ac:spMkLst>
-        </pc:spChg>
-        <pc:spChg chg="del mod">
-          <ac:chgData name="Fatima Pillosu" userId="a6295d4dc9e22643" providerId="LiveId" clId="{1093EB27-9F30-4B4D-905C-2834195C41DA}" dt="2025-05-14T13:43:17.514" v="40" actId="21"/>
-          <ac:spMkLst>
-            <pc:docMk/>
-            <pc:sldMk cId="2416666445" sldId="256"/>
-            <ac:spMk id="105" creationId="{E58B7622-486E-AF0A-77FA-6A257F911DE9}"/>
-          </ac:spMkLst>
-        </pc:spChg>
-        <pc:spChg chg="add mod">
-          <ac:chgData name="Fatima Pillosu" userId="a6295d4dc9e22643" providerId="LiveId" clId="{1093EB27-9F30-4B4D-905C-2834195C41DA}" dt="2025-05-26T06:01:08.471" v="328" actId="207"/>
-          <ac:spMkLst>
-            <pc:docMk/>
-            <pc:sldMk cId="2416666445" sldId="256"/>
-            <ac:spMk id="105" creationId="{FC073318-9596-D679-740B-BA408BA68B78}"/>
-          </ac:spMkLst>
-        </pc:spChg>
-        <pc:spChg chg="del mod">
-          <ac:chgData name="Fatima Pillosu" userId="a6295d4dc9e22643" providerId="LiveId" clId="{1093EB27-9F30-4B4D-905C-2834195C41DA}" dt="2025-05-14T13:43:17.514" v="40" actId="21"/>
-          <ac:spMkLst>
-            <pc:docMk/>
-            <pc:sldMk cId="2416666445" sldId="256"/>
-            <ac:spMk id="106" creationId="{53D672B0-A6EA-4276-A5B9-C5164A9A326F}"/>
-          </ac:spMkLst>
-        </pc:spChg>
-        <pc:spChg chg="add mod">
-          <ac:chgData name="Fatima Pillosu" userId="a6295d4dc9e22643" providerId="LiveId" clId="{1093EB27-9F30-4B4D-905C-2834195C41DA}" dt="2025-05-26T06:01:08.471" v="328" actId="207"/>
-          <ac:spMkLst>
-            <pc:docMk/>
-            <pc:sldMk cId="2416666445" sldId="256"/>
-            <ac:spMk id="106" creationId="{95D8CFCC-5F17-C4D6-6F70-8501F37736D8}"/>
-          </ac:spMkLst>
-        </pc:spChg>
-        <pc:spChg chg="add mod">
-          <ac:chgData name="Fatima Pillosu" userId="a6295d4dc9e22643" providerId="LiveId" clId="{1093EB27-9F30-4B4D-905C-2834195C41DA}" dt="2025-05-26T06:01:08.471" v="328" actId="207"/>
-          <ac:spMkLst>
-            <pc:docMk/>
-            <pc:sldMk cId="2416666445" sldId="256"/>
-            <ac:spMk id="107" creationId="{E06CF797-8451-574D-21F0-384E8A3452B7}"/>
-          </ac:spMkLst>
-        </pc:spChg>
-        <pc:spChg chg="del mod">
-          <ac:chgData name="Fatima Pillosu" userId="a6295d4dc9e22643" providerId="LiveId" clId="{1093EB27-9F30-4B4D-905C-2834195C41DA}" dt="2025-05-14T13:43:17.514" v="40" actId="21"/>
-          <ac:spMkLst>
-            <pc:docMk/>
-            <pc:sldMk cId="2416666445" sldId="256"/>
-            <ac:spMk id="107" creationId="{FC073318-9596-D679-740B-BA408BA68B78}"/>
-          </ac:spMkLst>
-        </pc:spChg>
-        <pc:spChg chg="del mod">
-          <ac:chgData name="Fatima Pillosu" userId="a6295d4dc9e22643" providerId="LiveId" clId="{1093EB27-9F30-4B4D-905C-2834195C41DA}" dt="2025-05-14T13:43:17.514" v="40" actId="21"/>
-          <ac:spMkLst>
-            <pc:docMk/>
-            <pc:sldMk cId="2416666445" sldId="256"/>
-            <ac:spMk id="108" creationId="{95D8CFCC-5F17-C4D6-6F70-8501F37736D8}"/>
-          </ac:spMkLst>
-        </pc:spChg>
-        <pc:spChg chg="add mod">
-          <ac:chgData name="Fatima Pillosu" userId="a6295d4dc9e22643" providerId="LiveId" clId="{1093EB27-9F30-4B4D-905C-2834195C41DA}" dt="2025-05-26T06:01:08.471" v="328" actId="207"/>
-          <ac:spMkLst>
-            <pc:docMk/>
-            <pc:sldMk cId="2416666445" sldId="256"/>
-            <ac:spMk id="108" creationId="{CFB3D8FA-6A39-82FF-7103-9C3B87E3F64B}"/>
-          </ac:spMkLst>
-        </pc:spChg>
-        <pc:spChg chg="add mod">
-          <ac:chgData name="Fatima Pillosu" userId="a6295d4dc9e22643" providerId="LiveId" clId="{1093EB27-9F30-4B4D-905C-2834195C41DA}" dt="2025-05-26T06:01:08.471" v="328" actId="207"/>
-          <ac:spMkLst>
-            <pc:docMk/>
-            <pc:sldMk cId="2416666445" sldId="256"/>
-            <ac:spMk id="109" creationId="{5B2D0398-5206-B218-FB65-5E89CE52B185}"/>
-          </ac:spMkLst>
-        </pc:spChg>
-        <pc:spChg chg="del mod">
-          <ac:chgData name="Fatima Pillosu" userId="a6295d4dc9e22643" providerId="LiveId" clId="{1093EB27-9F30-4B4D-905C-2834195C41DA}" dt="2025-05-14T13:43:17.514" v="40" actId="21"/>
-          <ac:spMkLst>
-            <pc:docMk/>
-            <pc:sldMk cId="2416666445" sldId="256"/>
-            <ac:spMk id="109" creationId="{E06CF797-8451-574D-21F0-384E8A3452B7}"/>
-          </ac:spMkLst>
-        </pc:spChg>
-        <pc:spChg chg="del mod">
-          <ac:chgData name="Fatima Pillosu" userId="a6295d4dc9e22643" providerId="LiveId" clId="{1093EB27-9F30-4B4D-905C-2834195C41DA}" dt="2025-05-14T13:43:17.514" v="40" actId="21"/>
-          <ac:spMkLst>
-            <pc:docMk/>
-            <pc:sldMk cId="2416666445" sldId="256"/>
-            <ac:spMk id="110" creationId="{CFB3D8FA-6A39-82FF-7103-9C3B87E3F64B}"/>
-          </ac:spMkLst>
-        </pc:spChg>
-        <pc:spChg chg="add mod">
-          <ac:chgData name="Fatima Pillosu" userId="a6295d4dc9e22643" providerId="LiveId" clId="{1093EB27-9F30-4B4D-905C-2834195C41DA}" dt="2025-05-26T06:01:08.471" v="328" actId="207"/>
-          <ac:spMkLst>
-            <pc:docMk/>
-            <pc:sldMk cId="2416666445" sldId="256"/>
-            <ac:spMk id="110" creationId="{E8F93690-0FC3-3203-F616-27D0636BD86D}"/>
-          </ac:spMkLst>
-        </pc:spChg>
-        <pc:spChg chg="del mod">
-          <ac:chgData name="Fatima Pillosu" userId="a6295d4dc9e22643" providerId="LiveId" clId="{1093EB27-9F30-4B4D-905C-2834195C41DA}" dt="2025-05-14T13:43:17.514" v="40" actId="21"/>
-          <ac:spMkLst>
-            <pc:docMk/>
-            <pc:sldMk cId="2416666445" sldId="256"/>
-            <ac:spMk id="111" creationId="{5B2D0398-5206-B218-FB65-5E89CE52B185}"/>
-          </ac:spMkLst>
-        </pc:spChg>
-        <pc:spChg chg="add mod">
-          <ac:chgData name="Fatima Pillosu" userId="a6295d4dc9e22643" providerId="LiveId" clId="{1093EB27-9F30-4B4D-905C-2834195C41DA}" dt="2025-05-26T06:01:08.471" v="328" actId="207"/>
-          <ac:spMkLst>
-            <pc:docMk/>
-            <pc:sldMk cId="2416666445" sldId="256"/>
-            <ac:spMk id="111" creationId="{98EE0CB6-A0DD-61DA-6B6B-D4EC8957FF3D}"/>
-          </ac:spMkLst>
-        </pc:spChg>
-        <pc:spChg chg="add mod">
-          <ac:chgData name="Fatima Pillosu" userId="a6295d4dc9e22643" providerId="LiveId" clId="{1093EB27-9F30-4B4D-905C-2834195C41DA}" dt="2025-05-26T06:01:08.471" v="328" actId="207"/>
-          <ac:spMkLst>
-            <pc:docMk/>
-            <pc:sldMk cId="2416666445" sldId="256"/>
-            <ac:spMk id="112" creationId="{5C604597-7B68-19A8-35F6-C8E80447309D}"/>
-          </ac:spMkLst>
-        </pc:spChg>
-        <pc:spChg chg="del mod">
-          <ac:chgData name="Fatima Pillosu" userId="a6295d4dc9e22643" providerId="LiveId" clId="{1093EB27-9F30-4B4D-905C-2834195C41DA}" dt="2025-05-14T13:43:17.514" v="40" actId="21"/>
-          <ac:spMkLst>
-            <pc:docMk/>
-            <pc:sldMk cId="2416666445" sldId="256"/>
-            <ac:spMk id="112" creationId="{E8F93690-0FC3-3203-F616-27D0636BD86D}"/>
-          </ac:spMkLst>
-        </pc:spChg>
-        <pc:spChg chg="add mod">
-          <ac:chgData name="Fatima Pillosu" userId="a6295d4dc9e22643" providerId="LiveId" clId="{1093EB27-9F30-4B4D-905C-2834195C41DA}" dt="2025-05-26T06:01:08.471" v="328" actId="207"/>
-          <ac:spMkLst>
-            <pc:docMk/>
-            <pc:sldMk cId="2416666445" sldId="256"/>
-            <ac:spMk id="113" creationId="{37EBCA7E-9713-7AE3-638B-C84D5A1C2253}"/>
-          </ac:spMkLst>
-        </pc:spChg>
-        <pc:spChg chg="del mod">
-          <ac:chgData name="Fatima Pillosu" userId="a6295d4dc9e22643" providerId="LiveId" clId="{1093EB27-9F30-4B4D-905C-2834195C41DA}" dt="2025-05-14T13:43:17.514" v="40" actId="21"/>
-          <ac:spMkLst>
-            <pc:docMk/>
-            <pc:sldMk cId="2416666445" sldId="256"/>
-            <ac:spMk id="113" creationId="{98EE0CB6-A0DD-61DA-6B6B-D4EC8957FF3D}"/>
-          </ac:spMkLst>
-        </pc:spChg>
-        <pc:spChg chg="del mod">
-          <ac:chgData name="Fatima Pillosu" userId="a6295d4dc9e22643" providerId="LiveId" clId="{1093EB27-9F30-4B4D-905C-2834195C41DA}" dt="2025-05-14T13:43:17.514" v="40" actId="21"/>
-          <ac:spMkLst>
-            <pc:docMk/>
-            <pc:sldMk cId="2416666445" sldId="256"/>
-            <ac:spMk id="114" creationId="{5C604597-7B68-19A8-35F6-C8E80447309D}"/>
-          </ac:spMkLst>
-        </pc:spChg>
-        <pc:spChg chg="add mod">
-          <ac:chgData name="Fatima Pillosu" userId="a6295d4dc9e22643" providerId="LiveId" clId="{1093EB27-9F30-4B4D-905C-2834195C41DA}" dt="2025-05-26T06:01:08.471" v="328" actId="207"/>
-          <ac:spMkLst>
-            <pc:docMk/>
-            <pc:sldMk cId="2416666445" sldId="256"/>
-            <ac:spMk id="114" creationId="{65B70626-067E-1AE7-11BD-EC7DA8DABC28}"/>
-          </ac:spMkLst>
-        </pc:spChg>
-        <pc:spChg chg="del mod">
-          <ac:chgData name="Fatima Pillosu" userId="a6295d4dc9e22643" providerId="LiveId" clId="{1093EB27-9F30-4B4D-905C-2834195C41DA}" dt="2025-05-14T13:43:17.514" v="40" actId="21"/>
-          <ac:spMkLst>
-            <pc:docMk/>
-            <pc:sldMk cId="2416666445" sldId="256"/>
-            <ac:spMk id="115" creationId="{37EBCA7E-9713-7AE3-638B-C84D5A1C2253}"/>
-          </ac:spMkLst>
-        </pc:spChg>
-        <pc:spChg chg="add mod">
-          <ac:chgData name="Fatima Pillosu" userId="a6295d4dc9e22643" providerId="LiveId" clId="{1093EB27-9F30-4B4D-905C-2834195C41DA}" dt="2025-05-26T06:01:08.471" v="328" actId="207"/>
-          <ac:spMkLst>
-            <pc:docMk/>
-            <pc:sldMk cId="2416666445" sldId="256"/>
-            <ac:spMk id="115" creationId="{C7BCE81D-7A63-8764-295C-1A6242CC4274}"/>
-          </ac:spMkLst>
-        </pc:spChg>
-        <pc:spChg chg="del mod">
-          <ac:chgData name="Fatima Pillosu" userId="a6295d4dc9e22643" providerId="LiveId" clId="{1093EB27-9F30-4B4D-905C-2834195C41DA}" dt="2025-05-14T13:43:17.514" v="40" actId="21"/>
-          <ac:spMkLst>
-            <pc:docMk/>
-            <pc:sldMk cId="2416666445" sldId="256"/>
-            <ac:spMk id="116" creationId="{65B70626-067E-1AE7-11BD-EC7DA8DABC28}"/>
-          </ac:spMkLst>
-        </pc:spChg>
-        <pc:spChg chg="add mod">
-          <ac:chgData name="Fatima Pillosu" userId="a6295d4dc9e22643" providerId="LiveId" clId="{1093EB27-9F30-4B4D-905C-2834195C41DA}" dt="2025-05-26T06:01:08.471" v="328" actId="207"/>
-          <ac:spMkLst>
-            <pc:docMk/>
-            <pc:sldMk cId="2416666445" sldId="256"/>
-            <ac:spMk id="116" creationId="{A6515F5F-2E20-7D13-537C-F772A00535F4}"/>
-          </ac:spMkLst>
-        </pc:spChg>
-        <pc:spChg chg="add mod">
-          <ac:chgData name="Fatima Pillosu" userId="a6295d4dc9e22643" providerId="LiveId" clId="{1093EB27-9F30-4B4D-905C-2834195C41DA}" dt="2025-05-26T06:01:08.471" v="328" actId="207"/>
-          <ac:spMkLst>
-            <pc:docMk/>
-            <pc:sldMk cId="2416666445" sldId="256"/>
-            <ac:spMk id="117" creationId="{50B578E0-62E1-B8F6-ECD2-2E7AA0CF70F9}"/>
-          </ac:spMkLst>
-        </pc:spChg>
-        <pc:spChg chg="del mod">
-          <ac:chgData name="Fatima Pillosu" userId="a6295d4dc9e22643" providerId="LiveId" clId="{1093EB27-9F30-4B4D-905C-2834195C41DA}" dt="2025-05-14T13:43:17.514" v="40" actId="21"/>
-          <ac:spMkLst>
-            <pc:docMk/>
-            <pc:sldMk cId="2416666445" sldId="256"/>
-            <ac:spMk id="117" creationId="{C7BCE81D-7A63-8764-295C-1A6242CC4274}"/>
-          </ac:spMkLst>
-        </pc:spChg>
-        <pc:spChg chg="del mod">
-          <ac:chgData name="Fatima Pillosu" userId="a6295d4dc9e22643" providerId="LiveId" clId="{1093EB27-9F30-4B4D-905C-2834195C41DA}" dt="2025-05-14T13:43:17.514" v="40" actId="21"/>
-          <ac:spMkLst>
-            <pc:docMk/>
-            <pc:sldMk cId="2416666445" sldId="256"/>
-            <ac:spMk id="118" creationId="{A6515F5F-2E20-7D13-537C-F772A00535F4}"/>
-          </ac:spMkLst>
-        </pc:spChg>
-        <pc:spChg chg="add mod">
-          <ac:chgData name="Fatima Pillosu" userId="a6295d4dc9e22643" providerId="LiveId" clId="{1093EB27-9F30-4B4D-905C-2834195C41DA}" dt="2025-05-26T06:01:08.471" v="328" actId="207"/>
-          <ac:spMkLst>
-            <pc:docMk/>
-            <pc:sldMk cId="2416666445" sldId="256"/>
-            <ac:spMk id="118" creationId="{F4D19594-8958-5678-A91A-D009CFEE0A3F}"/>
-          </ac:spMkLst>
-        </pc:spChg>
-        <pc:spChg chg="del mod">
-          <ac:chgData name="Fatima Pillosu" userId="a6295d4dc9e22643" providerId="LiveId" clId="{1093EB27-9F30-4B4D-905C-2834195C41DA}" dt="2025-05-14T13:43:17.514" v="40" actId="21"/>
-          <ac:spMkLst>
-            <pc:docMk/>
-            <pc:sldMk cId="2416666445" sldId="256"/>
-            <ac:spMk id="119" creationId="{50B578E0-62E1-B8F6-ECD2-2E7AA0CF70F9}"/>
-          </ac:spMkLst>
-        </pc:spChg>
-        <pc:spChg chg="add mod">
-          <ac:chgData name="Fatima Pillosu" userId="a6295d4dc9e22643" providerId="LiveId" clId="{1093EB27-9F30-4B4D-905C-2834195C41DA}" dt="2025-05-26T06:01:08.471" v="328" actId="207"/>
-          <ac:spMkLst>
-            <pc:docMk/>
-            <pc:sldMk cId="2416666445" sldId="256"/>
-            <ac:spMk id="119" creationId="{5ED4F7E3-EC48-9668-BA84-2D97CF23BD85}"/>
-          </ac:spMkLst>
-        </pc:spChg>
-        <pc:spChg chg="add mod">
-          <ac:chgData name="Fatima Pillosu" userId="a6295d4dc9e22643" providerId="LiveId" clId="{1093EB27-9F30-4B4D-905C-2834195C41DA}" dt="2025-05-26T06:01:08.471" v="328" actId="207"/>
-          <ac:spMkLst>
-            <pc:docMk/>
-            <pc:sldMk cId="2416666445" sldId="256"/>
-            <ac:spMk id="120" creationId="{0ECA7152-99C7-A2F4-E83D-4F855AAFA37C}"/>
-          </ac:spMkLst>
-        </pc:spChg>
-        <pc:spChg chg="del mod">
-          <ac:chgData name="Fatima Pillosu" userId="a6295d4dc9e22643" providerId="LiveId" clId="{1093EB27-9F30-4B4D-905C-2834195C41DA}" dt="2025-05-14T13:43:17.514" v="40" actId="21"/>
-          <ac:spMkLst>
-            <pc:docMk/>
-            <pc:sldMk cId="2416666445" sldId="256"/>
-            <ac:spMk id="120" creationId="{F4D19594-8958-5678-A91A-D009CFEE0A3F}"/>
-          </ac:spMkLst>
-        </pc:spChg>
-        <pc:spChg chg="del mod">
-          <ac:chgData name="Fatima Pillosu" userId="a6295d4dc9e22643" providerId="LiveId" clId="{1093EB27-9F30-4B4D-905C-2834195C41DA}" dt="2025-05-14T13:43:17.514" v="40" actId="21"/>
-          <ac:spMkLst>
-            <pc:docMk/>
-            <pc:sldMk cId="2416666445" sldId="256"/>
-            <ac:spMk id="121" creationId="{5ED4F7E3-EC48-9668-BA84-2D97CF23BD85}"/>
-          </ac:spMkLst>
-        </pc:spChg>
-        <pc:spChg chg="add mod">
-          <ac:chgData name="Fatima Pillosu" userId="a6295d4dc9e22643" providerId="LiveId" clId="{1093EB27-9F30-4B4D-905C-2834195C41DA}" dt="2025-05-26T06:01:08.471" v="328" actId="207"/>
-          <ac:spMkLst>
-            <pc:docMk/>
-            <pc:sldMk cId="2416666445" sldId="256"/>
-            <ac:spMk id="121" creationId="{9FA7FCAD-7DCD-492E-33EA-E8EA0A4B7A03}"/>
-          </ac:spMkLst>
-        </pc:spChg>
-        <pc:spChg chg="del mod">
-          <ac:chgData name="Fatima Pillosu" userId="a6295d4dc9e22643" providerId="LiveId" clId="{1093EB27-9F30-4B4D-905C-2834195C41DA}" dt="2025-05-14T13:43:17.514" v="40" actId="21"/>
-          <ac:spMkLst>
-            <pc:docMk/>
-            <pc:sldMk cId="2416666445" sldId="256"/>
-            <ac:spMk id="122" creationId="{0ECA7152-99C7-A2F4-E83D-4F855AAFA37C}"/>
-          </ac:spMkLst>
-        </pc:spChg>
-        <pc:spChg chg="add mod">
-          <ac:chgData name="Fatima Pillosu" userId="a6295d4dc9e22643" providerId="LiveId" clId="{1093EB27-9F30-4B4D-905C-2834195C41DA}" dt="2025-05-26T06:01:08.471" v="328" actId="207"/>
-          <ac:spMkLst>
-            <pc:docMk/>
-            <pc:sldMk cId="2416666445" sldId="256"/>
-            <ac:spMk id="122" creationId="{27112713-98E8-0868-E1E6-C5213A18CDB4}"/>
-          </ac:spMkLst>
-        </pc:spChg>
-        <pc:spChg chg="del mod">
-          <ac:chgData name="Fatima Pillosu" userId="a6295d4dc9e22643" providerId="LiveId" clId="{1093EB27-9F30-4B4D-905C-2834195C41DA}" dt="2025-05-14T13:43:17.514" v="40" actId="21"/>
-          <ac:spMkLst>
-            <pc:docMk/>
-            <pc:sldMk cId="2416666445" sldId="256"/>
-            <ac:spMk id="123" creationId="{9FA7FCAD-7DCD-492E-33EA-E8EA0A4B7A03}"/>
-          </ac:spMkLst>
-        </pc:spChg>
-        <pc:spChg chg="add mod">
-          <ac:chgData name="Fatima Pillosu" userId="a6295d4dc9e22643" providerId="LiveId" clId="{1093EB27-9F30-4B4D-905C-2834195C41DA}" dt="2025-05-26T06:01:08.471" v="328" actId="207"/>
-          <ac:spMkLst>
-            <pc:docMk/>
-            <pc:sldMk cId="2416666445" sldId="256"/>
-            <ac:spMk id="123" creationId="{A9DF4E4E-4BD6-4A43-6D8D-57FA7E5B4C8A}"/>
-          </ac:spMkLst>
-        </pc:spChg>
-        <pc:spChg chg="del mod">
-          <ac:chgData name="Fatima Pillosu" userId="a6295d4dc9e22643" providerId="LiveId" clId="{1093EB27-9F30-4B4D-905C-2834195C41DA}" dt="2025-05-14T13:43:17.514" v="40" actId="21"/>
-          <ac:spMkLst>
-            <pc:docMk/>
-            <pc:sldMk cId="2416666445" sldId="256"/>
-            <ac:spMk id="124" creationId="{27112713-98E8-0868-E1E6-C5213A18CDB4}"/>
-          </ac:spMkLst>
-        </pc:spChg>
-        <pc:spChg chg="add mod">
-          <ac:chgData name="Fatima Pillosu" userId="a6295d4dc9e22643" providerId="LiveId" clId="{1093EB27-9F30-4B4D-905C-2834195C41DA}" dt="2025-05-26T06:01:08.471" v="328" actId="207"/>
-          <ac:spMkLst>
-            <pc:docMk/>
-            <pc:sldMk cId="2416666445" sldId="256"/>
-            <ac:spMk id="124" creationId="{F880BE35-27AF-2DCD-5D81-D484CE796AE1}"/>
-          </ac:spMkLst>
-        </pc:spChg>
-        <pc:spChg chg="del mod">
-          <ac:chgData name="Fatima Pillosu" userId="a6295d4dc9e22643" providerId="LiveId" clId="{1093EB27-9F30-4B4D-905C-2834195C41DA}" dt="2025-05-14T13:43:17.514" v="40" actId="21"/>
-          <ac:spMkLst>
-            <pc:docMk/>
-            <pc:sldMk cId="2416666445" sldId="256"/>
-            <ac:spMk id="125" creationId="{A9DF4E4E-4BD6-4A43-6D8D-57FA7E5B4C8A}"/>
-          </ac:spMkLst>
-        </pc:spChg>
-        <pc:spChg chg="add mod">
-          <ac:chgData name="Fatima Pillosu" userId="a6295d4dc9e22643" providerId="LiveId" clId="{1093EB27-9F30-4B4D-905C-2834195C41DA}" dt="2025-05-26T06:01:08.471" v="328" actId="207"/>
-          <ac:spMkLst>
-            <pc:docMk/>
-            <pc:sldMk cId="2416666445" sldId="256"/>
-            <ac:spMk id="125" creationId="{EA8BFD8B-1858-9531-2319-F3352B9FCE3E}"/>
-          </ac:spMkLst>
-        </pc:spChg>
-        <pc:spChg chg="add mod">
-          <ac:chgData name="Fatima Pillosu" userId="a6295d4dc9e22643" providerId="LiveId" clId="{1093EB27-9F30-4B4D-905C-2834195C41DA}" dt="2025-05-26T06:01:08.471" v="328" actId="207"/>
-          <ac:spMkLst>
-            <pc:docMk/>
-            <pc:sldMk cId="2416666445" sldId="256"/>
-            <ac:spMk id="126" creationId="{804E7FEC-AF83-FD28-4A16-70D6430EB6E5}"/>
-          </ac:spMkLst>
-        </pc:spChg>
-        <pc:spChg chg="del mod">
-          <ac:chgData name="Fatima Pillosu" userId="a6295d4dc9e22643" providerId="LiveId" clId="{1093EB27-9F30-4B4D-905C-2834195C41DA}" dt="2025-05-14T13:43:17.514" v="40" actId="21"/>
-          <ac:spMkLst>
-            <pc:docMk/>
-            <pc:sldMk cId="2416666445" sldId="256"/>
-            <ac:spMk id="126" creationId="{F880BE35-27AF-2DCD-5D81-D484CE796AE1}"/>
-          </ac:spMkLst>
-        </pc:spChg>
-        <pc:spChg chg="del mod">
-          <ac:chgData name="Fatima Pillosu" userId="a6295d4dc9e22643" providerId="LiveId" clId="{1093EB27-9F30-4B4D-905C-2834195C41DA}" dt="2025-05-14T13:43:17.514" v="40" actId="21"/>
-          <ac:spMkLst>
-            <pc:docMk/>
-            <pc:sldMk cId="2416666445" sldId="256"/>
-            <ac:spMk id="127" creationId="{EA8BFD8B-1858-9531-2319-F3352B9FCE3E}"/>
-          </ac:spMkLst>
-        </pc:spChg>
-        <pc:spChg chg="add mod">
-          <ac:chgData name="Fatima Pillosu" userId="a6295d4dc9e22643" providerId="LiveId" clId="{1093EB27-9F30-4B4D-905C-2834195C41DA}" dt="2025-05-26T06:01:08.471" v="328" actId="207"/>
-          <ac:spMkLst>
-            <pc:docMk/>
-            <pc:sldMk cId="2416666445" sldId="256"/>
-            <ac:spMk id="127" creationId="{F1AE0BC5-794B-D23C-A945-2D48666A380B}"/>
-          </ac:spMkLst>
-        </pc:spChg>
-        <pc:spChg chg="add mod">
-          <ac:chgData name="Fatima Pillosu" userId="a6295d4dc9e22643" providerId="LiveId" clId="{1093EB27-9F30-4B4D-905C-2834195C41DA}" dt="2025-05-26T06:01:08.471" v="328" actId="207"/>
-          <ac:spMkLst>
-            <pc:docMk/>
-            <pc:sldMk cId="2416666445" sldId="256"/>
-            <ac:spMk id="128" creationId="{3848180B-A357-5916-14AE-BEBA0E61C958}"/>
-          </ac:spMkLst>
-        </pc:spChg>
-        <pc:spChg chg="del mod">
-          <ac:chgData name="Fatima Pillosu" userId="a6295d4dc9e22643" providerId="LiveId" clId="{1093EB27-9F30-4B4D-905C-2834195C41DA}" dt="2025-05-14T13:43:17.514" v="40" actId="21"/>
-          <ac:spMkLst>
-            <pc:docMk/>
-            <pc:sldMk cId="2416666445" sldId="256"/>
-            <ac:spMk id="128" creationId="{804E7FEC-AF83-FD28-4A16-70D6430EB6E5}"/>
-          </ac:spMkLst>
-        </pc:spChg>
-        <pc:spChg chg="del mod">
-          <ac:chgData name="Fatima Pillosu" userId="a6295d4dc9e22643" providerId="LiveId" clId="{1093EB27-9F30-4B4D-905C-2834195C41DA}" dt="2025-05-14T13:43:17.514" v="40" actId="21"/>
-          <ac:spMkLst>
-            <pc:docMk/>
-            <pc:sldMk cId="2416666445" sldId="256"/>
-            <ac:spMk id="129" creationId="{F1AE0BC5-794B-D23C-A945-2D48666A380B}"/>
-          </ac:spMkLst>
-        </pc:spChg>
-        <pc:spChg chg="add mod">
-          <ac:chgData name="Fatima Pillosu" userId="a6295d4dc9e22643" providerId="LiveId" clId="{1093EB27-9F30-4B4D-905C-2834195C41DA}" dt="2025-05-26T06:01:08.471" v="328" actId="207"/>
-          <ac:spMkLst>
-            <pc:docMk/>
-            <pc:sldMk cId="2416666445" sldId="256"/>
-            <ac:spMk id="129" creationId="{F88C8933-F6FB-E197-23C5-6A6AC1467788}"/>
-          </ac:spMkLst>
-        </pc:spChg>
-        <pc:spChg chg="del mod">
-          <ac:chgData name="Fatima Pillosu" userId="a6295d4dc9e22643" providerId="LiveId" clId="{1093EB27-9F30-4B4D-905C-2834195C41DA}" dt="2025-05-14T13:43:17.514" v="40" actId="21"/>
-          <ac:spMkLst>
-            <pc:docMk/>
-            <pc:sldMk cId="2416666445" sldId="256"/>
-            <ac:spMk id="130" creationId="{3848180B-A357-5916-14AE-BEBA0E61C958}"/>
-          </ac:spMkLst>
-        </pc:spChg>
-        <pc:spChg chg="add mod">
-          <ac:chgData name="Fatima Pillosu" userId="a6295d4dc9e22643" providerId="LiveId" clId="{1093EB27-9F30-4B4D-905C-2834195C41DA}" dt="2025-05-26T06:01:08.471" v="328" actId="207"/>
-          <ac:spMkLst>
-            <pc:docMk/>
-            <pc:sldMk cId="2416666445" sldId="256"/>
-            <ac:spMk id="130" creationId="{708DFDE3-CB83-C412-EE9B-B89348B18975}"/>
-          </ac:spMkLst>
-        </pc:spChg>
-        <pc:spChg chg="add mod">
-          <ac:chgData name="Fatima Pillosu" userId="a6295d4dc9e22643" providerId="LiveId" clId="{1093EB27-9F30-4B4D-905C-2834195C41DA}" dt="2025-05-26T06:01:08.471" v="328" actId="207"/>
-          <ac:spMkLst>
-            <pc:docMk/>
-            <pc:sldMk cId="2416666445" sldId="256"/>
-            <ac:spMk id="131" creationId="{0A4512A2-4DC0-76EB-1C78-328A3FA136E0}"/>
-          </ac:spMkLst>
-        </pc:spChg>
-        <pc:spChg chg="del mod">
-          <ac:chgData name="Fatima Pillosu" userId="a6295d4dc9e22643" providerId="LiveId" clId="{1093EB27-9F30-4B4D-905C-2834195C41DA}" dt="2025-05-14T13:43:17.514" v="40" actId="21"/>
-          <ac:spMkLst>
-            <pc:docMk/>
-            <pc:sldMk cId="2416666445" sldId="256"/>
-            <ac:spMk id="131" creationId="{F88C8933-F6FB-E197-23C5-6A6AC1467788}"/>
-          </ac:spMkLst>
-        </pc:spChg>
-        <pc:spChg chg="del mod">
-          <ac:chgData name="Fatima Pillosu" userId="a6295d4dc9e22643" providerId="LiveId" clId="{1093EB27-9F30-4B4D-905C-2834195C41DA}" dt="2025-05-14T13:43:17.514" v="40" actId="21"/>
-          <ac:spMkLst>
-            <pc:docMk/>
-            <pc:sldMk cId="2416666445" sldId="256"/>
-            <ac:spMk id="132" creationId="{708DFDE3-CB83-C412-EE9B-B89348B18975}"/>
-          </ac:spMkLst>
-        </pc:spChg>
-        <pc:spChg chg="add mod">
-          <ac:chgData name="Fatima Pillosu" userId="a6295d4dc9e22643" providerId="LiveId" clId="{1093EB27-9F30-4B4D-905C-2834195C41DA}" dt="2025-05-26T06:01:08.471" v="328" actId="207"/>
-          <ac:spMkLst>
-            <pc:docMk/>
-            <pc:sldMk cId="2416666445" sldId="256"/>
-            <ac:spMk id="132" creationId="{AC1F07BA-7A38-7AE9-D91C-D217054E2654}"/>
-          </ac:spMkLst>
-        </pc:spChg>
-        <pc:spChg chg="del mod">
-          <ac:chgData name="Fatima Pillosu" userId="a6295d4dc9e22643" providerId="LiveId" clId="{1093EB27-9F30-4B4D-905C-2834195C41DA}" dt="2025-05-14T13:43:17.514" v="40" actId="21"/>
-          <ac:spMkLst>
-            <pc:docMk/>
-            <pc:sldMk cId="2416666445" sldId="256"/>
-            <ac:spMk id="133" creationId="{0A4512A2-4DC0-76EB-1C78-328A3FA136E0}"/>
-          </ac:spMkLst>
-        </pc:spChg>
-        <pc:spChg chg="add mod">
-          <ac:chgData name="Fatima Pillosu" userId="a6295d4dc9e22643" providerId="LiveId" clId="{1093EB27-9F30-4B4D-905C-2834195C41DA}" dt="2025-05-26T06:01:08.471" v="328" actId="207"/>
-          <ac:spMkLst>
-            <pc:docMk/>
-            <pc:sldMk cId="2416666445" sldId="256"/>
-            <ac:spMk id="133" creationId="{7DD94525-DBC6-1FC2-0B07-84FAFBA131A8}"/>
-          </ac:spMkLst>
-        </pc:spChg>
-        <pc:spChg chg="add mod">
-          <ac:chgData name="Fatima Pillosu" userId="a6295d4dc9e22643" providerId="LiveId" clId="{1093EB27-9F30-4B4D-905C-2834195C41DA}" dt="2025-05-26T06:01:08.471" v="328" actId="207"/>
-          <ac:spMkLst>
-            <pc:docMk/>
-            <pc:sldMk cId="2416666445" sldId="256"/>
-            <ac:spMk id="134" creationId="{50D9BC42-F1FE-87AB-F083-5C2242BD4E51}"/>
-          </ac:spMkLst>
-        </pc:spChg>
-        <pc:spChg chg="del mod">
-          <ac:chgData name="Fatima Pillosu" userId="a6295d4dc9e22643" providerId="LiveId" clId="{1093EB27-9F30-4B4D-905C-2834195C41DA}" dt="2025-05-14T13:43:17.514" v="40" actId="21"/>
-          <ac:spMkLst>
-            <pc:docMk/>
-            <pc:sldMk cId="2416666445" sldId="256"/>
-            <ac:spMk id="134" creationId="{AC1F07BA-7A38-7AE9-D91C-D217054E2654}"/>
-          </ac:spMkLst>
-        </pc:spChg>
-        <pc:spChg chg="del mod">
-          <ac:chgData name="Fatima Pillosu" userId="a6295d4dc9e22643" providerId="LiveId" clId="{1093EB27-9F30-4B4D-905C-2834195C41DA}" dt="2025-05-14T13:43:17.514" v="40" actId="21"/>
-          <ac:spMkLst>
-            <pc:docMk/>
-            <pc:sldMk cId="2416666445" sldId="256"/>
-            <ac:spMk id="135" creationId="{7DD94525-DBC6-1FC2-0B07-84FAFBA131A8}"/>
-          </ac:spMkLst>
-        </pc:spChg>
-        <pc:spChg chg="add mod">
-          <ac:chgData name="Fatima Pillosu" userId="a6295d4dc9e22643" providerId="LiveId" clId="{1093EB27-9F30-4B4D-905C-2834195C41DA}" dt="2025-05-26T06:01:08.471" v="328" actId="207"/>
-          <ac:spMkLst>
-            <pc:docMk/>
-            <pc:sldMk cId="2416666445" sldId="256"/>
-            <ac:spMk id="135" creationId="{CA271F21-2E92-827F-B5C7-9933695D1A74}"/>
-          </ac:spMkLst>
-        </pc:spChg>
-        <pc:spChg chg="add mod">
-          <ac:chgData name="Fatima Pillosu" userId="a6295d4dc9e22643" providerId="LiveId" clId="{1093EB27-9F30-4B4D-905C-2834195C41DA}" dt="2025-05-26T06:01:08.471" v="328" actId="207"/>
+        <pc:spChg chg="mod">
+          <ac:chgData name="Fatima Pillosu" userId="a6295d4dc9e22643" providerId="LiveId" clId="{87453732-75AC-4426-B5D3-B7C69C2D4F54}" dt="2026-01-19T16:01:29.140" v="0" actId="20577"/>
           <ac:spMkLst>
             <pc:docMk/>
             <pc:sldMk cId="2416666445" sldId="256"/>
             <ac:spMk id="136" creationId="{19680ED7-98A4-DB3B-A978-A16B331182BF}"/>
           </ac:spMkLst>
         </pc:spChg>
-        <pc:spChg chg="del mod">
-          <ac:chgData name="Fatima Pillosu" userId="a6295d4dc9e22643" providerId="LiveId" clId="{1093EB27-9F30-4B4D-905C-2834195C41DA}" dt="2025-05-14T13:43:17.514" v="40" actId="21"/>
-          <ac:spMkLst>
-            <pc:docMk/>
-            <pc:sldMk cId="2416666445" sldId="256"/>
-            <ac:spMk id="136" creationId="{50D9BC42-F1FE-87AB-F083-5C2242BD4E51}"/>
-          </ac:spMkLst>
-        </pc:spChg>
-        <pc:spChg chg="add del mod">
-          <ac:chgData name="Fatima Pillosu" userId="a6295d4dc9e22643" providerId="LiveId" clId="{1093EB27-9F30-4B4D-905C-2834195C41DA}" dt="2025-05-26T05:48:17.735" v="324" actId="478"/>
-          <ac:spMkLst>
-            <pc:docMk/>
-            <pc:sldMk cId="2416666445" sldId="256"/>
-            <ac:spMk id="137" creationId="{AC41E776-097B-03B0-753D-C66F262E1F3F}"/>
-          </ac:spMkLst>
-        </pc:spChg>
-        <pc:spChg chg="del mod">
-          <ac:chgData name="Fatima Pillosu" userId="a6295d4dc9e22643" providerId="LiveId" clId="{1093EB27-9F30-4B4D-905C-2834195C41DA}" dt="2025-05-14T13:43:17.514" v="40" actId="21"/>
-          <ac:spMkLst>
-            <pc:docMk/>
-            <pc:sldMk cId="2416666445" sldId="256"/>
-            <ac:spMk id="137" creationId="{CA271F21-2E92-827F-B5C7-9933695D1A74}"/>
-          </ac:spMkLst>
-        </pc:spChg>
-        <pc:spChg chg="del">
-          <ac:chgData name="Fatima Pillosu" userId="a6295d4dc9e22643" providerId="LiveId" clId="{1093EB27-9F30-4B4D-905C-2834195C41DA}" dt="2025-05-14T13:42:39.324" v="0" actId="478"/>
-          <ac:spMkLst>
-            <pc:docMk/>
-            <pc:sldMk cId="2416666445" sldId="256"/>
-            <ac:spMk id="138" creationId="{8C91D6B6-0521-29E6-9258-14B878EBB9B9}"/>
-          </ac:spMkLst>
-        </pc:spChg>
-        <pc:picChg chg="add del mod">
-          <ac:chgData name="Fatima Pillosu" userId="a6295d4dc9e22643" providerId="LiveId" clId="{1093EB27-9F30-4B4D-905C-2834195C41DA}" dt="2025-05-26T05:48:03.628" v="322" actId="21"/>
-          <ac:picMkLst>
-            <pc:docMk/>
-            <pc:sldMk cId="2416666445" sldId="256"/>
-            <ac:picMk id="2" creationId="{5576DFB5-07C9-9C7F-52D6-98F487E9338C}"/>
-          </ac:picMkLst>
-        </pc:picChg>
-        <pc:picChg chg="add del mod">
-          <ac:chgData name="Fatima Pillosu" userId="a6295d4dc9e22643" providerId="LiveId" clId="{1093EB27-9F30-4B4D-905C-2834195C41DA}" dt="2025-05-26T05:42:15.667" v="42" actId="21"/>
-          <ac:picMkLst>
-            <pc:docMk/>
-            <pc:sldMk cId="2416666445" sldId="256"/>
-            <ac:picMk id="3" creationId="{5576DFB5-07C9-9C7F-52D6-98F487E9338C}"/>
-          </ac:picMkLst>
-        </pc:picChg>
-        <pc:picChg chg="add del mod">
-          <ac:chgData name="Fatima Pillosu" userId="a6295d4dc9e22643" providerId="LiveId" clId="{1093EB27-9F30-4B4D-905C-2834195C41DA}" dt="2025-05-26T05:42:15.667" v="42" actId="21"/>
-          <ac:picMkLst>
-            <pc:docMk/>
-            <pc:sldMk cId="2416666445" sldId="256"/>
-            <ac:picMk id="4" creationId="{C0EA9BA7-9BA3-87E1-85A9-F8ACC1C32D13}"/>
-          </ac:picMkLst>
-        </pc:picChg>
-        <pc:picChg chg="add del mod">
-          <ac:chgData name="Fatima Pillosu" userId="a6295d4dc9e22643" providerId="LiveId" clId="{1093EB27-9F30-4B4D-905C-2834195C41DA}" dt="2025-05-26T05:48:03.628" v="322" actId="21"/>
-          <ac:picMkLst>
-            <pc:docMk/>
-            <pc:sldMk cId="2416666445" sldId="256"/>
-            <ac:picMk id="47" creationId="{C0EA9BA7-9BA3-87E1-85A9-F8ACC1C32D13}"/>
-          </ac:picMkLst>
-        </pc:picChg>
-        <pc:picChg chg="add mod">
-          <ac:chgData name="Fatima Pillosu" userId="a6295d4dc9e22643" providerId="LiveId" clId="{1093EB27-9F30-4B4D-905C-2834195C41DA}" dt="2025-05-26T05:48:22.544" v="326" actId="1036"/>
-          <ac:picMkLst>
-            <pc:docMk/>
-            <pc:sldMk cId="2416666445" sldId="256"/>
-            <ac:picMk id="92" creationId="{5576DFB5-07C9-9C7F-52D6-98F487E9338C}"/>
-          </ac:picMkLst>
-        </pc:picChg>
-        <pc:picChg chg="add mod">
-          <ac:chgData name="Fatima Pillosu" userId="a6295d4dc9e22643" providerId="LiveId" clId="{1093EB27-9F30-4B4D-905C-2834195C41DA}" dt="2025-05-26T05:48:22.544" v="326" actId="1036"/>
-          <ac:picMkLst>
-            <pc:docMk/>
-            <pc:sldMk cId="2416666445" sldId="256"/>
-            <ac:picMk id="93" creationId="{C0EA9BA7-9BA3-87E1-85A9-F8ACC1C32D13}"/>
-          </ac:picMkLst>
-        </pc:picChg>
-        <pc:picChg chg="del mod">
-          <ac:chgData name="Fatima Pillosu" userId="a6295d4dc9e22643" providerId="LiveId" clId="{1093EB27-9F30-4B4D-905C-2834195C41DA}" dt="2025-05-14T13:43:17.514" v="40" actId="21"/>
-          <ac:picMkLst>
-            <pc:docMk/>
-            <pc:sldMk cId="2416666445" sldId="256"/>
-            <ac:picMk id="94" creationId="{5576DFB5-07C9-9C7F-52D6-98F487E9338C}"/>
-          </ac:picMkLst>
-        </pc:picChg>
-        <pc:picChg chg="del mod">
-          <ac:chgData name="Fatima Pillosu" userId="a6295d4dc9e22643" providerId="LiveId" clId="{1093EB27-9F30-4B4D-905C-2834195C41DA}" dt="2025-05-14T13:43:17.514" v="40" actId="21"/>
-          <ac:picMkLst>
-            <pc:docMk/>
-            <pc:sldMk cId="2416666445" sldId="256"/>
-            <ac:picMk id="95" creationId="{C0EA9BA7-9BA3-87E1-85A9-F8ACC1C32D13}"/>
-          </ac:picMkLst>
-        </pc:picChg>
-      </pc:sldChg>
-    </pc:docChg>
-  </pc:docChgLst>
-  <pc:docChgLst>
-    <pc:chgData name="Fatima Pillosu" userId="a6295d4dc9e22643" providerId="LiveId" clId="{8D3BC836-00A8-43C5-A7CA-D04A9606022E}"/>
-    <pc:docChg chg="custSel modSld">
-      <pc:chgData name="Fatima Pillosu" userId="a6295d4dc9e22643" providerId="LiveId" clId="{8D3BC836-00A8-43C5-A7CA-D04A9606022E}" dt="2024-04-05T08:13:41.711" v="36" actId="1036"/>
-      <pc:docMkLst>
-        <pc:docMk/>
-      </pc:docMkLst>
-      <pc:sldChg chg="addSp delSp modSp mod">
-        <pc:chgData name="Fatima Pillosu" userId="a6295d4dc9e22643" providerId="LiveId" clId="{8D3BC836-00A8-43C5-A7CA-D04A9606022E}" dt="2024-04-05T08:13:41.711" v="36" actId="1036"/>
-        <pc:sldMkLst>
-          <pc:docMk/>
-          <pc:sldMk cId="2416666445" sldId="256"/>
-        </pc:sldMkLst>
-        <pc:spChg chg="add del">
-          <ac:chgData name="Fatima Pillosu" userId="a6295d4dc9e22643" providerId="LiveId" clId="{8D3BC836-00A8-43C5-A7CA-D04A9606022E}" dt="2024-04-05T08:13:17.955" v="32" actId="478"/>
-          <ac:spMkLst>
-            <pc:docMk/>
-            <pc:sldMk cId="2416666445" sldId="256"/>
-            <ac:spMk id="2" creationId="{903FB891-CE86-0083-BCE0-6B5D5DA3F60B}"/>
-          </ac:spMkLst>
-        </pc:spChg>
-        <pc:spChg chg="add mod">
-          <ac:chgData name="Fatima Pillosu" userId="a6295d4dc9e22643" providerId="LiveId" clId="{8D3BC836-00A8-43C5-A7CA-D04A9606022E}" dt="2024-04-05T08:13:41.711" v="36" actId="1036"/>
-          <ac:spMkLst>
-            <pc:docMk/>
-            <pc:sldMk cId="2416666445" sldId="256"/>
-            <ac:spMk id="5" creationId="{384D6C06-DC18-FF34-E84C-3BC146A8D3F9}"/>
-          </ac:spMkLst>
-        </pc:spChg>
-        <pc:spChg chg="add mod">
-          <ac:chgData name="Fatima Pillosu" userId="a6295d4dc9e22643" providerId="LiveId" clId="{8D3BC836-00A8-43C5-A7CA-D04A9606022E}" dt="2024-04-05T08:13:41.711" v="36" actId="1036"/>
-          <ac:spMkLst>
-            <pc:docMk/>
-            <pc:sldMk cId="2416666445" sldId="256"/>
-            <ac:spMk id="6" creationId="{083AEDDC-E5EB-E07A-CF91-E947C367E6C5}"/>
-          </ac:spMkLst>
-        </pc:spChg>
-        <pc:spChg chg="add mod">
-          <ac:chgData name="Fatima Pillosu" userId="a6295d4dc9e22643" providerId="LiveId" clId="{8D3BC836-00A8-43C5-A7CA-D04A9606022E}" dt="2024-04-05T08:13:41.711" v="36" actId="1036"/>
-          <ac:spMkLst>
-            <pc:docMk/>
-            <pc:sldMk cId="2416666445" sldId="256"/>
-            <ac:spMk id="7" creationId="{7EAFBB19-EFE8-1704-7506-55700BFD22E4}"/>
-          </ac:spMkLst>
-        </pc:spChg>
-        <pc:spChg chg="add mod">
-          <ac:chgData name="Fatima Pillosu" userId="a6295d4dc9e22643" providerId="LiveId" clId="{8D3BC836-00A8-43C5-A7CA-D04A9606022E}" dt="2024-04-05T08:13:41.711" v="36" actId="1036"/>
-          <ac:spMkLst>
-            <pc:docMk/>
-            <pc:sldMk cId="2416666445" sldId="256"/>
-            <ac:spMk id="8" creationId="{08E525C9-8B8B-856F-6464-CD2A9FEC19DD}"/>
-          </ac:spMkLst>
-        </pc:spChg>
-        <pc:spChg chg="add mod">
-          <ac:chgData name="Fatima Pillosu" userId="a6295d4dc9e22643" providerId="LiveId" clId="{8D3BC836-00A8-43C5-A7CA-D04A9606022E}" dt="2024-04-05T08:13:41.711" v="36" actId="1036"/>
-          <ac:spMkLst>
-            <pc:docMk/>
-            <pc:sldMk cId="2416666445" sldId="256"/>
-            <ac:spMk id="9" creationId="{823987BF-6FA7-EC5E-C5ED-325313D2AE59}"/>
-          </ac:spMkLst>
-        </pc:spChg>
-        <pc:spChg chg="add mod">
-          <ac:chgData name="Fatima Pillosu" userId="a6295d4dc9e22643" providerId="LiveId" clId="{8D3BC836-00A8-43C5-A7CA-D04A9606022E}" dt="2024-04-05T08:13:41.711" v="36" actId="1036"/>
-          <ac:spMkLst>
-            <pc:docMk/>
-            <pc:sldMk cId="2416666445" sldId="256"/>
-            <ac:spMk id="10" creationId="{26903909-39B6-BA49-59C4-AF4507DF29BF}"/>
-          </ac:spMkLst>
-        </pc:spChg>
-        <pc:spChg chg="add mod">
-          <ac:chgData name="Fatima Pillosu" userId="a6295d4dc9e22643" providerId="LiveId" clId="{8D3BC836-00A8-43C5-A7CA-D04A9606022E}" dt="2024-04-05T08:13:41.711" v="36" actId="1036"/>
-          <ac:spMkLst>
-            <pc:docMk/>
-            <pc:sldMk cId="2416666445" sldId="256"/>
-            <ac:spMk id="11" creationId="{0C834787-FEEB-B977-952A-288699762B58}"/>
-          </ac:spMkLst>
-        </pc:spChg>
-        <pc:spChg chg="add mod">
-          <ac:chgData name="Fatima Pillosu" userId="a6295d4dc9e22643" providerId="LiveId" clId="{8D3BC836-00A8-43C5-A7CA-D04A9606022E}" dt="2024-04-05T08:13:41.711" v="36" actId="1036"/>
-          <ac:spMkLst>
-            <pc:docMk/>
-            <pc:sldMk cId="2416666445" sldId="256"/>
-            <ac:spMk id="12" creationId="{61400BA6-3D3A-1190-AD65-CF1147A3BCBC}"/>
-          </ac:spMkLst>
-        </pc:spChg>
-        <pc:spChg chg="add mod">
-          <ac:chgData name="Fatima Pillosu" userId="a6295d4dc9e22643" providerId="LiveId" clId="{8D3BC836-00A8-43C5-A7CA-D04A9606022E}" dt="2024-04-05T08:13:41.711" v="36" actId="1036"/>
-          <ac:spMkLst>
-            <pc:docMk/>
-            <pc:sldMk cId="2416666445" sldId="256"/>
-            <ac:spMk id="13" creationId="{F77F9084-F223-ED65-669A-F6F51F897BA2}"/>
-          </ac:spMkLst>
-        </pc:spChg>
-        <pc:spChg chg="add mod">
-          <ac:chgData name="Fatima Pillosu" userId="a6295d4dc9e22643" providerId="LiveId" clId="{8D3BC836-00A8-43C5-A7CA-D04A9606022E}" dt="2024-04-05T08:13:41.711" v="36" actId="1036"/>
-          <ac:spMkLst>
-            <pc:docMk/>
-            <pc:sldMk cId="2416666445" sldId="256"/>
-            <ac:spMk id="14" creationId="{E58B7622-486E-AF0A-77FA-6A257F911DE9}"/>
-          </ac:spMkLst>
-        </pc:spChg>
-        <pc:spChg chg="add mod">
-          <ac:chgData name="Fatima Pillosu" userId="a6295d4dc9e22643" providerId="LiveId" clId="{8D3BC836-00A8-43C5-A7CA-D04A9606022E}" dt="2024-04-05T08:13:41.711" v="36" actId="1036"/>
-          <ac:spMkLst>
-            <pc:docMk/>
-            <pc:sldMk cId="2416666445" sldId="256"/>
-            <ac:spMk id="15" creationId="{53D672B0-A6EA-4276-A5B9-C5164A9A326F}"/>
-          </ac:spMkLst>
-        </pc:spChg>
-        <pc:spChg chg="add mod">
-          <ac:chgData name="Fatima Pillosu" userId="a6295d4dc9e22643" providerId="LiveId" clId="{8D3BC836-00A8-43C5-A7CA-D04A9606022E}" dt="2024-04-05T08:13:41.711" v="36" actId="1036"/>
-          <ac:spMkLst>
-            <pc:docMk/>
-            <pc:sldMk cId="2416666445" sldId="256"/>
-            <ac:spMk id="16" creationId="{FC073318-9596-D679-740B-BA408BA68B78}"/>
-          </ac:spMkLst>
-        </pc:spChg>
-        <pc:spChg chg="add mod">
-          <ac:chgData name="Fatima Pillosu" userId="a6295d4dc9e22643" providerId="LiveId" clId="{8D3BC836-00A8-43C5-A7CA-D04A9606022E}" dt="2024-04-05T08:13:41.711" v="36" actId="1036"/>
-          <ac:spMkLst>
-            <pc:docMk/>
-            <pc:sldMk cId="2416666445" sldId="256"/>
-            <ac:spMk id="17" creationId="{95D8CFCC-5F17-C4D6-6F70-8501F37736D8}"/>
-          </ac:spMkLst>
-        </pc:spChg>
-        <pc:spChg chg="add mod">
-          <ac:chgData name="Fatima Pillosu" userId="a6295d4dc9e22643" providerId="LiveId" clId="{8D3BC836-00A8-43C5-A7CA-D04A9606022E}" dt="2024-04-05T08:13:41.711" v="36" actId="1036"/>
-          <ac:spMkLst>
-            <pc:docMk/>
-            <pc:sldMk cId="2416666445" sldId="256"/>
-            <ac:spMk id="18" creationId="{E06CF797-8451-574D-21F0-384E8A3452B7}"/>
-          </ac:spMkLst>
-        </pc:spChg>
-        <pc:spChg chg="add mod">
-          <ac:chgData name="Fatima Pillosu" userId="a6295d4dc9e22643" providerId="LiveId" clId="{8D3BC836-00A8-43C5-A7CA-D04A9606022E}" dt="2024-04-05T08:13:41.711" v="36" actId="1036"/>
-          <ac:spMkLst>
-            <pc:docMk/>
-            <pc:sldMk cId="2416666445" sldId="256"/>
-            <ac:spMk id="19" creationId="{CFB3D8FA-6A39-82FF-7103-9C3B87E3F64B}"/>
-          </ac:spMkLst>
-        </pc:spChg>
-        <pc:spChg chg="add mod">
-          <ac:chgData name="Fatima Pillosu" userId="a6295d4dc9e22643" providerId="LiveId" clId="{8D3BC836-00A8-43C5-A7CA-D04A9606022E}" dt="2024-04-05T08:13:41.711" v="36" actId="1036"/>
-          <ac:spMkLst>
-            <pc:docMk/>
-            <pc:sldMk cId="2416666445" sldId="256"/>
-            <ac:spMk id="20" creationId="{5B2D0398-5206-B218-FB65-5E89CE52B185}"/>
-          </ac:spMkLst>
-        </pc:spChg>
-        <pc:spChg chg="add mod">
-          <ac:chgData name="Fatima Pillosu" userId="a6295d4dc9e22643" providerId="LiveId" clId="{8D3BC836-00A8-43C5-A7CA-D04A9606022E}" dt="2024-04-05T08:13:41.711" v="36" actId="1036"/>
-          <ac:spMkLst>
-            <pc:docMk/>
-            <pc:sldMk cId="2416666445" sldId="256"/>
-            <ac:spMk id="21" creationId="{E8F93690-0FC3-3203-F616-27D0636BD86D}"/>
-          </ac:spMkLst>
-        </pc:spChg>
-        <pc:spChg chg="add mod">
-          <ac:chgData name="Fatima Pillosu" userId="a6295d4dc9e22643" providerId="LiveId" clId="{8D3BC836-00A8-43C5-A7CA-D04A9606022E}" dt="2024-04-05T08:13:41.711" v="36" actId="1036"/>
-          <ac:spMkLst>
-            <pc:docMk/>
-            <pc:sldMk cId="2416666445" sldId="256"/>
-            <ac:spMk id="22" creationId="{98EE0CB6-A0DD-61DA-6B6B-D4EC8957FF3D}"/>
-          </ac:spMkLst>
-        </pc:spChg>
-        <pc:spChg chg="add mod">
-          <ac:chgData name="Fatima Pillosu" userId="a6295d4dc9e22643" providerId="LiveId" clId="{8D3BC836-00A8-43C5-A7CA-D04A9606022E}" dt="2024-04-05T08:13:41.711" v="36" actId="1036"/>
-          <ac:spMkLst>
-            <pc:docMk/>
-            <pc:sldMk cId="2416666445" sldId="256"/>
-            <ac:spMk id="23" creationId="{5C604597-7B68-19A8-35F6-C8E80447309D}"/>
-          </ac:spMkLst>
-        </pc:spChg>
-        <pc:spChg chg="add mod">
-          <ac:chgData name="Fatima Pillosu" userId="a6295d4dc9e22643" providerId="LiveId" clId="{8D3BC836-00A8-43C5-A7CA-D04A9606022E}" dt="2024-04-05T08:13:41.711" v="36" actId="1036"/>
-          <ac:spMkLst>
-            <pc:docMk/>
-            <pc:sldMk cId="2416666445" sldId="256"/>
-            <ac:spMk id="24" creationId="{37EBCA7E-9713-7AE3-638B-C84D5A1C2253}"/>
-          </ac:spMkLst>
-        </pc:spChg>
-        <pc:spChg chg="add mod">
-          <ac:chgData name="Fatima Pillosu" userId="a6295d4dc9e22643" providerId="LiveId" clId="{8D3BC836-00A8-43C5-A7CA-D04A9606022E}" dt="2024-04-05T08:13:41.711" v="36" actId="1036"/>
-          <ac:spMkLst>
-            <pc:docMk/>
-            <pc:sldMk cId="2416666445" sldId="256"/>
-            <ac:spMk id="25" creationId="{65B70626-067E-1AE7-11BD-EC7DA8DABC28}"/>
-          </ac:spMkLst>
-        </pc:spChg>
-        <pc:spChg chg="add mod">
-          <ac:chgData name="Fatima Pillosu" userId="a6295d4dc9e22643" providerId="LiveId" clId="{8D3BC836-00A8-43C5-A7CA-D04A9606022E}" dt="2024-04-05T08:13:41.711" v="36" actId="1036"/>
-          <ac:spMkLst>
-            <pc:docMk/>
-            <pc:sldMk cId="2416666445" sldId="256"/>
-            <ac:spMk id="26" creationId="{C7BCE81D-7A63-8764-295C-1A6242CC4274}"/>
-          </ac:spMkLst>
-        </pc:spChg>
-        <pc:spChg chg="add mod">
-          <ac:chgData name="Fatima Pillosu" userId="a6295d4dc9e22643" providerId="LiveId" clId="{8D3BC836-00A8-43C5-A7CA-D04A9606022E}" dt="2024-04-05T08:13:41.711" v="36" actId="1036"/>
-          <ac:spMkLst>
-            <pc:docMk/>
-            <pc:sldMk cId="2416666445" sldId="256"/>
-            <ac:spMk id="27" creationId="{A6515F5F-2E20-7D13-537C-F772A00535F4}"/>
-          </ac:spMkLst>
-        </pc:spChg>
-        <pc:spChg chg="add mod">
-          <ac:chgData name="Fatima Pillosu" userId="a6295d4dc9e22643" providerId="LiveId" clId="{8D3BC836-00A8-43C5-A7CA-D04A9606022E}" dt="2024-04-05T08:13:41.711" v="36" actId="1036"/>
-          <ac:spMkLst>
-            <pc:docMk/>
-            <pc:sldMk cId="2416666445" sldId="256"/>
-            <ac:spMk id="28" creationId="{50B578E0-62E1-B8F6-ECD2-2E7AA0CF70F9}"/>
-          </ac:spMkLst>
-        </pc:spChg>
-        <pc:spChg chg="add mod">
-          <ac:chgData name="Fatima Pillosu" userId="a6295d4dc9e22643" providerId="LiveId" clId="{8D3BC836-00A8-43C5-A7CA-D04A9606022E}" dt="2024-04-05T08:13:41.711" v="36" actId="1036"/>
-          <ac:spMkLst>
-            <pc:docMk/>
-            <pc:sldMk cId="2416666445" sldId="256"/>
-            <ac:spMk id="29" creationId="{F4D19594-8958-5678-A91A-D009CFEE0A3F}"/>
-          </ac:spMkLst>
-        </pc:spChg>
-        <pc:spChg chg="add mod">
-          <ac:chgData name="Fatima Pillosu" userId="a6295d4dc9e22643" providerId="LiveId" clId="{8D3BC836-00A8-43C5-A7CA-D04A9606022E}" dt="2024-04-05T08:13:41.711" v="36" actId="1036"/>
-          <ac:spMkLst>
-            <pc:docMk/>
-            <pc:sldMk cId="2416666445" sldId="256"/>
-            <ac:spMk id="30" creationId="{5ED4F7E3-EC48-9668-BA84-2D97CF23BD85}"/>
-          </ac:spMkLst>
-        </pc:spChg>
-        <pc:spChg chg="add mod">
-          <ac:chgData name="Fatima Pillosu" userId="a6295d4dc9e22643" providerId="LiveId" clId="{8D3BC836-00A8-43C5-A7CA-D04A9606022E}" dt="2024-04-05T08:13:41.711" v="36" actId="1036"/>
-          <ac:spMkLst>
-            <pc:docMk/>
-            <pc:sldMk cId="2416666445" sldId="256"/>
-            <ac:spMk id="31" creationId="{0ECA7152-99C7-A2F4-E83D-4F855AAFA37C}"/>
-          </ac:spMkLst>
-        </pc:spChg>
-        <pc:spChg chg="add mod">
-          <ac:chgData name="Fatima Pillosu" userId="a6295d4dc9e22643" providerId="LiveId" clId="{8D3BC836-00A8-43C5-A7CA-D04A9606022E}" dt="2024-04-05T08:13:41.711" v="36" actId="1036"/>
-          <ac:spMkLst>
-            <pc:docMk/>
-            <pc:sldMk cId="2416666445" sldId="256"/>
-            <ac:spMk id="32" creationId="{9FA7FCAD-7DCD-492E-33EA-E8EA0A4B7A03}"/>
-          </ac:spMkLst>
-        </pc:spChg>
-        <pc:spChg chg="add mod">
-          <ac:chgData name="Fatima Pillosu" userId="a6295d4dc9e22643" providerId="LiveId" clId="{8D3BC836-00A8-43C5-A7CA-D04A9606022E}" dt="2024-04-05T08:13:41.711" v="36" actId="1036"/>
-          <ac:spMkLst>
-            <pc:docMk/>
-            <pc:sldMk cId="2416666445" sldId="256"/>
-            <ac:spMk id="33" creationId="{27112713-98E8-0868-E1E6-C5213A18CDB4}"/>
-          </ac:spMkLst>
-        </pc:spChg>
-        <pc:spChg chg="add mod">
-          <ac:chgData name="Fatima Pillosu" userId="a6295d4dc9e22643" providerId="LiveId" clId="{8D3BC836-00A8-43C5-A7CA-D04A9606022E}" dt="2024-04-05T08:13:41.711" v="36" actId="1036"/>
-          <ac:spMkLst>
-            <pc:docMk/>
-            <pc:sldMk cId="2416666445" sldId="256"/>
-            <ac:spMk id="34" creationId="{A9DF4E4E-4BD6-4A43-6D8D-57FA7E5B4C8A}"/>
-          </ac:spMkLst>
-        </pc:spChg>
-        <pc:spChg chg="add mod">
-          <ac:chgData name="Fatima Pillosu" userId="a6295d4dc9e22643" providerId="LiveId" clId="{8D3BC836-00A8-43C5-A7CA-D04A9606022E}" dt="2024-04-05T08:13:41.711" v="36" actId="1036"/>
-          <ac:spMkLst>
-            <pc:docMk/>
-            <pc:sldMk cId="2416666445" sldId="256"/>
-            <ac:spMk id="35" creationId="{F880BE35-27AF-2DCD-5D81-D484CE796AE1}"/>
-          </ac:spMkLst>
-        </pc:spChg>
-        <pc:spChg chg="add mod">
-          <ac:chgData name="Fatima Pillosu" userId="a6295d4dc9e22643" providerId="LiveId" clId="{8D3BC836-00A8-43C5-A7CA-D04A9606022E}" dt="2024-04-05T08:13:41.711" v="36" actId="1036"/>
-          <ac:spMkLst>
-            <pc:docMk/>
-            <pc:sldMk cId="2416666445" sldId="256"/>
-            <ac:spMk id="36" creationId="{EA8BFD8B-1858-9531-2319-F3352B9FCE3E}"/>
-          </ac:spMkLst>
-        </pc:spChg>
-        <pc:spChg chg="add mod">
-          <ac:chgData name="Fatima Pillosu" userId="a6295d4dc9e22643" providerId="LiveId" clId="{8D3BC836-00A8-43C5-A7CA-D04A9606022E}" dt="2024-04-05T08:13:41.711" v="36" actId="1036"/>
-          <ac:spMkLst>
-            <pc:docMk/>
-            <pc:sldMk cId="2416666445" sldId="256"/>
-            <ac:spMk id="37" creationId="{804E7FEC-AF83-FD28-4A16-70D6430EB6E5}"/>
-          </ac:spMkLst>
-        </pc:spChg>
-        <pc:spChg chg="add mod">
-          <ac:chgData name="Fatima Pillosu" userId="a6295d4dc9e22643" providerId="LiveId" clId="{8D3BC836-00A8-43C5-A7CA-D04A9606022E}" dt="2024-04-05T08:13:41.711" v="36" actId="1036"/>
-          <ac:spMkLst>
-            <pc:docMk/>
-            <pc:sldMk cId="2416666445" sldId="256"/>
-            <ac:spMk id="38" creationId="{F1AE0BC5-794B-D23C-A945-2D48666A380B}"/>
-          </ac:spMkLst>
-        </pc:spChg>
-        <pc:spChg chg="add mod">
-          <ac:chgData name="Fatima Pillosu" userId="a6295d4dc9e22643" providerId="LiveId" clId="{8D3BC836-00A8-43C5-A7CA-D04A9606022E}" dt="2024-04-05T08:13:41.711" v="36" actId="1036"/>
-          <ac:spMkLst>
-            <pc:docMk/>
-            <pc:sldMk cId="2416666445" sldId="256"/>
-            <ac:spMk id="39" creationId="{3848180B-A357-5916-14AE-BEBA0E61C958}"/>
-          </ac:spMkLst>
-        </pc:spChg>
-        <pc:spChg chg="add mod">
-          <ac:chgData name="Fatima Pillosu" userId="a6295d4dc9e22643" providerId="LiveId" clId="{8D3BC836-00A8-43C5-A7CA-D04A9606022E}" dt="2024-04-05T08:13:41.711" v="36" actId="1036"/>
-          <ac:spMkLst>
-            <pc:docMk/>
-            <pc:sldMk cId="2416666445" sldId="256"/>
-            <ac:spMk id="40" creationId="{F88C8933-F6FB-E197-23C5-6A6AC1467788}"/>
-          </ac:spMkLst>
-        </pc:spChg>
-        <pc:spChg chg="add mod">
-          <ac:chgData name="Fatima Pillosu" userId="a6295d4dc9e22643" providerId="LiveId" clId="{8D3BC836-00A8-43C5-A7CA-D04A9606022E}" dt="2024-04-05T08:13:41.711" v="36" actId="1036"/>
-          <ac:spMkLst>
-            <pc:docMk/>
-            <pc:sldMk cId="2416666445" sldId="256"/>
-            <ac:spMk id="41" creationId="{708DFDE3-CB83-C412-EE9B-B89348B18975}"/>
-          </ac:spMkLst>
-        </pc:spChg>
-        <pc:spChg chg="del mod">
-          <ac:chgData name="Fatima Pillosu" userId="a6295d4dc9e22643" providerId="LiveId" clId="{8D3BC836-00A8-43C5-A7CA-D04A9606022E}" dt="2024-04-05T08:13:22.062" v="33" actId="21"/>
-          <ac:spMkLst>
-            <pc:docMk/>
-            <pc:sldMk cId="2416666445" sldId="256"/>
-            <ac:spMk id="89" creationId="{384D6C06-DC18-FF34-E84C-3BC146A8D3F9}"/>
-          </ac:spMkLst>
-        </pc:spChg>
-        <pc:spChg chg="del mod">
-          <ac:chgData name="Fatima Pillosu" userId="a6295d4dc9e22643" providerId="LiveId" clId="{8D3BC836-00A8-43C5-A7CA-D04A9606022E}" dt="2024-04-05T08:13:22.062" v="33" actId="21"/>
-          <ac:spMkLst>
-            <pc:docMk/>
-            <pc:sldMk cId="2416666445" sldId="256"/>
-            <ac:spMk id="90" creationId="{083AEDDC-E5EB-E07A-CF91-E947C367E6C5}"/>
-          </ac:spMkLst>
-        </pc:spChg>
-        <pc:spChg chg="del mod">
-          <ac:chgData name="Fatima Pillosu" userId="a6295d4dc9e22643" providerId="LiveId" clId="{8D3BC836-00A8-43C5-A7CA-D04A9606022E}" dt="2024-04-05T08:13:22.062" v="33" actId="21"/>
-          <ac:spMkLst>
-            <pc:docMk/>
-            <pc:sldMk cId="2416666445" sldId="256"/>
-            <ac:spMk id="91" creationId="{7EAFBB19-EFE8-1704-7506-55700BFD22E4}"/>
-          </ac:spMkLst>
-        </pc:spChg>
-        <pc:spChg chg="del mod">
-          <ac:chgData name="Fatima Pillosu" userId="a6295d4dc9e22643" providerId="LiveId" clId="{8D3BC836-00A8-43C5-A7CA-D04A9606022E}" dt="2024-04-05T08:13:22.062" v="33" actId="21"/>
-          <ac:spMkLst>
-            <pc:docMk/>
-            <pc:sldMk cId="2416666445" sldId="256"/>
-            <ac:spMk id="92" creationId="{08E525C9-8B8B-856F-6464-CD2A9FEC19DD}"/>
-          </ac:spMkLst>
-        </pc:spChg>
-        <pc:spChg chg="del mod">
-          <ac:chgData name="Fatima Pillosu" userId="a6295d4dc9e22643" providerId="LiveId" clId="{8D3BC836-00A8-43C5-A7CA-D04A9606022E}" dt="2024-04-05T08:13:22.062" v="33" actId="21"/>
-          <ac:spMkLst>
-            <pc:docMk/>
-            <pc:sldMk cId="2416666445" sldId="256"/>
-            <ac:spMk id="93" creationId="{823987BF-6FA7-EC5E-C5ED-325313D2AE59}"/>
-          </ac:spMkLst>
-        </pc:spChg>
-        <pc:spChg chg="del mod">
-          <ac:chgData name="Fatima Pillosu" userId="a6295d4dc9e22643" providerId="LiveId" clId="{8D3BC836-00A8-43C5-A7CA-D04A9606022E}" dt="2024-04-05T08:13:22.062" v="33" actId="21"/>
-          <ac:spMkLst>
-            <pc:docMk/>
-            <pc:sldMk cId="2416666445" sldId="256"/>
-            <ac:spMk id="94" creationId="{26903909-39B6-BA49-59C4-AF4507DF29BF}"/>
-          </ac:spMkLst>
-        </pc:spChg>
-        <pc:spChg chg="del mod">
-          <ac:chgData name="Fatima Pillosu" userId="a6295d4dc9e22643" providerId="LiveId" clId="{8D3BC836-00A8-43C5-A7CA-D04A9606022E}" dt="2024-04-05T08:13:22.062" v="33" actId="21"/>
-          <ac:spMkLst>
-            <pc:docMk/>
-            <pc:sldMk cId="2416666445" sldId="256"/>
-            <ac:spMk id="95" creationId="{0C834787-FEEB-B977-952A-288699762B58}"/>
-          </ac:spMkLst>
-        </pc:spChg>
-        <pc:spChg chg="del mod">
-          <ac:chgData name="Fatima Pillosu" userId="a6295d4dc9e22643" providerId="LiveId" clId="{8D3BC836-00A8-43C5-A7CA-D04A9606022E}" dt="2024-04-05T08:13:22.062" v="33" actId="21"/>
-          <ac:spMkLst>
-            <pc:docMk/>
-            <pc:sldMk cId="2416666445" sldId="256"/>
-            <ac:spMk id="96" creationId="{61400BA6-3D3A-1190-AD65-CF1147A3BCBC}"/>
-          </ac:spMkLst>
-        </pc:spChg>
-        <pc:spChg chg="del mod">
-          <ac:chgData name="Fatima Pillosu" userId="a6295d4dc9e22643" providerId="LiveId" clId="{8D3BC836-00A8-43C5-A7CA-D04A9606022E}" dt="2024-04-05T08:13:22.062" v="33" actId="21"/>
-          <ac:spMkLst>
-            <pc:docMk/>
-            <pc:sldMk cId="2416666445" sldId="256"/>
-            <ac:spMk id="97" creationId="{F77F9084-F223-ED65-669A-F6F51F897BA2}"/>
-          </ac:spMkLst>
-        </pc:spChg>
-        <pc:spChg chg="del mod">
-          <ac:chgData name="Fatima Pillosu" userId="a6295d4dc9e22643" providerId="LiveId" clId="{8D3BC836-00A8-43C5-A7CA-D04A9606022E}" dt="2024-04-05T08:13:22.062" v="33" actId="21"/>
-          <ac:spMkLst>
-            <pc:docMk/>
-            <pc:sldMk cId="2416666445" sldId="256"/>
-            <ac:spMk id="98" creationId="{E58B7622-486E-AF0A-77FA-6A257F911DE9}"/>
-          </ac:spMkLst>
-        </pc:spChg>
-        <pc:spChg chg="del mod">
-          <ac:chgData name="Fatima Pillosu" userId="a6295d4dc9e22643" providerId="LiveId" clId="{8D3BC836-00A8-43C5-A7CA-D04A9606022E}" dt="2024-04-05T08:13:22.062" v="33" actId="21"/>
-          <ac:spMkLst>
-            <pc:docMk/>
-            <pc:sldMk cId="2416666445" sldId="256"/>
-            <ac:spMk id="99" creationId="{53D672B0-A6EA-4276-A5B9-C5164A9A326F}"/>
-          </ac:spMkLst>
-        </pc:spChg>
-        <pc:spChg chg="del mod">
-          <ac:chgData name="Fatima Pillosu" userId="a6295d4dc9e22643" providerId="LiveId" clId="{8D3BC836-00A8-43C5-A7CA-D04A9606022E}" dt="2024-04-05T08:13:22.062" v="33" actId="21"/>
-          <ac:spMkLst>
-            <pc:docMk/>
-            <pc:sldMk cId="2416666445" sldId="256"/>
-            <ac:spMk id="100" creationId="{FC073318-9596-D679-740B-BA408BA68B78}"/>
-          </ac:spMkLst>
-        </pc:spChg>
-        <pc:spChg chg="del mod">
-          <ac:chgData name="Fatima Pillosu" userId="a6295d4dc9e22643" providerId="LiveId" clId="{8D3BC836-00A8-43C5-A7CA-D04A9606022E}" dt="2024-04-05T08:13:22.062" v="33" actId="21"/>
-          <ac:spMkLst>
-            <pc:docMk/>
-            <pc:sldMk cId="2416666445" sldId="256"/>
-            <ac:spMk id="101" creationId="{95D8CFCC-5F17-C4D6-6F70-8501F37736D8}"/>
-          </ac:spMkLst>
-        </pc:spChg>
-        <pc:spChg chg="del mod">
-          <ac:chgData name="Fatima Pillosu" userId="a6295d4dc9e22643" providerId="LiveId" clId="{8D3BC836-00A8-43C5-A7CA-D04A9606022E}" dt="2024-04-05T08:13:22.062" v="33" actId="21"/>
-          <ac:spMkLst>
-            <pc:docMk/>
-            <pc:sldMk cId="2416666445" sldId="256"/>
-            <ac:spMk id="102" creationId="{E06CF797-8451-574D-21F0-384E8A3452B7}"/>
-          </ac:spMkLst>
-        </pc:spChg>
-        <pc:spChg chg="del mod">
-          <ac:chgData name="Fatima Pillosu" userId="a6295d4dc9e22643" providerId="LiveId" clId="{8D3BC836-00A8-43C5-A7CA-D04A9606022E}" dt="2024-04-05T08:13:22.062" v="33" actId="21"/>
-          <ac:spMkLst>
-            <pc:docMk/>
-            <pc:sldMk cId="2416666445" sldId="256"/>
-            <ac:spMk id="103" creationId="{CFB3D8FA-6A39-82FF-7103-9C3B87E3F64B}"/>
-          </ac:spMkLst>
-        </pc:spChg>
-        <pc:spChg chg="del mod">
-          <ac:chgData name="Fatima Pillosu" userId="a6295d4dc9e22643" providerId="LiveId" clId="{8D3BC836-00A8-43C5-A7CA-D04A9606022E}" dt="2024-04-05T08:13:22.062" v="33" actId="21"/>
-          <ac:spMkLst>
-            <pc:docMk/>
-            <pc:sldMk cId="2416666445" sldId="256"/>
-            <ac:spMk id="104" creationId="{5B2D0398-5206-B218-FB65-5E89CE52B185}"/>
-          </ac:spMkLst>
-        </pc:spChg>
-        <pc:spChg chg="del mod">
-          <ac:chgData name="Fatima Pillosu" userId="a6295d4dc9e22643" providerId="LiveId" clId="{8D3BC836-00A8-43C5-A7CA-D04A9606022E}" dt="2024-04-05T08:13:22.062" v="33" actId="21"/>
-          <ac:spMkLst>
-            <pc:docMk/>
-            <pc:sldMk cId="2416666445" sldId="256"/>
-            <ac:spMk id="105" creationId="{E8F93690-0FC3-3203-F616-27D0636BD86D}"/>
-          </ac:spMkLst>
-        </pc:spChg>
-        <pc:spChg chg="del mod">
-          <ac:chgData name="Fatima Pillosu" userId="a6295d4dc9e22643" providerId="LiveId" clId="{8D3BC836-00A8-43C5-A7CA-D04A9606022E}" dt="2024-04-05T08:13:22.062" v="33" actId="21"/>
-          <ac:spMkLst>
-            <pc:docMk/>
-            <pc:sldMk cId="2416666445" sldId="256"/>
-            <ac:spMk id="106" creationId="{98EE0CB6-A0DD-61DA-6B6B-D4EC8957FF3D}"/>
-          </ac:spMkLst>
-        </pc:spChg>
-        <pc:spChg chg="del mod">
-          <ac:chgData name="Fatima Pillosu" userId="a6295d4dc9e22643" providerId="LiveId" clId="{8D3BC836-00A8-43C5-A7CA-D04A9606022E}" dt="2024-04-05T08:13:22.062" v="33" actId="21"/>
-          <ac:spMkLst>
-            <pc:docMk/>
-            <pc:sldMk cId="2416666445" sldId="256"/>
-            <ac:spMk id="107" creationId="{5C604597-7B68-19A8-35F6-C8E80447309D}"/>
-          </ac:spMkLst>
-        </pc:spChg>
-        <pc:spChg chg="del mod">
-          <ac:chgData name="Fatima Pillosu" userId="a6295d4dc9e22643" providerId="LiveId" clId="{8D3BC836-00A8-43C5-A7CA-D04A9606022E}" dt="2024-04-05T08:13:22.062" v="33" actId="21"/>
-          <ac:spMkLst>
-            <pc:docMk/>
-            <pc:sldMk cId="2416666445" sldId="256"/>
-            <ac:spMk id="108" creationId="{37EBCA7E-9713-7AE3-638B-C84D5A1C2253}"/>
-          </ac:spMkLst>
-        </pc:spChg>
-        <pc:spChg chg="del mod">
-          <ac:chgData name="Fatima Pillosu" userId="a6295d4dc9e22643" providerId="LiveId" clId="{8D3BC836-00A8-43C5-A7CA-D04A9606022E}" dt="2024-04-05T08:13:22.062" v="33" actId="21"/>
-          <ac:spMkLst>
-            <pc:docMk/>
-            <pc:sldMk cId="2416666445" sldId="256"/>
-            <ac:spMk id="109" creationId="{65B70626-067E-1AE7-11BD-EC7DA8DABC28}"/>
-          </ac:spMkLst>
-        </pc:spChg>
-        <pc:spChg chg="del mod">
-          <ac:chgData name="Fatima Pillosu" userId="a6295d4dc9e22643" providerId="LiveId" clId="{8D3BC836-00A8-43C5-A7CA-D04A9606022E}" dt="2024-04-05T08:13:22.062" v="33" actId="21"/>
-          <ac:spMkLst>
-            <pc:docMk/>
-            <pc:sldMk cId="2416666445" sldId="256"/>
-            <ac:spMk id="110" creationId="{C7BCE81D-7A63-8764-295C-1A6242CC4274}"/>
-          </ac:spMkLst>
-        </pc:spChg>
-        <pc:spChg chg="del mod">
-          <ac:chgData name="Fatima Pillosu" userId="a6295d4dc9e22643" providerId="LiveId" clId="{8D3BC836-00A8-43C5-A7CA-D04A9606022E}" dt="2024-04-05T08:13:22.062" v="33" actId="21"/>
-          <ac:spMkLst>
-            <pc:docMk/>
-            <pc:sldMk cId="2416666445" sldId="256"/>
-            <ac:spMk id="111" creationId="{A6515F5F-2E20-7D13-537C-F772A00535F4}"/>
-          </ac:spMkLst>
-        </pc:spChg>
-        <pc:spChg chg="del mod">
-          <ac:chgData name="Fatima Pillosu" userId="a6295d4dc9e22643" providerId="LiveId" clId="{8D3BC836-00A8-43C5-A7CA-D04A9606022E}" dt="2024-04-05T08:13:22.062" v="33" actId="21"/>
-          <ac:spMkLst>
-            <pc:docMk/>
-            <pc:sldMk cId="2416666445" sldId="256"/>
-            <ac:spMk id="112" creationId="{50B578E0-62E1-B8F6-ECD2-2E7AA0CF70F9}"/>
-          </ac:spMkLst>
-        </pc:spChg>
-        <pc:spChg chg="del mod">
-          <ac:chgData name="Fatima Pillosu" userId="a6295d4dc9e22643" providerId="LiveId" clId="{8D3BC836-00A8-43C5-A7CA-D04A9606022E}" dt="2024-04-05T08:13:22.062" v="33" actId="21"/>
-          <ac:spMkLst>
-            <pc:docMk/>
-            <pc:sldMk cId="2416666445" sldId="256"/>
-            <ac:spMk id="113" creationId="{F4D19594-8958-5678-A91A-D009CFEE0A3F}"/>
-          </ac:spMkLst>
-        </pc:spChg>
-        <pc:spChg chg="del mod">
-          <ac:chgData name="Fatima Pillosu" userId="a6295d4dc9e22643" providerId="LiveId" clId="{8D3BC836-00A8-43C5-A7CA-D04A9606022E}" dt="2024-04-05T08:13:22.062" v="33" actId="21"/>
-          <ac:spMkLst>
-            <pc:docMk/>
-            <pc:sldMk cId="2416666445" sldId="256"/>
-            <ac:spMk id="114" creationId="{5ED4F7E3-EC48-9668-BA84-2D97CF23BD85}"/>
-          </ac:spMkLst>
-        </pc:spChg>
-        <pc:spChg chg="del mod">
-          <ac:chgData name="Fatima Pillosu" userId="a6295d4dc9e22643" providerId="LiveId" clId="{8D3BC836-00A8-43C5-A7CA-D04A9606022E}" dt="2024-04-05T08:13:22.062" v="33" actId="21"/>
-          <ac:spMkLst>
-            <pc:docMk/>
-            <pc:sldMk cId="2416666445" sldId="256"/>
-            <ac:spMk id="115" creationId="{0ECA7152-99C7-A2F4-E83D-4F855AAFA37C}"/>
-          </ac:spMkLst>
-        </pc:spChg>
-        <pc:spChg chg="del mod">
-          <ac:chgData name="Fatima Pillosu" userId="a6295d4dc9e22643" providerId="LiveId" clId="{8D3BC836-00A8-43C5-A7CA-D04A9606022E}" dt="2024-04-05T08:13:22.062" v="33" actId="21"/>
-          <ac:spMkLst>
-            <pc:docMk/>
-            <pc:sldMk cId="2416666445" sldId="256"/>
-            <ac:spMk id="116" creationId="{9FA7FCAD-7DCD-492E-33EA-E8EA0A4B7A03}"/>
-          </ac:spMkLst>
-        </pc:spChg>
-        <pc:spChg chg="del mod">
-          <ac:chgData name="Fatima Pillosu" userId="a6295d4dc9e22643" providerId="LiveId" clId="{8D3BC836-00A8-43C5-A7CA-D04A9606022E}" dt="2024-04-05T08:13:22.062" v="33" actId="21"/>
-          <ac:spMkLst>
-            <pc:docMk/>
-            <pc:sldMk cId="2416666445" sldId="256"/>
-            <ac:spMk id="117" creationId="{27112713-98E8-0868-E1E6-C5213A18CDB4}"/>
-          </ac:spMkLst>
-        </pc:spChg>
-        <pc:spChg chg="del mod">
-          <ac:chgData name="Fatima Pillosu" userId="a6295d4dc9e22643" providerId="LiveId" clId="{8D3BC836-00A8-43C5-A7CA-D04A9606022E}" dt="2024-04-05T08:13:22.062" v="33" actId="21"/>
-          <ac:spMkLst>
-            <pc:docMk/>
-            <pc:sldMk cId="2416666445" sldId="256"/>
-            <ac:spMk id="118" creationId="{A9DF4E4E-4BD6-4A43-6D8D-57FA7E5B4C8A}"/>
-          </ac:spMkLst>
-        </pc:spChg>
-        <pc:spChg chg="del mod">
-          <ac:chgData name="Fatima Pillosu" userId="a6295d4dc9e22643" providerId="LiveId" clId="{8D3BC836-00A8-43C5-A7CA-D04A9606022E}" dt="2024-04-05T08:13:22.062" v="33" actId="21"/>
-          <ac:spMkLst>
-            <pc:docMk/>
-            <pc:sldMk cId="2416666445" sldId="256"/>
-            <ac:spMk id="119" creationId="{F880BE35-27AF-2DCD-5D81-D484CE796AE1}"/>
-          </ac:spMkLst>
-        </pc:spChg>
-        <pc:spChg chg="del mod">
-          <ac:chgData name="Fatima Pillosu" userId="a6295d4dc9e22643" providerId="LiveId" clId="{8D3BC836-00A8-43C5-A7CA-D04A9606022E}" dt="2024-04-05T08:13:22.062" v="33" actId="21"/>
-          <ac:spMkLst>
-            <pc:docMk/>
-            <pc:sldMk cId="2416666445" sldId="256"/>
-            <ac:spMk id="120" creationId="{EA8BFD8B-1858-9531-2319-F3352B9FCE3E}"/>
-          </ac:spMkLst>
-        </pc:spChg>
-        <pc:spChg chg="del mod">
-          <ac:chgData name="Fatima Pillosu" userId="a6295d4dc9e22643" providerId="LiveId" clId="{8D3BC836-00A8-43C5-A7CA-D04A9606022E}" dt="2024-04-05T08:13:22.062" v="33" actId="21"/>
-          <ac:spMkLst>
-            <pc:docMk/>
-            <pc:sldMk cId="2416666445" sldId="256"/>
-            <ac:spMk id="121" creationId="{804E7FEC-AF83-FD28-4A16-70D6430EB6E5}"/>
-          </ac:spMkLst>
-        </pc:spChg>
-        <pc:spChg chg="del mod">
-          <ac:chgData name="Fatima Pillosu" userId="a6295d4dc9e22643" providerId="LiveId" clId="{8D3BC836-00A8-43C5-A7CA-D04A9606022E}" dt="2024-04-05T08:13:22.062" v="33" actId="21"/>
-          <ac:spMkLst>
-            <pc:docMk/>
-            <pc:sldMk cId="2416666445" sldId="256"/>
-            <ac:spMk id="122" creationId="{F1AE0BC5-794B-D23C-A945-2D48666A380B}"/>
-          </ac:spMkLst>
-        </pc:spChg>
-        <pc:spChg chg="del mod">
-          <ac:chgData name="Fatima Pillosu" userId="a6295d4dc9e22643" providerId="LiveId" clId="{8D3BC836-00A8-43C5-A7CA-D04A9606022E}" dt="2024-04-05T08:13:22.062" v="33" actId="21"/>
-          <ac:spMkLst>
-            <pc:docMk/>
-            <pc:sldMk cId="2416666445" sldId="256"/>
-            <ac:spMk id="123" creationId="{3848180B-A357-5916-14AE-BEBA0E61C958}"/>
-          </ac:spMkLst>
-        </pc:spChg>
-        <pc:spChg chg="del mod">
-          <ac:chgData name="Fatima Pillosu" userId="a6295d4dc9e22643" providerId="LiveId" clId="{8D3BC836-00A8-43C5-A7CA-D04A9606022E}" dt="2024-04-05T08:13:22.062" v="33" actId="21"/>
-          <ac:spMkLst>
-            <pc:docMk/>
-            <pc:sldMk cId="2416666445" sldId="256"/>
-            <ac:spMk id="124" creationId="{F88C8933-F6FB-E197-23C5-6A6AC1467788}"/>
-          </ac:spMkLst>
-        </pc:spChg>
-        <pc:spChg chg="del mod">
-          <ac:chgData name="Fatima Pillosu" userId="a6295d4dc9e22643" providerId="LiveId" clId="{8D3BC836-00A8-43C5-A7CA-D04A9606022E}" dt="2024-04-05T08:13:22.062" v="33" actId="21"/>
-          <ac:spMkLst>
-            <pc:docMk/>
-            <pc:sldMk cId="2416666445" sldId="256"/>
-            <ac:spMk id="125" creationId="{708DFDE3-CB83-C412-EE9B-B89348B18975}"/>
-          </ac:spMkLst>
-        </pc:spChg>
-        <pc:picChg chg="add mod">
-          <ac:chgData name="Fatima Pillosu" userId="a6295d4dc9e22643" providerId="LiveId" clId="{8D3BC836-00A8-43C5-A7CA-D04A9606022E}" dt="2024-04-05T08:13:41.711" v="36" actId="1036"/>
-          <ac:picMkLst>
-            <pc:docMk/>
-            <pc:sldMk cId="2416666445" sldId="256"/>
-            <ac:picMk id="3" creationId="{26908AE7-C0D0-8126-9CD1-65F862CA33AA}"/>
-          </ac:picMkLst>
-        </pc:picChg>
-        <pc:picChg chg="add mod">
-          <ac:chgData name="Fatima Pillosu" userId="a6295d4dc9e22643" providerId="LiveId" clId="{8D3BC836-00A8-43C5-A7CA-D04A9606022E}" dt="2024-04-05T08:13:41.711" v="36" actId="1036"/>
-          <ac:picMkLst>
-            <pc:docMk/>
-            <pc:sldMk cId="2416666445" sldId="256"/>
-            <ac:picMk id="4" creationId="{C0EA9BA7-9BA3-87E1-85A9-F8ACC1C32D13}"/>
-          </ac:picMkLst>
-        </pc:picChg>
-        <pc:picChg chg="del mod">
-          <ac:chgData name="Fatima Pillosu" userId="a6295d4dc9e22643" providerId="LiveId" clId="{8D3BC836-00A8-43C5-A7CA-D04A9606022E}" dt="2024-04-05T08:13:22.062" v="33" actId="21"/>
-          <ac:picMkLst>
-            <pc:docMk/>
-            <pc:sldMk cId="2416666445" sldId="256"/>
-            <ac:picMk id="87" creationId="{26908AE7-C0D0-8126-9CD1-65F862CA33AA}"/>
-          </ac:picMkLst>
-        </pc:picChg>
-        <pc:picChg chg="del mod">
-          <ac:chgData name="Fatima Pillosu" userId="a6295d4dc9e22643" providerId="LiveId" clId="{8D3BC836-00A8-43C5-A7CA-D04A9606022E}" dt="2024-04-05T08:13:22.062" v="33" actId="21"/>
-          <ac:picMkLst>
-            <pc:docMk/>
-            <pc:sldMk cId="2416666445" sldId="256"/>
-            <ac:picMk id="88" creationId="{C0EA9BA7-9BA3-87E1-85A9-F8ACC1C32D13}"/>
-          </ac:picMkLst>
-        </pc:picChg>
-      </pc:sldChg>
-    </pc:docChg>
-  </pc:docChgLst>
-  <pc:docChgLst>
-    <pc:chgData name="Fatima Pillosu" userId="a6295d4dc9e22643" providerId="LiveId" clId="{EAB401BD-D75B-4326-BBA5-5AA1FC8827A0}"/>
-    <pc:docChg chg="undo custSel addSld delSld modSld">
-      <pc:chgData name="Fatima Pillosu" userId="a6295d4dc9e22643" providerId="LiveId" clId="{EAB401BD-D75B-4326-BBA5-5AA1FC8827A0}" dt="2024-06-26T14:41:44.470" v="743"/>
-      <pc:docMkLst>
-        <pc:docMk/>
-      </pc:docMkLst>
-      <pc:sldChg chg="addSp delSp modSp add del mod">
-        <pc:chgData name="Fatima Pillosu" userId="a6295d4dc9e22643" providerId="LiveId" clId="{EAB401BD-D75B-4326-BBA5-5AA1FC8827A0}" dt="2024-06-26T14:41:44.470" v="743"/>
-        <pc:sldMkLst>
-          <pc:docMk/>
-          <pc:sldMk cId="2416666445" sldId="256"/>
-        </pc:sldMkLst>
-        <pc:spChg chg="del">
-          <ac:chgData name="Fatima Pillosu" userId="a6295d4dc9e22643" providerId="LiveId" clId="{EAB401BD-D75B-4326-BBA5-5AA1FC8827A0}" dt="2024-06-26T13:42:02.546" v="2" actId="21"/>
-          <ac:spMkLst>
-            <pc:docMk/>
-            <pc:sldMk cId="2416666445" sldId="256"/>
-            <ac:spMk id="5" creationId="{384D6C06-DC18-FF34-E84C-3BC146A8D3F9}"/>
-          </ac:spMkLst>
-        </pc:spChg>
-        <pc:spChg chg="del">
-          <ac:chgData name="Fatima Pillosu" userId="a6295d4dc9e22643" providerId="LiveId" clId="{EAB401BD-D75B-4326-BBA5-5AA1FC8827A0}" dt="2024-06-26T13:42:02.546" v="2" actId="21"/>
-          <ac:spMkLst>
-            <pc:docMk/>
-            <pc:sldMk cId="2416666445" sldId="256"/>
-            <ac:spMk id="6" creationId="{083AEDDC-E5EB-E07A-CF91-E947C367E6C5}"/>
-          </ac:spMkLst>
-        </pc:spChg>
-        <pc:spChg chg="del">
-          <ac:chgData name="Fatima Pillosu" userId="a6295d4dc9e22643" providerId="LiveId" clId="{EAB401BD-D75B-4326-BBA5-5AA1FC8827A0}" dt="2024-06-26T13:42:02.546" v="2" actId="21"/>
-          <ac:spMkLst>
-            <pc:docMk/>
-            <pc:sldMk cId="2416666445" sldId="256"/>
-            <ac:spMk id="7" creationId="{7EAFBB19-EFE8-1704-7506-55700BFD22E4}"/>
-          </ac:spMkLst>
-        </pc:spChg>
-        <pc:spChg chg="del">
-          <ac:chgData name="Fatima Pillosu" userId="a6295d4dc9e22643" providerId="LiveId" clId="{EAB401BD-D75B-4326-BBA5-5AA1FC8827A0}" dt="2024-06-26T13:42:02.546" v="2" actId="21"/>
-          <ac:spMkLst>
-            <pc:docMk/>
-            <pc:sldMk cId="2416666445" sldId="256"/>
-            <ac:spMk id="8" creationId="{08E525C9-8B8B-856F-6464-CD2A9FEC19DD}"/>
-          </ac:spMkLst>
-        </pc:spChg>
-        <pc:spChg chg="del">
-          <ac:chgData name="Fatima Pillosu" userId="a6295d4dc9e22643" providerId="LiveId" clId="{EAB401BD-D75B-4326-BBA5-5AA1FC8827A0}" dt="2024-06-26T13:42:02.546" v="2" actId="21"/>
-          <ac:spMkLst>
-            <pc:docMk/>
-            <pc:sldMk cId="2416666445" sldId="256"/>
-            <ac:spMk id="9" creationId="{823987BF-6FA7-EC5E-C5ED-325313D2AE59}"/>
-          </ac:spMkLst>
-        </pc:spChg>
-        <pc:spChg chg="del">
-          <ac:chgData name="Fatima Pillosu" userId="a6295d4dc9e22643" providerId="LiveId" clId="{EAB401BD-D75B-4326-BBA5-5AA1FC8827A0}" dt="2024-06-26T13:42:02.546" v="2" actId="21"/>
-          <ac:spMkLst>
-            <pc:docMk/>
-            <pc:sldMk cId="2416666445" sldId="256"/>
-            <ac:spMk id="10" creationId="{26903909-39B6-BA49-59C4-AF4507DF29BF}"/>
-          </ac:spMkLst>
-        </pc:spChg>
-        <pc:spChg chg="del">
-          <ac:chgData name="Fatima Pillosu" userId="a6295d4dc9e22643" providerId="LiveId" clId="{EAB401BD-D75B-4326-BBA5-5AA1FC8827A0}" dt="2024-06-26T13:42:02.546" v="2" actId="21"/>
-          <ac:spMkLst>
-            <pc:docMk/>
-            <pc:sldMk cId="2416666445" sldId="256"/>
-            <ac:spMk id="11" creationId="{0C834787-FEEB-B977-952A-288699762B58}"/>
-          </ac:spMkLst>
-        </pc:spChg>
-        <pc:spChg chg="del">
-          <ac:chgData name="Fatima Pillosu" userId="a6295d4dc9e22643" providerId="LiveId" clId="{EAB401BD-D75B-4326-BBA5-5AA1FC8827A0}" dt="2024-06-26T13:42:02.546" v="2" actId="21"/>
-          <ac:spMkLst>
-            <pc:docMk/>
-            <pc:sldMk cId="2416666445" sldId="256"/>
-            <ac:spMk id="12" creationId="{61400BA6-3D3A-1190-AD65-CF1147A3BCBC}"/>
-          </ac:spMkLst>
-        </pc:spChg>
-        <pc:spChg chg="del">
-          <ac:chgData name="Fatima Pillosu" userId="a6295d4dc9e22643" providerId="LiveId" clId="{EAB401BD-D75B-4326-BBA5-5AA1FC8827A0}" dt="2024-06-26T13:42:02.546" v="2" actId="21"/>
-          <ac:spMkLst>
-            <pc:docMk/>
-            <pc:sldMk cId="2416666445" sldId="256"/>
-            <ac:spMk id="13" creationId="{F77F9084-F223-ED65-669A-F6F51F897BA2}"/>
-          </ac:spMkLst>
-        </pc:spChg>
-        <pc:spChg chg="del">
-          <ac:chgData name="Fatima Pillosu" userId="a6295d4dc9e22643" providerId="LiveId" clId="{EAB401BD-D75B-4326-BBA5-5AA1FC8827A0}" dt="2024-06-26T13:42:02.546" v="2" actId="21"/>
-          <ac:spMkLst>
-            <pc:docMk/>
-            <pc:sldMk cId="2416666445" sldId="256"/>
-            <ac:spMk id="14" creationId="{E58B7622-486E-AF0A-77FA-6A257F911DE9}"/>
-          </ac:spMkLst>
-        </pc:spChg>
-        <pc:spChg chg="del">
-          <ac:chgData name="Fatima Pillosu" userId="a6295d4dc9e22643" providerId="LiveId" clId="{EAB401BD-D75B-4326-BBA5-5AA1FC8827A0}" dt="2024-06-26T13:42:02.546" v="2" actId="21"/>
-          <ac:spMkLst>
-            <pc:docMk/>
-            <pc:sldMk cId="2416666445" sldId="256"/>
-            <ac:spMk id="15" creationId="{53D672B0-A6EA-4276-A5B9-C5164A9A326F}"/>
-          </ac:spMkLst>
-        </pc:spChg>
-        <pc:spChg chg="del">
-          <ac:chgData name="Fatima Pillosu" userId="a6295d4dc9e22643" providerId="LiveId" clId="{EAB401BD-D75B-4326-BBA5-5AA1FC8827A0}" dt="2024-06-26T13:42:02.546" v="2" actId="21"/>
-          <ac:spMkLst>
-            <pc:docMk/>
-            <pc:sldMk cId="2416666445" sldId="256"/>
-            <ac:spMk id="16" creationId="{FC073318-9596-D679-740B-BA408BA68B78}"/>
-          </ac:spMkLst>
-        </pc:spChg>
-        <pc:spChg chg="del">
-          <ac:chgData name="Fatima Pillosu" userId="a6295d4dc9e22643" providerId="LiveId" clId="{EAB401BD-D75B-4326-BBA5-5AA1FC8827A0}" dt="2024-06-26T13:42:02.546" v="2" actId="21"/>
-          <ac:spMkLst>
-            <pc:docMk/>
-            <pc:sldMk cId="2416666445" sldId="256"/>
-            <ac:spMk id="17" creationId="{95D8CFCC-5F17-C4D6-6F70-8501F37736D8}"/>
-          </ac:spMkLst>
-        </pc:spChg>
-        <pc:spChg chg="del">
-          <ac:chgData name="Fatima Pillosu" userId="a6295d4dc9e22643" providerId="LiveId" clId="{EAB401BD-D75B-4326-BBA5-5AA1FC8827A0}" dt="2024-06-26T13:42:02.546" v="2" actId="21"/>
-          <ac:spMkLst>
-            <pc:docMk/>
-            <pc:sldMk cId="2416666445" sldId="256"/>
-            <ac:spMk id="18" creationId="{E06CF797-8451-574D-21F0-384E8A3452B7}"/>
-          </ac:spMkLst>
-        </pc:spChg>
-        <pc:spChg chg="del">
-          <ac:chgData name="Fatima Pillosu" userId="a6295d4dc9e22643" providerId="LiveId" clId="{EAB401BD-D75B-4326-BBA5-5AA1FC8827A0}" dt="2024-06-26T13:42:02.546" v="2" actId="21"/>
-          <ac:spMkLst>
-            <pc:docMk/>
-            <pc:sldMk cId="2416666445" sldId="256"/>
-            <ac:spMk id="19" creationId="{CFB3D8FA-6A39-82FF-7103-9C3B87E3F64B}"/>
-          </ac:spMkLst>
-        </pc:spChg>
-        <pc:spChg chg="del">
-          <ac:chgData name="Fatima Pillosu" userId="a6295d4dc9e22643" providerId="LiveId" clId="{EAB401BD-D75B-4326-BBA5-5AA1FC8827A0}" dt="2024-06-26T13:42:02.546" v="2" actId="21"/>
-          <ac:spMkLst>
-            <pc:docMk/>
-            <pc:sldMk cId="2416666445" sldId="256"/>
-            <ac:spMk id="20" creationId="{5B2D0398-5206-B218-FB65-5E89CE52B185}"/>
-          </ac:spMkLst>
-        </pc:spChg>
-        <pc:spChg chg="del">
-          <ac:chgData name="Fatima Pillosu" userId="a6295d4dc9e22643" providerId="LiveId" clId="{EAB401BD-D75B-4326-BBA5-5AA1FC8827A0}" dt="2024-06-26T13:42:02.546" v="2" actId="21"/>
-          <ac:spMkLst>
-            <pc:docMk/>
-            <pc:sldMk cId="2416666445" sldId="256"/>
-            <ac:spMk id="21" creationId="{E8F93690-0FC3-3203-F616-27D0636BD86D}"/>
-          </ac:spMkLst>
-        </pc:spChg>
-        <pc:spChg chg="del">
-          <ac:chgData name="Fatima Pillosu" userId="a6295d4dc9e22643" providerId="LiveId" clId="{EAB401BD-D75B-4326-BBA5-5AA1FC8827A0}" dt="2024-06-26T13:42:02.546" v="2" actId="21"/>
-          <ac:spMkLst>
-            <pc:docMk/>
-            <pc:sldMk cId="2416666445" sldId="256"/>
-            <ac:spMk id="22" creationId="{98EE0CB6-A0DD-61DA-6B6B-D4EC8957FF3D}"/>
-          </ac:spMkLst>
-        </pc:spChg>
-        <pc:spChg chg="del">
-          <ac:chgData name="Fatima Pillosu" userId="a6295d4dc9e22643" providerId="LiveId" clId="{EAB401BD-D75B-4326-BBA5-5AA1FC8827A0}" dt="2024-06-26T13:42:02.546" v="2" actId="21"/>
-          <ac:spMkLst>
-            <pc:docMk/>
-            <pc:sldMk cId="2416666445" sldId="256"/>
-            <ac:spMk id="23" creationId="{5C604597-7B68-19A8-35F6-C8E80447309D}"/>
-          </ac:spMkLst>
-        </pc:spChg>
-        <pc:spChg chg="del">
-          <ac:chgData name="Fatima Pillosu" userId="a6295d4dc9e22643" providerId="LiveId" clId="{EAB401BD-D75B-4326-BBA5-5AA1FC8827A0}" dt="2024-06-26T13:42:02.546" v="2" actId="21"/>
-          <ac:spMkLst>
-            <pc:docMk/>
-            <pc:sldMk cId="2416666445" sldId="256"/>
-            <ac:spMk id="24" creationId="{37EBCA7E-9713-7AE3-638B-C84D5A1C2253}"/>
-          </ac:spMkLst>
-        </pc:spChg>
-        <pc:spChg chg="del">
-          <ac:chgData name="Fatima Pillosu" userId="a6295d4dc9e22643" providerId="LiveId" clId="{EAB401BD-D75B-4326-BBA5-5AA1FC8827A0}" dt="2024-06-26T13:42:02.546" v="2" actId="21"/>
-          <ac:spMkLst>
-            <pc:docMk/>
-            <pc:sldMk cId="2416666445" sldId="256"/>
-            <ac:spMk id="25" creationId="{65B70626-067E-1AE7-11BD-EC7DA8DABC28}"/>
-          </ac:spMkLst>
-        </pc:spChg>
-        <pc:spChg chg="del">
-          <ac:chgData name="Fatima Pillosu" userId="a6295d4dc9e22643" providerId="LiveId" clId="{EAB401BD-D75B-4326-BBA5-5AA1FC8827A0}" dt="2024-06-26T13:42:02.546" v="2" actId="21"/>
-          <ac:spMkLst>
-            <pc:docMk/>
-            <pc:sldMk cId="2416666445" sldId="256"/>
-            <ac:spMk id="26" creationId="{C7BCE81D-7A63-8764-295C-1A6242CC4274}"/>
-          </ac:spMkLst>
-        </pc:spChg>
-        <pc:spChg chg="del">
-          <ac:chgData name="Fatima Pillosu" userId="a6295d4dc9e22643" providerId="LiveId" clId="{EAB401BD-D75B-4326-BBA5-5AA1FC8827A0}" dt="2024-06-26T13:42:02.546" v="2" actId="21"/>
-          <ac:spMkLst>
-            <pc:docMk/>
-            <pc:sldMk cId="2416666445" sldId="256"/>
-            <ac:spMk id="27" creationId="{A6515F5F-2E20-7D13-537C-F772A00535F4}"/>
-          </ac:spMkLst>
-        </pc:spChg>
-        <pc:spChg chg="del">
-          <ac:chgData name="Fatima Pillosu" userId="a6295d4dc9e22643" providerId="LiveId" clId="{EAB401BD-D75B-4326-BBA5-5AA1FC8827A0}" dt="2024-06-26T13:42:02.546" v="2" actId="21"/>
-          <ac:spMkLst>
-            <pc:docMk/>
-            <pc:sldMk cId="2416666445" sldId="256"/>
-            <ac:spMk id="28" creationId="{50B578E0-62E1-B8F6-ECD2-2E7AA0CF70F9}"/>
-          </ac:spMkLst>
-        </pc:spChg>
-        <pc:spChg chg="del">
-          <ac:chgData name="Fatima Pillosu" userId="a6295d4dc9e22643" providerId="LiveId" clId="{EAB401BD-D75B-4326-BBA5-5AA1FC8827A0}" dt="2024-06-26T13:42:02.546" v="2" actId="21"/>
-          <ac:spMkLst>
-            <pc:docMk/>
-            <pc:sldMk cId="2416666445" sldId="256"/>
-            <ac:spMk id="29" creationId="{F4D19594-8958-5678-A91A-D009CFEE0A3F}"/>
-          </ac:spMkLst>
-        </pc:spChg>
-        <pc:spChg chg="del">
-          <ac:chgData name="Fatima Pillosu" userId="a6295d4dc9e22643" providerId="LiveId" clId="{EAB401BD-D75B-4326-BBA5-5AA1FC8827A0}" dt="2024-06-26T13:42:02.546" v="2" actId="21"/>
-          <ac:spMkLst>
-            <pc:docMk/>
-            <pc:sldMk cId="2416666445" sldId="256"/>
-            <ac:spMk id="30" creationId="{5ED4F7E3-EC48-9668-BA84-2D97CF23BD85}"/>
-          </ac:spMkLst>
-        </pc:spChg>
-        <pc:spChg chg="del">
-          <ac:chgData name="Fatima Pillosu" userId="a6295d4dc9e22643" providerId="LiveId" clId="{EAB401BD-D75B-4326-BBA5-5AA1FC8827A0}" dt="2024-06-26T13:42:02.546" v="2" actId="21"/>
-          <ac:spMkLst>
-            <pc:docMk/>
-            <pc:sldMk cId="2416666445" sldId="256"/>
-            <ac:spMk id="31" creationId="{0ECA7152-99C7-A2F4-E83D-4F855AAFA37C}"/>
-          </ac:spMkLst>
-        </pc:spChg>
-        <pc:spChg chg="del">
-          <ac:chgData name="Fatima Pillosu" userId="a6295d4dc9e22643" providerId="LiveId" clId="{EAB401BD-D75B-4326-BBA5-5AA1FC8827A0}" dt="2024-06-26T13:42:02.546" v="2" actId="21"/>
-          <ac:spMkLst>
-            <pc:docMk/>
-            <pc:sldMk cId="2416666445" sldId="256"/>
-            <ac:spMk id="32" creationId="{9FA7FCAD-7DCD-492E-33EA-E8EA0A4B7A03}"/>
-          </ac:spMkLst>
-        </pc:spChg>
-        <pc:spChg chg="del">
-          <ac:chgData name="Fatima Pillosu" userId="a6295d4dc9e22643" providerId="LiveId" clId="{EAB401BD-D75B-4326-BBA5-5AA1FC8827A0}" dt="2024-06-26T13:42:02.546" v="2" actId="21"/>
-          <ac:spMkLst>
-            <pc:docMk/>
-            <pc:sldMk cId="2416666445" sldId="256"/>
-            <ac:spMk id="33" creationId="{27112713-98E8-0868-E1E6-C5213A18CDB4}"/>
-          </ac:spMkLst>
-        </pc:spChg>
-        <pc:spChg chg="del">
-          <ac:chgData name="Fatima Pillosu" userId="a6295d4dc9e22643" providerId="LiveId" clId="{EAB401BD-D75B-4326-BBA5-5AA1FC8827A0}" dt="2024-06-26T13:42:02.546" v="2" actId="21"/>
-          <ac:spMkLst>
-            <pc:docMk/>
-            <pc:sldMk cId="2416666445" sldId="256"/>
-            <ac:spMk id="34" creationId="{A9DF4E4E-4BD6-4A43-6D8D-57FA7E5B4C8A}"/>
-          </ac:spMkLst>
-        </pc:spChg>
-        <pc:spChg chg="del">
-          <ac:chgData name="Fatima Pillosu" userId="a6295d4dc9e22643" providerId="LiveId" clId="{EAB401BD-D75B-4326-BBA5-5AA1FC8827A0}" dt="2024-06-26T13:42:02.546" v="2" actId="21"/>
-          <ac:spMkLst>
-            <pc:docMk/>
-            <pc:sldMk cId="2416666445" sldId="256"/>
-            <ac:spMk id="35" creationId="{F880BE35-27AF-2DCD-5D81-D484CE796AE1}"/>
-          </ac:spMkLst>
-        </pc:spChg>
-        <pc:spChg chg="del">
-          <ac:chgData name="Fatima Pillosu" userId="a6295d4dc9e22643" providerId="LiveId" clId="{EAB401BD-D75B-4326-BBA5-5AA1FC8827A0}" dt="2024-06-26T13:42:02.546" v="2" actId="21"/>
-          <ac:spMkLst>
-            <pc:docMk/>
-            <pc:sldMk cId="2416666445" sldId="256"/>
-            <ac:spMk id="36" creationId="{EA8BFD8B-1858-9531-2319-F3352B9FCE3E}"/>
-          </ac:spMkLst>
-        </pc:spChg>
-        <pc:spChg chg="del">
-          <ac:chgData name="Fatima Pillosu" userId="a6295d4dc9e22643" providerId="LiveId" clId="{EAB401BD-D75B-4326-BBA5-5AA1FC8827A0}" dt="2024-06-26T13:42:02.546" v="2" actId="21"/>
-          <ac:spMkLst>
-            <pc:docMk/>
-            <pc:sldMk cId="2416666445" sldId="256"/>
-            <ac:spMk id="37" creationId="{804E7FEC-AF83-FD28-4A16-70D6430EB6E5}"/>
-          </ac:spMkLst>
-        </pc:spChg>
-        <pc:spChg chg="del">
-          <ac:chgData name="Fatima Pillosu" userId="a6295d4dc9e22643" providerId="LiveId" clId="{EAB401BD-D75B-4326-BBA5-5AA1FC8827A0}" dt="2024-06-26T13:42:02.546" v="2" actId="21"/>
-          <ac:spMkLst>
-            <pc:docMk/>
-            <pc:sldMk cId="2416666445" sldId="256"/>
-            <ac:spMk id="38" creationId="{F1AE0BC5-794B-D23C-A945-2D48666A380B}"/>
-          </ac:spMkLst>
-        </pc:spChg>
-        <pc:spChg chg="del">
-          <ac:chgData name="Fatima Pillosu" userId="a6295d4dc9e22643" providerId="LiveId" clId="{EAB401BD-D75B-4326-BBA5-5AA1FC8827A0}" dt="2024-06-26T13:42:02.546" v="2" actId="21"/>
-          <ac:spMkLst>
-            <pc:docMk/>
-            <pc:sldMk cId="2416666445" sldId="256"/>
-            <ac:spMk id="39" creationId="{3848180B-A357-5916-14AE-BEBA0E61C958}"/>
-          </ac:spMkLst>
-        </pc:spChg>
-        <pc:spChg chg="del">
-          <ac:chgData name="Fatima Pillosu" userId="a6295d4dc9e22643" providerId="LiveId" clId="{EAB401BD-D75B-4326-BBA5-5AA1FC8827A0}" dt="2024-06-26T13:42:02.546" v="2" actId="21"/>
-          <ac:spMkLst>
-            <pc:docMk/>
-            <pc:sldMk cId="2416666445" sldId="256"/>
-            <ac:spMk id="40" creationId="{F88C8933-F6FB-E197-23C5-6A6AC1467788}"/>
-          </ac:spMkLst>
-        </pc:spChg>
-        <pc:spChg chg="del">
-          <ac:chgData name="Fatima Pillosu" userId="a6295d4dc9e22643" providerId="LiveId" clId="{EAB401BD-D75B-4326-BBA5-5AA1FC8827A0}" dt="2024-06-26T13:42:02.546" v="2" actId="21"/>
-          <ac:spMkLst>
-            <pc:docMk/>
-            <pc:sldMk cId="2416666445" sldId="256"/>
-            <ac:spMk id="41" creationId="{708DFDE3-CB83-C412-EE9B-B89348B18975}"/>
-          </ac:spMkLst>
-        </pc:spChg>
-        <pc:spChg chg="add del mod">
-          <ac:chgData name="Fatima Pillosu" userId="a6295d4dc9e22643" providerId="LiveId" clId="{EAB401BD-D75B-4326-BBA5-5AA1FC8827A0}" dt="2024-06-26T14:41:26.078" v="742" actId="21"/>
-          <ac:spMkLst>
-            <pc:docMk/>
-            <pc:sldMk cId="2416666445" sldId="256"/>
-            <ac:spMk id="43" creationId="{384D6C06-DC18-FF34-E84C-3BC146A8D3F9}"/>
-          </ac:spMkLst>
-        </pc:spChg>
-        <pc:spChg chg="add del mod">
-          <ac:chgData name="Fatima Pillosu" userId="a6295d4dc9e22643" providerId="LiveId" clId="{EAB401BD-D75B-4326-BBA5-5AA1FC8827A0}" dt="2024-06-26T14:41:26.078" v="742" actId="21"/>
-          <ac:spMkLst>
-            <pc:docMk/>
-            <pc:sldMk cId="2416666445" sldId="256"/>
-            <ac:spMk id="44" creationId="{083AEDDC-E5EB-E07A-CF91-E947C367E6C5}"/>
-          </ac:spMkLst>
-        </pc:spChg>
-        <pc:spChg chg="add del mod">
-          <ac:chgData name="Fatima Pillosu" userId="a6295d4dc9e22643" providerId="LiveId" clId="{EAB401BD-D75B-4326-BBA5-5AA1FC8827A0}" dt="2024-06-26T14:41:26.078" v="742" actId="21"/>
-          <ac:spMkLst>
-            <pc:docMk/>
-            <pc:sldMk cId="2416666445" sldId="256"/>
-            <ac:spMk id="45" creationId="{7EAFBB19-EFE8-1704-7506-55700BFD22E4}"/>
-          </ac:spMkLst>
-        </pc:spChg>
-        <pc:spChg chg="add del mod">
-          <ac:chgData name="Fatima Pillosu" userId="a6295d4dc9e22643" providerId="LiveId" clId="{EAB401BD-D75B-4326-BBA5-5AA1FC8827A0}" dt="2024-06-26T14:41:26.078" v="742" actId="21"/>
-          <ac:spMkLst>
-            <pc:docMk/>
-            <pc:sldMk cId="2416666445" sldId="256"/>
-            <ac:spMk id="46" creationId="{08E525C9-8B8B-856F-6464-CD2A9FEC19DD}"/>
-          </ac:spMkLst>
-        </pc:spChg>
-        <pc:spChg chg="add del mod">
-          <ac:chgData name="Fatima Pillosu" userId="a6295d4dc9e22643" providerId="LiveId" clId="{EAB401BD-D75B-4326-BBA5-5AA1FC8827A0}" dt="2024-06-26T14:41:26.078" v="742" actId="21"/>
-          <ac:spMkLst>
-            <pc:docMk/>
-            <pc:sldMk cId="2416666445" sldId="256"/>
-            <ac:spMk id="47" creationId="{823987BF-6FA7-EC5E-C5ED-325313D2AE59}"/>
-          </ac:spMkLst>
-        </pc:spChg>
-        <pc:spChg chg="add del mod">
-          <ac:chgData name="Fatima Pillosu" userId="a6295d4dc9e22643" providerId="LiveId" clId="{EAB401BD-D75B-4326-BBA5-5AA1FC8827A0}" dt="2024-06-26T14:41:26.078" v="742" actId="21"/>
-          <ac:spMkLst>
-            <pc:docMk/>
-            <pc:sldMk cId="2416666445" sldId="256"/>
-            <ac:spMk id="48" creationId="{26903909-39B6-BA49-59C4-AF4507DF29BF}"/>
-          </ac:spMkLst>
-        </pc:spChg>
-        <pc:spChg chg="add del mod">
-          <ac:chgData name="Fatima Pillosu" userId="a6295d4dc9e22643" providerId="LiveId" clId="{EAB401BD-D75B-4326-BBA5-5AA1FC8827A0}" dt="2024-06-26T14:41:26.078" v="742" actId="21"/>
-          <ac:spMkLst>
-            <pc:docMk/>
-            <pc:sldMk cId="2416666445" sldId="256"/>
-            <ac:spMk id="49" creationId="{0C834787-FEEB-B977-952A-288699762B58}"/>
-          </ac:spMkLst>
-        </pc:spChg>
-        <pc:spChg chg="add del mod">
-          <ac:chgData name="Fatima Pillosu" userId="a6295d4dc9e22643" providerId="LiveId" clId="{EAB401BD-D75B-4326-BBA5-5AA1FC8827A0}" dt="2024-06-26T14:41:26.078" v="742" actId="21"/>
-          <ac:spMkLst>
-            <pc:docMk/>
-            <pc:sldMk cId="2416666445" sldId="256"/>
-            <ac:spMk id="50" creationId="{61400BA6-3D3A-1190-AD65-CF1147A3BCBC}"/>
-          </ac:spMkLst>
-        </pc:spChg>
-        <pc:spChg chg="add del mod">
-          <ac:chgData name="Fatima Pillosu" userId="a6295d4dc9e22643" providerId="LiveId" clId="{EAB401BD-D75B-4326-BBA5-5AA1FC8827A0}" dt="2024-06-26T14:41:26.078" v="742" actId="21"/>
-          <ac:spMkLst>
-            <pc:docMk/>
-            <pc:sldMk cId="2416666445" sldId="256"/>
-            <ac:spMk id="51" creationId="{F77F9084-F223-ED65-669A-F6F51F897BA2}"/>
-          </ac:spMkLst>
-        </pc:spChg>
-        <pc:spChg chg="add del mod">
-          <ac:chgData name="Fatima Pillosu" userId="a6295d4dc9e22643" providerId="LiveId" clId="{EAB401BD-D75B-4326-BBA5-5AA1FC8827A0}" dt="2024-06-26T14:41:26.078" v="742" actId="21"/>
-          <ac:spMkLst>
-            <pc:docMk/>
-            <pc:sldMk cId="2416666445" sldId="256"/>
-            <ac:spMk id="52" creationId="{E58B7622-486E-AF0A-77FA-6A257F911DE9}"/>
-          </ac:spMkLst>
-        </pc:spChg>
-        <pc:spChg chg="add del mod">
-          <ac:chgData name="Fatima Pillosu" userId="a6295d4dc9e22643" providerId="LiveId" clId="{EAB401BD-D75B-4326-BBA5-5AA1FC8827A0}" dt="2024-06-26T14:41:26.078" v="742" actId="21"/>
-          <ac:spMkLst>
-            <pc:docMk/>
-            <pc:sldMk cId="2416666445" sldId="256"/>
-            <ac:spMk id="53" creationId="{53D672B0-A6EA-4276-A5B9-C5164A9A326F}"/>
-          </ac:spMkLst>
-        </pc:spChg>
-        <pc:spChg chg="add del mod">
-          <ac:chgData name="Fatima Pillosu" userId="a6295d4dc9e22643" providerId="LiveId" clId="{EAB401BD-D75B-4326-BBA5-5AA1FC8827A0}" dt="2024-06-26T14:41:26.078" v="742" actId="21"/>
-          <ac:spMkLst>
-            <pc:docMk/>
-            <pc:sldMk cId="2416666445" sldId="256"/>
-            <ac:spMk id="54" creationId="{FC073318-9596-D679-740B-BA408BA68B78}"/>
-          </ac:spMkLst>
-        </pc:spChg>
-        <pc:spChg chg="add del mod">
-          <ac:chgData name="Fatima Pillosu" userId="a6295d4dc9e22643" providerId="LiveId" clId="{EAB401BD-D75B-4326-BBA5-5AA1FC8827A0}" dt="2024-06-26T14:41:26.078" v="742" actId="21"/>
-          <ac:spMkLst>
-            <pc:docMk/>
-            <pc:sldMk cId="2416666445" sldId="256"/>
-            <ac:spMk id="55" creationId="{95D8CFCC-5F17-C4D6-6F70-8501F37736D8}"/>
-          </ac:spMkLst>
-        </pc:spChg>
-        <pc:spChg chg="add del mod">
-          <ac:chgData name="Fatima Pillosu" userId="a6295d4dc9e22643" providerId="LiveId" clId="{EAB401BD-D75B-4326-BBA5-5AA1FC8827A0}" dt="2024-06-26T14:41:26.078" v="742" actId="21"/>
-          <ac:spMkLst>
-            <pc:docMk/>
-            <pc:sldMk cId="2416666445" sldId="256"/>
-            <ac:spMk id="56" creationId="{E06CF797-8451-574D-21F0-384E8A3452B7}"/>
-          </ac:spMkLst>
-        </pc:spChg>
-        <pc:spChg chg="add del mod">
-          <ac:chgData name="Fatima Pillosu" userId="a6295d4dc9e22643" providerId="LiveId" clId="{EAB401BD-D75B-4326-BBA5-5AA1FC8827A0}" dt="2024-06-26T14:41:26.078" v="742" actId="21"/>
-          <ac:spMkLst>
-            <pc:docMk/>
-            <pc:sldMk cId="2416666445" sldId="256"/>
-            <ac:spMk id="57" creationId="{CFB3D8FA-6A39-82FF-7103-9C3B87E3F64B}"/>
-          </ac:spMkLst>
-        </pc:spChg>
-        <pc:spChg chg="add del mod">
-          <ac:chgData name="Fatima Pillosu" userId="a6295d4dc9e22643" providerId="LiveId" clId="{EAB401BD-D75B-4326-BBA5-5AA1FC8827A0}" dt="2024-06-26T14:41:26.078" v="742" actId="21"/>
-          <ac:spMkLst>
-            <pc:docMk/>
-            <pc:sldMk cId="2416666445" sldId="256"/>
-            <ac:spMk id="58" creationId="{5B2D0398-5206-B218-FB65-5E89CE52B185}"/>
-          </ac:spMkLst>
-        </pc:spChg>
-        <pc:spChg chg="add del mod">
-          <ac:chgData name="Fatima Pillosu" userId="a6295d4dc9e22643" providerId="LiveId" clId="{EAB401BD-D75B-4326-BBA5-5AA1FC8827A0}" dt="2024-06-26T14:41:26.078" v="742" actId="21"/>
-          <ac:spMkLst>
-            <pc:docMk/>
-            <pc:sldMk cId="2416666445" sldId="256"/>
-            <ac:spMk id="59" creationId="{E8F93690-0FC3-3203-F616-27D0636BD86D}"/>
-          </ac:spMkLst>
-        </pc:spChg>
-        <pc:spChg chg="add del mod">
-          <ac:chgData name="Fatima Pillosu" userId="a6295d4dc9e22643" providerId="LiveId" clId="{EAB401BD-D75B-4326-BBA5-5AA1FC8827A0}" dt="2024-06-26T14:41:26.078" v="742" actId="21"/>
-          <ac:spMkLst>
-            <pc:docMk/>
-            <pc:sldMk cId="2416666445" sldId="256"/>
-            <ac:spMk id="60" creationId="{98EE0CB6-A0DD-61DA-6B6B-D4EC8957FF3D}"/>
-          </ac:spMkLst>
-        </pc:spChg>
-        <pc:spChg chg="add del mod">
-          <ac:chgData name="Fatima Pillosu" userId="a6295d4dc9e22643" providerId="LiveId" clId="{EAB401BD-D75B-4326-BBA5-5AA1FC8827A0}" dt="2024-06-26T14:41:26.078" v="742" actId="21"/>
-          <ac:spMkLst>
-            <pc:docMk/>
-            <pc:sldMk cId="2416666445" sldId="256"/>
-            <ac:spMk id="61" creationId="{5C604597-7B68-19A8-35F6-C8E80447309D}"/>
-          </ac:spMkLst>
-        </pc:spChg>
-        <pc:spChg chg="add del mod">
-          <ac:chgData name="Fatima Pillosu" userId="a6295d4dc9e22643" providerId="LiveId" clId="{EAB401BD-D75B-4326-BBA5-5AA1FC8827A0}" dt="2024-06-26T14:41:26.078" v="742" actId="21"/>
-          <ac:spMkLst>
-            <pc:docMk/>
-            <pc:sldMk cId="2416666445" sldId="256"/>
-            <ac:spMk id="62" creationId="{37EBCA7E-9713-7AE3-638B-C84D5A1C2253}"/>
-          </ac:spMkLst>
-        </pc:spChg>
-        <pc:spChg chg="add del mod">
-          <ac:chgData name="Fatima Pillosu" userId="a6295d4dc9e22643" providerId="LiveId" clId="{EAB401BD-D75B-4326-BBA5-5AA1FC8827A0}" dt="2024-06-26T14:41:26.078" v="742" actId="21"/>
-          <ac:spMkLst>
-            <pc:docMk/>
-            <pc:sldMk cId="2416666445" sldId="256"/>
-            <ac:spMk id="63" creationId="{65B70626-067E-1AE7-11BD-EC7DA8DABC28}"/>
-          </ac:spMkLst>
-        </pc:spChg>
-        <pc:spChg chg="add del mod">
-          <ac:chgData name="Fatima Pillosu" userId="a6295d4dc9e22643" providerId="LiveId" clId="{EAB401BD-D75B-4326-BBA5-5AA1FC8827A0}" dt="2024-06-26T14:41:26.078" v="742" actId="21"/>
-          <ac:spMkLst>
-            <pc:docMk/>
-            <pc:sldMk cId="2416666445" sldId="256"/>
-            <ac:spMk id="64" creationId="{C7BCE81D-7A63-8764-295C-1A6242CC4274}"/>
-          </ac:spMkLst>
-        </pc:spChg>
-        <pc:spChg chg="add del mod">
-          <ac:chgData name="Fatima Pillosu" userId="a6295d4dc9e22643" providerId="LiveId" clId="{EAB401BD-D75B-4326-BBA5-5AA1FC8827A0}" dt="2024-06-26T14:41:26.078" v="742" actId="21"/>
-          <ac:spMkLst>
-            <pc:docMk/>
-            <pc:sldMk cId="2416666445" sldId="256"/>
-            <ac:spMk id="65" creationId="{A6515F5F-2E20-7D13-537C-F772A00535F4}"/>
-          </ac:spMkLst>
-        </pc:spChg>
-        <pc:spChg chg="add del mod">
-          <ac:chgData name="Fatima Pillosu" userId="a6295d4dc9e22643" providerId="LiveId" clId="{EAB401BD-D75B-4326-BBA5-5AA1FC8827A0}" dt="2024-06-26T14:41:26.078" v="742" actId="21"/>
-          <ac:spMkLst>
-            <pc:docMk/>
-            <pc:sldMk cId="2416666445" sldId="256"/>
-            <ac:spMk id="66" creationId="{50B578E0-62E1-B8F6-ECD2-2E7AA0CF70F9}"/>
-          </ac:spMkLst>
-        </pc:spChg>
-        <pc:spChg chg="add del mod">
-          <ac:chgData name="Fatima Pillosu" userId="a6295d4dc9e22643" providerId="LiveId" clId="{EAB401BD-D75B-4326-BBA5-5AA1FC8827A0}" dt="2024-06-26T14:41:26.078" v="742" actId="21"/>
-          <ac:spMkLst>
-            <pc:docMk/>
-            <pc:sldMk cId="2416666445" sldId="256"/>
-            <ac:spMk id="67" creationId="{F4D19594-8958-5678-A91A-D009CFEE0A3F}"/>
-          </ac:spMkLst>
-        </pc:spChg>
-        <pc:spChg chg="add del mod">
-          <ac:chgData name="Fatima Pillosu" userId="a6295d4dc9e22643" providerId="LiveId" clId="{EAB401BD-D75B-4326-BBA5-5AA1FC8827A0}" dt="2024-06-26T14:41:26.078" v="742" actId="21"/>
-          <ac:spMkLst>
-            <pc:docMk/>
-            <pc:sldMk cId="2416666445" sldId="256"/>
-            <ac:spMk id="68" creationId="{5ED4F7E3-EC48-9668-BA84-2D97CF23BD85}"/>
-          </ac:spMkLst>
-        </pc:spChg>
-        <pc:spChg chg="add del mod">
-          <ac:chgData name="Fatima Pillosu" userId="a6295d4dc9e22643" providerId="LiveId" clId="{EAB401BD-D75B-4326-BBA5-5AA1FC8827A0}" dt="2024-06-26T14:41:26.078" v="742" actId="21"/>
-          <ac:spMkLst>
-            <pc:docMk/>
-            <pc:sldMk cId="2416666445" sldId="256"/>
-            <ac:spMk id="69" creationId="{0ECA7152-99C7-A2F4-E83D-4F855AAFA37C}"/>
-          </ac:spMkLst>
-        </pc:spChg>
-        <pc:spChg chg="add del mod">
-          <ac:chgData name="Fatima Pillosu" userId="a6295d4dc9e22643" providerId="LiveId" clId="{EAB401BD-D75B-4326-BBA5-5AA1FC8827A0}" dt="2024-06-26T14:41:26.078" v="742" actId="21"/>
-          <ac:spMkLst>
-            <pc:docMk/>
-            <pc:sldMk cId="2416666445" sldId="256"/>
-            <ac:spMk id="70" creationId="{9FA7FCAD-7DCD-492E-33EA-E8EA0A4B7A03}"/>
-          </ac:spMkLst>
-        </pc:spChg>
-        <pc:spChg chg="add del mod">
-          <ac:chgData name="Fatima Pillosu" userId="a6295d4dc9e22643" providerId="LiveId" clId="{EAB401BD-D75B-4326-BBA5-5AA1FC8827A0}" dt="2024-06-26T14:41:26.078" v="742" actId="21"/>
-          <ac:spMkLst>
-            <pc:docMk/>
-            <pc:sldMk cId="2416666445" sldId="256"/>
-            <ac:spMk id="71" creationId="{27112713-98E8-0868-E1E6-C5213A18CDB4}"/>
-          </ac:spMkLst>
-        </pc:spChg>
-        <pc:spChg chg="add del mod">
-          <ac:chgData name="Fatima Pillosu" userId="a6295d4dc9e22643" providerId="LiveId" clId="{EAB401BD-D75B-4326-BBA5-5AA1FC8827A0}" dt="2024-06-26T14:41:26.078" v="742" actId="21"/>
-          <ac:spMkLst>
-            <pc:docMk/>
-            <pc:sldMk cId="2416666445" sldId="256"/>
-            <ac:spMk id="72" creationId="{A9DF4E4E-4BD6-4A43-6D8D-57FA7E5B4C8A}"/>
-          </ac:spMkLst>
-        </pc:spChg>
-        <pc:spChg chg="add del mod">
-          <ac:chgData name="Fatima Pillosu" userId="a6295d4dc9e22643" providerId="LiveId" clId="{EAB401BD-D75B-4326-BBA5-5AA1FC8827A0}" dt="2024-06-26T14:41:26.078" v="742" actId="21"/>
-          <ac:spMkLst>
-            <pc:docMk/>
-            <pc:sldMk cId="2416666445" sldId="256"/>
-            <ac:spMk id="73" creationId="{F880BE35-27AF-2DCD-5D81-D484CE796AE1}"/>
-          </ac:spMkLst>
-        </pc:spChg>
-        <pc:spChg chg="add del mod">
-          <ac:chgData name="Fatima Pillosu" userId="a6295d4dc9e22643" providerId="LiveId" clId="{EAB401BD-D75B-4326-BBA5-5AA1FC8827A0}" dt="2024-06-26T14:41:26.078" v="742" actId="21"/>
-          <ac:spMkLst>
-            <pc:docMk/>
-            <pc:sldMk cId="2416666445" sldId="256"/>
-            <ac:spMk id="74" creationId="{EA8BFD8B-1858-9531-2319-F3352B9FCE3E}"/>
-          </ac:spMkLst>
-        </pc:spChg>
-        <pc:spChg chg="add del mod">
-          <ac:chgData name="Fatima Pillosu" userId="a6295d4dc9e22643" providerId="LiveId" clId="{EAB401BD-D75B-4326-BBA5-5AA1FC8827A0}" dt="2024-06-26T14:41:26.078" v="742" actId="21"/>
-          <ac:spMkLst>
-            <pc:docMk/>
-            <pc:sldMk cId="2416666445" sldId="256"/>
-            <ac:spMk id="75" creationId="{804E7FEC-AF83-FD28-4A16-70D6430EB6E5}"/>
-          </ac:spMkLst>
-        </pc:spChg>
-        <pc:spChg chg="add del mod">
-          <ac:chgData name="Fatima Pillosu" userId="a6295d4dc9e22643" providerId="LiveId" clId="{EAB401BD-D75B-4326-BBA5-5AA1FC8827A0}" dt="2024-06-26T14:41:26.078" v="742" actId="21"/>
-          <ac:spMkLst>
-            <pc:docMk/>
-            <pc:sldMk cId="2416666445" sldId="256"/>
-            <ac:spMk id="76" creationId="{F1AE0BC5-794B-D23C-A945-2D48666A380B}"/>
-          </ac:spMkLst>
-        </pc:spChg>
-        <pc:spChg chg="add del mod">
-          <ac:chgData name="Fatima Pillosu" userId="a6295d4dc9e22643" providerId="LiveId" clId="{EAB401BD-D75B-4326-BBA5-5AA1FC8827A0}" dt="2024-06-26T14:41:26.078" v="742" actId="21"/>
-          <ac:spMkLst>
-            <pc:docMk/>
-            <pc:sldMk cId="2416666445" sldId="256"/>
-            <ac:spMk id="77" creationId="{3848180B-A357-5916-14AE-BEBA0E61C958}"/>
-          </ac:spMkLst>
-        </pc:spChg>
-        <pc:spChg chg="add del mod">
-          <ac:chgData name="Fatima Pillosu" userId="a6295d4dc9e22643" providerId="LiveId" clId="{EAB401BD-D75B-4326-BBA5-5AA1FC8827A0}" dt="2024-06-26T14:41:26.078" v="742" actId="21"/>
-          <ac:spMkLst>
-            <pc:docMk/>
-            <pc:sldMk cId="2416666445" sldId="256"/>
-            <ac:spMk id="78" creationId="{F88C8933-F6FB-E197-23C5-6A6AC1467788}"/>
-          </ac:spMkLst>
-        </pc:spChg>
-        <pc:spChg chg="add del mod">
-          <ac:chgData name="Fatima Pillosu" userId="a6295d4dc9e22643" providerId="LiveId" clId="{EAB401BD-D75B-4326-BBA5-5AA1FC8827A0}" dt="2024-06-26T14:41:26.078" v="742" actId="21"/>
-          <ac:spMkLst>
-            <pc:docMk/>
-            <pc:sldMk cId="2416666445" sldId="256"/>
-            <ac:spMk id="79" creationId="{708DFDE3-CB83-C412-EE9B-B89348B18975}"/>
-          </ac:spMkLst>
-        </pc:spChg>
-        <pc:spChg chg="add del mod">
-          <ac:chgData name="Fatima Pillosu" userId="a6295d4dc9e22643" providerId="LiveId" clId="{EAB401BD-D75B-4326-BBA5-5AA1FC8827A0}" dt="2024-06-26T14:41:26.078" v="742" actId="21"/>
-          <ac:spMkLst>
-            <pc:docMk/>
-            <pc:sldMk cId="2416666445" sldId="256"/>
-            <ac:spMk id="82" creationId="{0A4512A2-4DC0-76EB-1C78-328A3FA136E0}"/>
-          </ac:spMkLst>
-        </pc:spChg>
-        <pc:spChg chg="add del mod">
-          <ac:chgData name="Fatima Pillosu" userId="a6295d4dc9e22643" providerId="LiveId" clId="{EAB401BD-D75B-4326-BBA5-5AA1FC8827A0}" dt="2024-06-26T14:41:26.078" v="742" actId="21"/>
-          <ac:spMkLst>
-            <pc:docMk/>
-            <pc:sldMk cId="2416666445" sldId="256"/>
-            <ac:spMk id="83" creationId="{AC1F07BA-7A38-7AE9-D91C-D217054E2654}"/>
-          </ac:spMkLst>
-        </pc:spChg>
-        <pc:spChg chg="add del mod">
-          <ac:chgData name="Fatima Pillosu" userId="a6295d4dc9e22643" providerId="LiveId" clId="{EAB401BD-D75B-4326-BBA5-5AA1FC8827A0}" dt="2024-06-26T14:41:26.078" v="742" actId="21"/>
-          <ac:spMkLst>
-            <pc:docMk/>
-            <pc:sldMk cId="2416666445" sldId="256"/>
-            <ac:spMk id="84" creationId="{7DD94525-DBC6-1FC2-0B07-84FAFBA131A8}"/>
-          </ac:spMkLst>
-        </pc:spChg>
-        <pc:spChg chg="add del mod">
-          <ac:chgData name="Fatima Pillosu" userId="a6295d4dc9e22643" providerId="LiveId" clId="{EAB401BD-D75B-4326-BBA5-5AA1FC8827A0}" dt="2024-06-26T14:41:26.078" v="742" actId="21"/>
-          <ac:spMkLst>
-            <pc:docMk/>
-            <pc:sldMk cId="2416666445" sldId="256"/>
-            <ac:spMk id="85" creationId="{50D9BC42-F1FE-87AB-F083-5C2242BD4E51}"/>
-          </ac:spMkLst>
-        </pc:spChg>
-        <pc:spChg chg="add del mod">
-          <ac:chgData name="Fatima Pillosu" userId="a6295d4dc9e22643" providerId="LiveId" clId="{EAB401BD-D75B-4326-BBA5-5AA1FC8827A0}" dt="2024-06-26T14:41:26.078" v="742" actId="21"/>
-          <ac:spMkLst>
-            <pc:docMk/>
-            <pc:sldMk cId="2416666445" sldId="256"/>
-            <ac:spMk id="86" creationId="{CA271F21-2E92-827F-B5C7-9933695D1A74}"/>
-          </ac:spMkLst>
-        </pc:spChg>
-        <pc:spChg chg="add del mod">
-          <ac:chgData name="Fatima Pillosu" userId="a6295d4dc9e22643" providerId="LiveId" clId="{EAB401BD-D75B-4326-BBA5-5AA1FC8827A0}" dt="2024-06-26T14:41:26.078" v="742" actId="21"/>
-          <ac:spMkLst>
-            <pc:docMk/>
-            <pc:sldMk cId="2416666445" sldId="256"/>
-            <ac:spMk id="92" creationId="{8C91D6B6-0521-29E6-9258-14B878EBB9B9}"/>
-          </ac:spMkLst>
-        </pc:spChg>
-        <pc:spChg chg="add del">
-          <ac:chgData name="Fatima Pillosu" userId="a6295d4dc9e22643" providerId="LiveId" clId="{EAB401BD-D75B-4326-BBA5-5AA1FC8827A0}" dt="2024-06-26T14:41:24.207" v="741" actId="478"/>
-          <ac:spMkLst>
-            <pc:docMk/>
-            <pc:sldMk cId="2416666445" sldId="256"/>
-            <ac:spMk id="93" creationId="{3E483CAA-E523-65D5-4FD9-4A980F63EA05}"/>
-          </ac:spMkLst>
-        </pc:spChg>
-        <pc:spChg chg="add mod">
-          <ac:chgData name="Fatima Pillosu" userId="a6295d4dc9e22643" providerId="LiveId" clId="{EAB401BD-D75B-4326-BBA5-5AA1FC8827A0}" dt="2024-06-26T14:41:44.470" v="743"/>
-          <ac:spMkLst>
-            <pc:docMk/>
-            <pc:sldMk cId="2416666445" sldId="256"/>
-            <ac:spMk id="96" creationId="{384D6C06-DC18-FF34-E84C-3BC146A8D3F9}"/>
-          </ac:spMkLst>
-        </pc:spChg>
-        <pc:spChg chg="add mod">
-          <ac:chgData name="Fatima Pillosu" userId="a6295d4dc9e22643" providerId="LiveId" clId="{EAB401BD-D75B-4326-BBA5-5AA1FC8827A0}" dt="2024-06-26T14:41:44.470" v="743"/>
-          <ac:spMkLst>
-            <pc:docMk/>
-            <pc:sldMk cId="2416666445" sldId="256"/>
-            <ac:spMk id="97" creationId="{083AEDDC-E5EB-E07A-CF91-E947C367E6C5}"/>
-          </ac:spMkLst>
-        </pc:spChg>
-        <pc:spChg chg="add mod">
-          <ac:chgData name="Fatima Pillosu" userId="a6295d4dc9e22643" providerId="LiveId" clId="{EAB401BD-D75B-4326-BBA5-5AA1FC8827A0}" dt="2024-06-26T14:41:44.470" v="743"/>
-          <ac:spMkLst>
-            <pc:docMk/>
-            <pc:sldMk cId="2416666445" sldId="256"/>
-            <ac:spMk id="98" creationId="{7EAFBB19-EFE8-1704-7506-55700BFD22E4}"/>
-          </ac:spMkLst>
-        </pc:spChg>
-        <pc:spChg chg="add mod">
-          <ac:chgData name="Fatima Pillosu" userId="a6295d4dc9e22643" providerId="LiveId" clId="{EAB401BD-D75B-4326-BBA5-5AA1FC8827A0}" dt="2024-06-26T14:41:44.470" v="743"/>
-          <ac:spMkLst>
-            <pc:docMk/>
-            <pc:sldMk cId="2416666445" sldId="256"/>
-            <ac:spMk id="99" creationId="{08E525C9-8B8B-856F-6464-CD2A9FEC19DD}"/>
-          </ac:spMkLst>
-        </pc:spChg>
-        <pc:spChg chg="add mod">
-          <ac:chgData name="Fatima Pillosu" userId="a6295d4dc9e22643" providerId="LiveId" clId="{EAB401BD-D75B-4326-BBA5-5AA1FC8827A0}" dt="2024-06-26T14:41:44.470" v="743"/>
-          <ac:spMkLst>
-            <pc:docMk/>
-            <pc:sldMk cId="2416666445" sldId="256"/>
-            <ac:spMk id="100" creationId="{823987BF-6FA7-EC5E-C5ED-325313D2AE59}"/>
-          </ac:spMkLst>
-        </pc:spChg>
-        <pc:spChg chg="add mod">
-          <ac:chgData name="Fatima Pillosu" userId="a6295d4dc9e22643" providerId="LiveId" clId="{EAB401BD-D75B-4326-BBA5-5AA1FC8827A0}" dt="2024-06-26T14:41:44.470" v="743"/>
-          <ac:spMkLst>
-            <pc:docMk/>
-            <pc:sldMk cId="2416666445" sldId="256"/>
-            <ac:spMk id="101" creationId="{26903909-39B6-BA49-59C4-AF4507DF29BF}"/>
-          </ac:spMkLst>
-        </pc:spChg>
-        <pc:spChg chg="add mod">
-          <ac:chgData name="Fatima Pillosu" userId="a6295d4dc9e22643" providerId="LiveId" clId="{EAB401BD-D75B-4326-BBA5-5AA1FC8827A0}" dt="2024-06-26T14:41:44.470" v="743"/>
-          <ac:spMkLst>
-            <pc:docMk/>
-            <pc:sldMk cId="2416666445" sldId="256"/>
-            <ac:spMk id="102" creationId="{0C834787-FEEB-B977-952A-288699762B58}"/>
-          </ac:spMkLst>
-        </pc:spChg>
-        <pc:spChg chg="add mod">
-          <ac:chgData name="Fatima Pillosu" userId="a6295d4dc9e22643" providerId="LiveId" clId="{EAB401BD-D75B-4326-BBA5-5AA1FC8827A0}" dt="2024-06-26T14:41:44.470" v="743"/>
-          <ac:spMkLst>
-            <pc:docMk/>
-            <pc:sldMk cId="2416666445" sldId="256"/>
-            <ac:spMk id="103" creationId="{61400BA6-3D3A-1190-AD65-CF1147A3BCBC}"/>
-          </ac:spMkLst>
-        </pc:spChg>
-        <pc:spChg chg="add mod">
-          <ac:chgData name="Fatima Pillosu" userId="a6295d4dc9e22643" providerId="LiveId" clId="{EAB401BD-D75B-4326-BBA5-5AA1FC8827A0}" dt="2024-06-26T14:41:44.470" v="743"/>
-          <ac:spMkLst>
-            <pc:docMk/>
-            <pc:sldMk cId="2416666445" sldId="256"/>
-            <ac:spMk id="104" creationId="{F77F9084-F223-ED65-669A-F6F51F897BA2}"/>
-          </ac:spMkLst>
-        </pc:spChg>
-        <pc:spChg chg="add mod">
-          <ac:chgData name="Fatima Pillosu" userId="a6295d4dc9e22643" providerId="LiveId" clId="{EAB401BD-D75B-4326-BBA5-5AA1FC8827A0}" dt="2024-06-26T14:41:44.470" v="743"/>
-          <ac:spMkLst>
-            <pc:docMk/>
-            <pc:sldMk cId="2416666445" sldId="256"/>
-            <ac:spMk id="105" creationId="{E58B7622-486E-AF0A-77FA-6A257F911DE9}"/>
-          </ac:spMkLst>
-        </pc:spChg>
-        <pc:spChg chg="add mod">
-          <ac:chgData name="Fatima Pillosu" userId="a6295d4dc9e22643" providerId="LiveId" clId="{EAB401BD-D75B-4326-BBA5-5AA1FC8827A0}" dt="2024-06-26T14:41:44.470" v="743"/>
-          <ac:spMkLst>
-            <pc:docMk/>
-            <pc:sldMk cId="2416666445" sldId="256"/>
-            <ac:spMk id="106" creationId="{53D672B0-A6EA-4276-A5B9-C5164A9A326F}"/>
-          </ac:spMkLst>
-        </pc:spChg>
-        <pc:spChg chg="add mod">
-          <ac:chgData name="Fatima Pillosu" userId="a6295d4dc9e22643" providerId="LiveId" clId="{EAB401BD-D75B-4326-BBA5-5AA1FC8827A0}" dt="2024-06-26T14:41:44.470" v="743"/>
-          <ac:spMkLst>
-            <pc:docMk/>
-            <pc:sldMk cId="2416666445" sldId="256"/>
-            <ac:spMk id="107" creationId="{FC073318-9596-D679-740B-BA408BA68B78}"/>
-          </ac:spMkLst>
-        </pc:spChg>
-        <pc:spChg chg="add mod">
-          <ac:chgData name="Fatima Pillosu" userId="a6295d4dc9e22643" providerId="LiveId" clId="{EAB401BD-D75B-4326-BBA5-5AA1FC8827A0}" dt="2024-06-26T14:41:44.470" v="743"/>
-          <ac:spMkLst>
-            <pc:docMk/>
-            <pc:sldMk cId="2416666445" sldId="256"/>
-            <ac:spMk id="108" creationId="{95D8CFCC-5F17-C4D6-6F70-8501F37736D8}"/>
-          </ac:spMkLst>
-        </pc:spChg>
-        <pc:spChg chg="add mod">
-          <ac:chgData name="Fatima Pillosu" userId="a6295d4dc9e22643" providerId="LiveId" clId="{EAB401BD-D75B-4326-BBA5-5AA1FC8827A0}" dt="2024-06-26T14:41:44.470" v="743"/>
-          <ac:spMkLst>
-            <pc:docMk/>
-            <pc:sldMk cId="2416666445" sldId="256"/>
-            <ac:spMk id="109" creationId="{E06CF797-8451-574D-21F0-384E8A3452B7}"/>
-          </ac:spMkLst>
-        </pc:spChg>
-        <pc:spChg chg="add mod">
-          <ac:chgData name="Fatima Pillosu" userId="a6295d4dc9e22643" providerId="LiveId" clId="{EAB401BD-D75B-4326-BBA5-5AA1FC8827A0}" dt="2024-06-26T14:41:44.470" v="743"/>
-          <ac:spMkLst>
-            <pc:docMk/>
-            <pc:sldMk cId="2416666445" sldId="256"/>
-            <ac:spMk id="110" creationId="{CFB3D8FA-6A39-82FF-7103-9C3B87E3F64B}"/>
-          </ac:spMkLst>
-        </pc:spChg>
-        <pc:spChg chg="add mod">
-          <ac:chgData name="Fatima Pillosu" userId="a6295d4dc9e22643" providerId="LiveId" clId="{EAB401BD-D75B-4326-BBA5-5AA1FC8827A0}" dt="2024-06-26T14:41:44.470" v="743"/>
-          <ac:spMkLst>
-            <pc:docMk/>
-            <pc:sldMk cId="2416666445" sldId="256"/>
-            <ac:spMk id="111" creationId="{5B2D0398-5206-B218-FB65-5E89CE52B185}"/>
-          </ac:spMkLst>
-        </pc:spChg>
-        <pc:spChg chg="add mod">
-          <ac:chgData name="Fatima Pillosu" userId="a6295d4dc9e22643" providerId="LiveId" clId="{EAB401BD-D75B-4326-BBA5-5AA1FC8827A0}" dt="2024-06-26T14:41:44.470" v="743"/>
-          <ac:spMkLst>
-            <pc:docMk/>
-            <pc:sldMk cId="2416666445" sldId="256"/>
-            <ac:spMk id="112" creationId="{E8F93690-0FC3-3203-F616-27D0636BD86D}"/>
-          </ac:spMkLst>
-        </pc:spChg>
-        <pc:spChg chg="add mod">
-          <ac:chgData name="Fatima Pillosu" userId="a6295d4dc9e22643" providerId="LiveId" clId="{EAB401BD-D75B-4326-BBA5-5AA1FC8827A0}" dt="2024-06-26T14:41:44.470" v="743"/>
-          <ac:spMkLst>
-            <pc:docMk/>
-            <pc:sldMk cId="2416666445" sldId="256"/>
-            <ac:spMk id="113" creationId="{98EE0CB6-A0DD-61DA-6B6B-D4EC8957FF3D}"/>
-          </ac:spMkLst>
-        </pc:spChg>
-        <pc:spChg chg="add mod">
-          <ac:chgData name="Fatima Pillosu" userId="a6295d4dc9e22643" providerId="LiveId" clId="{EAB401BD-D75B-4326-BBA5-5AA1FC8827A0}" dt="2024-06-26T14:41:44.470" v="743"/>
-          <ac:spMkLst>
-            <pc:docMk/>
-            <pc:sldMk cId="2416666445" sldId="256"/>
-            <ac:spMk id="114" creationId="{5C604597-7B68-19A8-35F6-C8E80447309D}"/>
-          </ac:spMkLst>
-        </pc:spChg>
-        <pc:spChg chg="add mod">
-          <ac:chgData name="Fatima Pillosu" userId="a6295d4dc9e22643" providerId="LiveId" clId="{EAB401BD-D75B-4326-BBA5-5AA1FC8827A0}" dt="2024-06-26T14:41:44.470" v="743"/>
-          <ac:spMkLst>
-            <pc:docMk/>
-            <pc:sldMk cId="2416666445" sldId="256"/>
-            <ac:spMk id="115" creationId="{37EBCA7E-9713-7AE3-638B-C84D5A1C2253}"/>
-          </ac:spMkLst>
-        </pc:spChg>
-        <pc:spChg chg="add mod">
-          <ac:chgData name="Fatima Pillosu" userId="a6295d4dc9e22643" providerId="LiveId" clId="{EAB401BD-D75B-4326-BBA5-5AA1FC8827A0}" dt="2024-06-26T14:41:44.470" v="743"/>
-          <ac:spMkLst>
-            <pc:docMk/>
-            <pc:sldMk cId="2416666445" sldId="256"/>
-            <ac:spMk id="116" creationId="{65B70626-067E-1AE7-11BD-EC7DA8DABC28}"/>
-          </ac:spMkLst>
-        </pc:spChg>
-        <pc:spChg chg="add mod">
-          <ac:chgData name="Fatima Pillosu" userId="a6295d4dc9e22643" providerId="LiveId" clId="{EAB401BD-D75B-4326-BBA5-5AA1FC8827A0}" dt="2024-06-26T14:41:44.470" v="743"/>
-          <ac:spMkLst>
-            <pc:docMk/>
-            <pc:sldMk cId="2416666445" sldId="256"/>
-            <ac:spMk id="117" creationId="{C7BCE81D-7A63-8764-295C-1A6242CC4274}"/>
-          </ac:spMkLst>
-        </pc:spChg>
-        <pc:spChg chg="add mod">
-          <ac:chgData name="Fatima Pillosu" userId="a6295d4dc9e22643" providerId="LiveId" clId="{EAB401BD-D75B-4326-BBA5-5AA1FC8827A0}" dt="2024-06-26T14:41:44.470" v="743"/>
-          <ac:spMkLst>
-            <pc:docMk/>
-            <pc:sldMk cId="2416666445" sldId="256"/>
-            <ac:spMk id="118" creationId="{A6515F5F-2E20-7D13-537C-F772A00535F4}"/>
-          </ac:spMkLst>
-        </pc:spChg>
-        <pc:spChg chg="add mod">
-          <ac:chgData name="Fatima Pillosu" userId="a6295d4dc9e22643" providerId="LiveId" clId="{EAB401BD-D75B-4326-BBA5-5AA1FC8827A0}" dt="2024-06-26T14:41:44.470" v="743"/>
-          <ac:spMkLst>
-            <pc:docMk/>
-            <pc:sldMk cId="2416666445" sldId="256"/>
-            <ac:spMk id="119" creationId="{50B578E0-62E1-B8F6-ECD2-2E7AA0CF70F9}"/>
-          </ac:spMkLst>
-        </pc:spChg>
-        <pc:spChg chg="add mod">
-          <ac:chgData name="Fatima Pillosu" userId="a6295d4dc9e22643" providerId="LiveId" clId="{EAB401BD-D75B-4326-BBA5-5AA1FC8827A0}" dt="2024-06-26T14:41:44.470" v="743"/>
-          <ac:spMkLst>
-            <pc:docMk/>
-            <pc:sldMk cId="2416666445" sldId="256"/>
-            <ac:spMk id="120" creationId="{F4D19594-8958-5678-A91A-D009CFEE0A3F}"/>
-          </ac:spMkLst>
-        </pc:spChg>
-        <pc:spChg chg="add mod">
-          <ac:chgData name="Fatima Pillosu" userId="a6295d4dc9e22643" providerId="LiveId" clId="{EAB401BD-D75B-4326-BBA5-5AA1FC8827A0}" dt="2024-06-26T14:41:44.470" v="743"/>
-          <ac:spMkLst>
-            <pc:docMk/>
-            <pc:sldMk cId="2416666445" sldId="256"/>
-            <ac:spMk id="121" creationId="{5ED4F7E3-EC48-9668-BA84-2D97CF23BD85}"/>
-          </ac:spMkLst>
-        </pc:spChg>
-        <pc:spChg chg="add mod">
-          <ac:chgData name="Fatima Pillosu" userId="a6295d4dc9e22643" providerId="LiveId" clId="{EAB401BD-D75B-4326-BBA5-5AA1FC8827A0}" dt="2024-06-26T14:41:44.470" v="743"/>
-          <ac:spMkLst>
-            <pc:docMk/>
-            <pc:sldMk cId="2416666445" sldId="256"/>
-            <ac:spMk id="122" creationId="{0ECA7152-99C7-A2F4-E83D-4F855AAFA37C}"/>
-          </ac:spMkLst>
-        </pc:spChg>
-        <pc:spChg chg="add mod">
-          <ac:chgData name="Fatima Pillosu" userId="a6295d4dc9e22643" providerId="LiveId" clId="{EAB401BD-D75B-4326-BBA5-5AA1FC8827A0}" dt="2024-06-26T14:41:44.470" v="743"/>
-          <ac:spMkLst>
-            <pc:docMk/>
-            <pc:sldMk cId="2416666445" sldId="256"/>
-            <ac:spMk id="123" creationId="{9FA7FCAD-7DCD-492E-33EA-E8EA0A4B7A03}"/>
-          </ac:spMkLst>
-        </pc:spChg>
-        <pc:spChg chg="add mod">
-          <ac:chgData name="Fatima Pillosu" userId="a6295d4dc9e22643" providerId="LiveId" clId="{EAB401BD-D75B-4326-BBA5-5AA1FC8827A0}" dt="2024-06-26T14:41:44.470" v="743"/>
-          <ac:spMkLst>
-            <pc:docMk/>
-            <pc:sldMk cId="2416666445" sldId="256"/>
-            <ac:spMk id="124" creationId="{27112713-98E8-0868-E1E6-C5213A18CDB4}"/>
-          </ac:spMkLst>
-        </pc:spChg>
-        <pc:spChg chg="add mod">
-          <ac:chgData name="Fatima Pillosu" userId="a6295d4dc9e22643" providerId="LiveId" clId="{EAB401BD-D75B-4326-BBA5-5AA1FC8827A0}" dt="2024-06-26T14:41:44.470" v="743"/>
-          <ac:spMkLst>
-            <pc:docMk/>
-            <pc:sldMk cId="2416666445" sldId="256"/>
-            <ac:spMk id="125" creationId="{A9DF4E4E-4BD6-4A43-6D8D-57FA7E5B4C8A}"/>
-          </ac:spMkLst>
-        </pc:spChg>
-        <pc:spChg chg="add mod">
-          <ac:chgData name="Fatima Pillosu" userId="a6295d4dc9e22643" providerId="LiveId" clId="{EAB401BD-D75B-4326-BBA5-5AA1FC8827A0}" dt="2024-06-26T14:41:44.470" v="743"/>
-          <ac:spMkLst>
-            <pc:docMk/>
-            <pc:sldMk cId="2416666445" sldId="256"/>
-            <ac:spMk id="126" creationId="{F880BE35-27AF-2DCD-5D81-D484CE796AE1}"/>
-          </ac:spMkLst>
-        </pc:spChg>
-        <pc:spChg chg="add mod">
-          <ac:chgData name="Fatima Pillosu" userId="a6295d4dc9e22643" providerId="LiveId" clId="{EAB401BD-D75B-4326-BBA5-5AA1FC8827A0}" dt="2024-06-26T14:41:44.470" v="743"/>
-          <ac:spMkLst>
-            <pc:docMk/>
-            <pc:sldMk cId="2416666445" sldId="256"/>
-            <ac:spMk id="127" creationId="{EA8BFD8B-1858-9531-2319-F3352B9FCE3E}"/>
-          </ac:spMkLst>
-        </pc:spChg>
-        <pc:spChg chg="add mod">
-          <ac:chgData name="Fatima Pillosu" userId="a6295d4dc9e22643" providerId="LiveId" clId="{EAB401BD-D75B-4326-BBA5-5AA1FC8827A0}" dt="2024-06-26T14:41:44.470" v="743"/>
-          <ac:spMkLst>
-            <pc:docMk/>
-            <pc:sldMk cId="2416666445" sldId="256"/>
-            <ac:spMk id="128" creationId="{804E7FEC-AF83-FD28-4A16-70D6430EB6E5}"/>
-          </ac:spMkLst>
-        </pc:spChg>
-        <pc:spChg chg="add mod">
-          <ac:chgData name="Fatima Pillosu" userId="a6295d4dc9e22643" providerId="LiveId" clId="{EAB401BD-D75B-4326-BBA5-5AA1FC8827A0}" dt="2024-06-26T14:41:44.470" v="743"/>
-          <ac:spMkLst>
-            <pc:docMk/>
-            <pc:sldMk cId="2416666445" sldId="256"/>
-            <ac:spMk id="129" creationId="{F1AE0BC5-794B-D23C-A945-2D48666A380B}"/>
-          </ac:spMkLst>
-        </pc:spChg>
-        <pc:spChg chg="add mod">
-          <ac:chgData name="Fatima Pillosu" userId="a6295d4dc9e22643" providerId="LiveId" clId="{EAB401BD-D75B-4326-BBA5-5AA1FC8827A0}" dt="2024-06-26T14:41:44.470" v="743"/>
-          <ac:spMkLst>
-            <pc:docMk/>
-            <pc:sldMk cId="2416666445" sldId="256"/>
-            <ac:spMk id="130" creationId="{3848180B-A357-5916-14AE-BEBA0E61C958}"/>
-          </ac:spMkLst>
-        </pc:spChg>
-        <pc:spChg chg="add mod">
-          <ac:chgData name="Fatima Pillosu" userId="a6295d4dc9e22643" providerId="LiveId" clId="{EAB401BD-D75B-4326-BBA5-5AA1FC8827A0}" dt="2024-06-26T14:41:44.470" v="743"/>
-          <ac:spMkLst>
-            <pc:docMk/>
-            <pc:sldMk cId="2416666445" sldId="256"/>
-            <ac:spMk id="131" creationId="{F88C8933-F6FB-E197-23C5-6A6AC1467788}"/>
-          </ac:spMkLst>
-        </pc:spChg>
-        <pc:spChg chg="add mod">
-          <ac:chgData name="Fatima Pillosu" userId="a6295d4dc9e22643" providerId="LiveId" clId="{EAB401BD-D75B-4326-BBA5-5AA1FC8827A0}" dt="2024-06-26T14:41:44.470" v="743"/>
-          <ac:spMkLst>
-            <pc:docMk/>
-            <pc:sldMk cId="2416666445" sldId="256"/>
-            <ac:spMk id="132" creationId="{708DFDE3-CB83-C412-EE9B-B89348B18975}"/>
-          </ac:spMkLst>
-        </pc:spChg>
-        <pc:spChg chg="add mod">
-          <ac:chgData name="Fatima Pillosu" userId="a6295d4dc9e22643" providerId="LiveId" clId="{EAB401BD-D75B-4326-BBA5-5AA1FC8827A0}" dt="2024-06-26T14:41:44.470" v="743"/>
-          <ac:spMkLst>
-            <pc:docMk/>
-            <pc:sldMk cId="2416666445" sldId="256"/>
-            <ac:spMk id="133" creationId="{0A4512A2-4DC0-76EB-1C78-328A3FA136E0}"/>
-          </ac:spMkLst>
-        </pc:spChg>
-        <pc:spChg chg="add mod">
-          <ac:chgData name="Fatima Pillosu" userId="a6295d4dc9e22643" providerId="LiveId" clId="{EAB401BD-D75B-4326-BBA5-5AA1FC8827A0}" dt="2024-06-26T14:41:44.470" v="743"/>
-          <ac:spMkLst>
-            <pc:docMk/>
-            <pc:sldMk cId="2416666445" sldId="256"/>
-            <ac:spMk id="134" creationId="{AC1F07BA-7A38-7AE9-D91C-D217054E2654}"/>
-          </ac:spMkLst>
-        </pc:spChg>
-        <pc:spChg chg="add mod">
-          <ac:chgData name="Fatima Pillosu" userId="a6295d4dc9e22643" providerId="LiveId" clId="{EAB401BD-D75B-4326-BBA5-5AA1FC8827A0}" dt="2024-06-26T14:41:44.470" v="743"/>
-          <ac:spMkLst>
-            <pc:docMk/>
-            <pc:sldMk cId="2416666445" sldId="256"/>
-            <ac:spMk id="135" creationId="{7DD94525-DBC6-1FC2-0B07-84FAFBA131A8}"/>
-          </ac:spMkLst>
-        </pc:spChg>
-        <pc:spChg chg="add mod">
-          <ac:chgData name="Fatima Pillosu" userId="a6295d4dc9e22643" providerId="LiveId" clId="{EAB401BD-D75B-4326-BBA5-5AA1FC8827A0}" dt="2024-06-26T14:41:44.470" v="743"/>
-          <ac:spMkLst>
-            <pc:docMk/>
-            <pc:sldMk cId="2416666445" sldId="256"/>
-            <ac:spMk id="136" creationId="{50D9BC42-F1FE-87AB-F083-5C2242BD4E51}"/>
-          </ac:spMkLst>
-        </pc:spChg>
-        <pc:spChg chg="add mod">
-          <ac:chgData name="Fatima Pillosu" userId="a6295d4dc9e22643" providerId="LiveId" clId="{EAB401BD-D75B-4326-BBA5-5AA1FC8827A0}" dt="2024-06-26T14:41:44.470" v="743"/>
-          <ac:spMkLst>
-            <pc:docMk/>
-            <pc:sldMk cId="2416666445" sldId="256"/>
-            <ac:spMk id="137" creationId="{CA271F21-2E92-827F-B5C7-9933695D1A74}"/>
-          </ac:spMkLst>
-        </pc:spChg>
-        <pc:spChg chg="add mod">
-          <ac:chgData name="Fatima Pillosu" userId="a6295d4dc9e22643" providerId="LiveId" clId="{EAB401BD-D75B-4326-BBA5-5AA1FC8827A0}" dt="2024-06-26T14:41:44.470" v="743"/>
-          <ac:spMkLst>
-            <pc:docMk/>
-            <pc:sldMk cId="2416666445" sldId="256"/>
-            <ac:spMk id="138" creationId="{8C91D6B6-0521-29E6-9258-14B878EBB9B9}"/>
-          </ac:spMkLst>
-        </pc:spChg>
-        <pc:picChg chg="add del mod">
-          <ac:chgData name="Fatima Pillosu" userId="a6295d4dc9e22643" providerId="LiveId" clId="{EAB401BD-D75B-4326-BBA5-5AA1FC8827A0}" dt="2024-06-26T13:47:10.807" v="69" actId="478"/>
-          <ac:picMkLst>
-            <pc:docMk/>
-            <pc:sldMk cId="2416666445" sldId="256"/>
-            <ac:picMk id="2" creationId="{26908AE7-C0D0-8126-9CD1-65F862CA33AA}"/>
-          </ac:picMkLst>
-        </pc:picChg>
-        <pc:picChg chg="del">
-          <ac:chgData name="Fatima Pillosu" userId="a6295d4dc9e22643" providerId="LiveId" clId="{EAB401BD-D75B-4326-BBA5-5AA1FC8827A0}" dt="2024-06-26T13:42:02.546" v="2" actId="21"/>
-          <ac:picMkLst>
-            <pc:docMk/>
-            <pc:sldMk cId="2416666445" sldId="256"/>
-            <ac:picMk id="3" creationId="{26908AE7-C0D0-8126-9CD1-65F862CA33AA}"/>
-          </ac:picMkLst>
-        </pc:picChg>
-        <pc:picChg chg="del">
-          <ac:chgData name="Fatima Pillosu" userId="a6295d4dc9e22643" providerId="LiveId" clId="{EAB401BD-D75B-4326-BBA5-5AA1FC8827A0}" dt="2024-06-26T13:42:02.546" v="2" actId="21"/>
-          <ac:picMkLst>
-            <pc:docMk/>
-            <pc:sldMk cId="2416666445" sldId="256"/>
-            <ac:picMk id="4" creationId="{C0EA9BA7-9BA3-87E1-85A9-F8ACC1C32D13}"/>
-          </ac:picMkLst>
-        </pc:picChg>
-        <pc:picChg chg="add del mod">
-          <ac:chgData name="Fatima Pillosu" userId="a6295d4dc9e22643" providerId="LiveId" clId="{EAB401BD-D75B-4326-BBA5-5AA1FC8827A0}" dt="2024-06-26T14:41:26.078" v="742" actId="21"/>
-          <ac:picMkLst>
-            <pc:docMk/>
-            <pc:sldMk cId="2416666445" sldId="256"/>
-            <ac:picMk id="42" creationId="{C0EA9BA7-9BA3-87E1-85A9-F8ACC1C32D13}"/>
-          </ac:picMkLst>
-        </pc:picChg>
-        <pc:picChg chg="add del mod ord modCrop">
-          <ac:chgData name="Fatima Pillosu" userId="a6295d4dc9e22643" providerId="LiveId" clId="{EAB401BD-D75B-4326-BBA5-5AA1FC8827A0}" dt="2024-06-26T14:41:26.078" v="742" actId="21"/>
-          <ac:picMkLst>
-            <pc:docMk/>
-            <pc:sldMk cId="2416666445" sldId="256"/>
-            <ac:picMk id="81" creationId="{5576DFB5-07C9-9C7F-52D6-98F487E9338C}"/>
-          </ac:picMkLst>
-        </pc:picChg>
-        <pc:picChg chg="add del mod">
-          <ac:chgData name="Fatima Pillosu" userId="a6295d4dc9e22643" providerId="LiveId" clId="{EAB401BD-D75B-4326-BBA5-5AA1FC8827A0}" dt="2024-06-26T14:05:56.006" v="497" actId="478"/>
-          <ac:picMkLst>
-            <pc:docMk/>
-            <pc:sldMk cId="2416666445" sldId="256"/>
-            <ac:picMk id="88" creationId="{CED66C13-B040-DB7C-A2AB-AA442847B9B6}"/>
-          </ac:picMkLst>
-        </pc:picChg>
-        <pc:picChg chg="add del mod modCrop">
-          <ac:chgData name="Fatima Pillosu" userId="a6295d4dc9e22643" providerId="LiveId" clId="{EAB401BD-D75B-4326-BBA5-5AA1FC8827A0}" dt="2024-06-26T14:35:23.655" v="520" actId="478"/>
-          <ac:picMkLst>
-            <pc:docMk/>
-            <pc:sldMk cId="2416666445" sldId="256"/>
-            <ac:picMk id="90" creationId="{0FFBA09A-2C5E-C3EF-4B32-BF862873BAF8}"/>
-          </ac:picMkLst>
-        </pc:picChg>
-        <pc:picChg chg="add del mod modCrop">
-          <ac:chgData name="Fatima Pillosu" userId="a6295d4dc9e22643" providerId="LiveId" clId="{EAB401BD-D75B-4326-BBA5-5AA1FC8827A0}" dt="2024-06-26T14:35:19.574" v="519" actId="478"/>
-          <ac:picMkLst>
-            <pc:docMk/>
-            <pc:sldMk cId="2416666445" sldId="256"/>
-            <ac:picMk id="91" creationId="{51B13823-CBF0-DD61-BD1C-99275AED7BE8}"/>
-          </ac:picMkLst>
-        </pc:picChg>
-        <pc:picChg chg="add mod">
-          <ac:chgData name="Fatima Pillosu" userId="a6295d4dc9e22643" providerId="LiveId" clId="{EAB401BD-D75B-4326-BBA5-5AA1FC8827A0}" dt="2024-06-26T14:41:44.470" v="743"/>
-          <ac:picMkLst>
-            <pc:docMk/>
-            <pc:sldMk cId="2416666445" sldId="256"/>
-            <ac:picMk id="94" creationId="{5576DFB5-07C9-9C7F-52D6-98F487E9338C}"/>
-          </ac:picMkLst>
-        </pc:picChg>
-        <pc:picChg chg="add mod">
-          <ac:chgData name="Fatima Pillosu" userId="a6295d4dc9e22643" providerId="LiveId" clId="{EAB401BD-D75B-4326-BBA5-5AA1FC8827A0}" dt="2024-06-26T14:41:44.470" v="743"/>
-          <ac:picMkLst>
-            <pc:docMk/>
-            <pc:sldMk cId="2416666445" sldId="256"/>
-            <ac:picMk id="95" creationId="{C0EA9BA7-9BA3-87E1-85A9-F8ACC1C32D13}"/>
-          </ac:picMkLst>
-        </pc:picChg>
       </pc:sldChg>
     </pc:docChg>
   </pc:docChgLst>
@@ -3464,7 +272,7 @@
           <a:p>
             <a:fld id="{2302334F-977D-4A43-BDB9-11086BF63D6E}" type="datetimeFigureOut">
               <a:rPr lang="en-GB" smtClean="0"/>
-              <a:t>26/05/2025</a:t>
+              <a:t>19/01/2026</a:t>
             </a:fld>
             <a:endParaRPr lang="en-GB"/>
           </a:p>
@@ -3634,7 +442,7 @@
           <a:p>
             <a:fld id="{2302334F-977D-4A43-BDB9-11086BF63D6E}" type="datetimeFigureOut">
               <a:rPr lang="en-GB" smtClean="0"/>
-              <a:t>26/05/2025</a:t>
+              <a:t>19/01/2026</a:t>
             </a:fld>
             <a:endParaRPr lang="en-GB"/>
           </a:p>
@@ -3814,7 +622,7 @@
           <a:p>
             <a:fld id="{2302334F-977D-4A43-BDB9-11086BF63D6E}" type="datetimeFigureOut">
               <a:rPr lang="en-GB" smtClean="0"/>
-              <a:t>26/05/2025</a:t>
+              <a:t>19/01/2026</a:t>
             </a:fld>
             <a:endParaRPr lang="en-GB"/>
           </a:p>
@@ -3984,7 +792,7 @@
           <a:p>
             <a:fld id="{2302334F-977D-4A43-BDB9-11086BF63D6E}" type="datetimeFigureOut">
               <a:rPr lang="en-GB" smtClean="0"/>
-              <a:t>26/05/2025</a:t>
+              <a:t>19/01/2026</a:t>
             </a:fld>
             <a:endParaRPr lang="en-GB"/>
           </a:p>
@@ -4230,7 +1038,7 @@
           <a:p>
             <a:fld id="{2302334F-977D-4A43-BDB9-11086BF63D6E}" type="datetimeFigureOut">
               <a:rPr lang="en-GB" smtClean="0"/>
-              <a:t>26/05/2025</a:t>
+              <a:t>19/01/2026</a:t>
             </a:fld>
             <a:endParaRPr lang="en-GB"/>
           </a:p>
@@ -4462,7 +1270,7 @@
           <a:p>
             <a:fld id="{2302334F-977D-4A43-BDB9-11086BF63D6E}" type="datetimeFigureOut">
               <a:rPr lang="en-GB" smtClean="0"/>
-              <a:t>26/05/2025</a:t>
+              <a:t>19/01/2026</a:t>
             </a:fld>
             <a:endParaRPr lang="en-GB"/>
           </a:p>
@@ -4829,7 +1637,7 @@
           <a:p>
             <a:fld id="{2302334F-977D-4A43-BDB9-11086BF63D6E}" type="datetimeFigureOut">
               <a:rPr lang="en-GB" smtClean="0"/>
-              <a:t>26/05/2025</a:t>
+              <a:t>19/01/2026</a:t>
             </a:fld>
             <a:endParaRPr lang="en-GB"/>
           </a:p>
@@ -4947,7 +1755,7 @@
           <a:p>
             <a:fld id="{2302334F-977D-4A43-BDB9-11086BF63D6E}" type="datetimeFigureOut">
               <a:rPr lang="en-GB" smtClean="0"/>
-              <a:t>26/05/2025</a:t>
+              <a:t>19/01/2026</a:t>
             </a:fld>
             <a:endParaRPr lang="en-GB"/>
           </a:p>
@@ -5042,7 +1850,7 @@
           <a:p>
             <a:fld id="{2302334F-977D-4A43-BDB9-11086BF63D6E}" type="datetimeFigureOut">
               <a:rPr lang="en-GB" smtClean="0"/>
-              <a:t>26/05/2025</a:t>
+              <a:t>19/01/2026</a:t>
             </a:fld>
             <a:endParaRPr lang="en-GB"/>
           </a:p>
@@ -5319,7 +2127,7 @@
           <a:p>
             <a:fld id="{2302334F-977D-4A43-BDB9-11086BF63D6E}" type="datetimeFigureOut">
               <a:rPr lang="en-GB" smtClean="0"/>
-              <a:t>26/05/2025</a:t>
+              <a:t>19/01/2026</a:t>
             </a:fld>
             <a:endParaRPr lang="en-GB"/>
           </a:p>
@@ -5576,7 +2384,7 @@
           <a:p>
             <a:fld id="{2302334F-977D-4A43-BDB9-11086BF63D6E}" type="datetimeFigureOut">
               <a:rPr lang="en-GB" smtClean="0"/>
-              <a:t>26/05/2025</a:t>
+              <a:t>19/01/2026</a:t>
             </a:fld>
             <a:endParaRPr lang="en-GB"/>
           </a:p>
@@ -5789,7 +2597,7 @@
           <a:p>
             <a:fld id="{2302334F-977D-4A43-BDB9-11086BF63D6E}" type="datetimeFigureOut">
               <a:rPr lang="en-GB" smtClean="0"/>
-              <a:t>26/05/2025</a:t>
+              <a:t>19/01/2026</a:t>
             </a:fld>
             <a:endParaRPr lang="en-GB"/>
           </a:p>
@@ -8183,7 +4991,27 @@
                 <a:latin typeface="Calibri Light" panose="020F0302020204030204" pitchFamily="34" charset="0"/>
                 <a:cs typeface="Calibri Light" panose="020F0302020204030204" pitchFamily="34" charset="0"/>
               </a:rPr>
-              <a:t>Orography at 1km and location of the 25 most populated cities</a:t>
+              <a:t>Orography </a:t>
+            </a:r>
+            <a:r>
+              <a:rPr lang="en-US" sz="1000">
+                <a:solidFill>
+                  <a:srgbClr val="333333"/>
+                </a:solidFill>
+                <a:latin typeface="Calibri Light" panose="020F0302020204030204" pitchFamily="34" charset="0"/>
+                <a:cs typeface="Calibri Light" panose="020F0302020204030204" pitchFamily="34" charset="0"/>
+              </a:rPr>
+              <a:t>at 1 km </a:t>
+            </a:r>
+            <a:r>
+              <a:rPr lang="en-US" sz="1000" dirty="0">
+                <a:solidFill>
+                  <a:srgbClr val="333333"/>
+                </a:solidFill>
+                <a:latin typeface="Calibri Light" panose="020F0302020204030204" pitchFamily="34" charset="0"/>
+                <a:cs typeface="Calibri Light" panose="020F0302020204030204" pitchFamily="34" charset="0"/>
+              </a:rPr>
+              <a:t>and location of the 25 most populated cities</a:t>
             </a:r>
             <a:endParaRPr lang="en-GB" sz="1000" u="sng" dirty="0">
               <a:solidFill>
